--- a/Fase 1/Evidencias Grupales/Presentación Proyecto.pptx
+++ b/Fase 1/Evidencias Grupales/Presentación Proyecto.pptx
@@ -4,6 +4,9 @@
   <p:sldMasterIdLst>
     <p:sldMasterId id="2147483648" r:id="rId1"/>
   </p:sldMasterIdLst>
+  <p:notesMasterIdLst>
+    <p:notesMasterId r:id="rId11"/>
+  </p:notesMasterIdLst>
   <p:sldIdLst>
     <p:sldId id="256" r:id="rId2"/>
     <p:sldId id="257" r:id="rId3"/>
@@ -20,11 +23,11 @@
   <p:embeddedFontLst>
     <p:embeddedFont>
       <p:font typeface="Montserrat Bold" panose="020B0604020202020204" charset="0"/>
-      <p:regular r:id="rId11"/>
+      <p:regular r:id="rId12"/>
     </p:embeddedFont>
     <p:embeddedFont>
       <p:font typeface="Source Sans 3" panose="020B0604020202020204" charset="0"/>
-      <p:regular r:id="rId12"/>
+      <p:regular r:id="rId13"/>
     </p:embeddedFont>
   </p:embeddedFontLst>
   <p:defaultTextStyle>
@@ -125,7 +128,7 @@
   <p:extLst>
     <p:ext uri="{EFAFB233-063F-42B5-8137-9DF3F51BA10A}">
       <p15:sldGuideLst xmlns:p15="http://schemas.microsoft.com/office/powerpoint/2012/main">
-        <p15:guide id="1" orient="horz" pos="2160">
+        <p15:guide id="1" orient="horz" pos="1608" userDrawn="1">
           <p15:clr>
             <a:srgbClr val="A4A3A4"/>
           </p15:clr>
@@ -139,6 +142,440 @@
     </p:ext>
   </p:extLst>
 </p:presentation>
+</file>
+
+<file path=ppt/notesMasters/notesMaster1.xml><?xml version="1.0" encoding="utf-8"?>
+<p:notesMaster xmlns:a="http://schemas.openxmlformats.org/drawingml/2006/main" xmlns:r="http://schemas.openxmlformats.org/officeDocument/2006/relationships" xmlns:p="http://schemas.openxmlformats.org/presentationml/2006/main">
+  <p:cSld>
+    <p:bg>
+      <p:bgRef idx="1001">
+        <a:schemeClr val="bg1"/>
+      </p:bgRef>
+    </p:bg>
+    <p:spTree>
+      <p:nvGrpSpPr>
+        <p:cNvPr id="1" name=""/>
+        <p:cNvGrpSpPr/>
+        <p:nvPr/>
+      </p:nvGrpSpPr>
+      <p:grpSpPr>
+        <a:xfrm>
+          <a:off x="0" y="0"/>
+          <a:ext cx="0" cy="0"/>
+          <a:chOff x="0" y="0"/>
+          <a:chExt cx="0" cy="0"/>
+        </a:xfrm>
+      </p:grpSpPr>
+      <p:sp>
+        <p:nvSpPr>
+          <p:cNvPr id="2" name="Marcador de encabezado 1"/>
+          <p:cNvSpPr>
+            <a:spLocks noGrp="1"/>
+          </p:cNvSpPr>
+          <p:nvPr>
+            <p:ph type="hdr" sz="quarter"/>
+          </p:nvPr>
+        </p:nvSpPr>
+        <p:spPr>
+          <a:xfrm>
+            <a:off x="0" y="0"/>
+            <a:ext cx="2971800" cy="458788"/>
+          </a:xfrm>
+          <a:prstGeom prst="rect">
+            <a:avLst/>
+          </a:prstGeom>
+        </p:spPr>
+        <p:txBody>
+          <a:bodyPr vert="horz" lIns="91440" tIns="45720" rIns="91440" bIns="45720" rtlCol="0"/>
+          <a:lstStyle>
+            <a:lvl1pPr algn="l">
+              <a:defRPr sz="1200"/>
+            </a:lvl1pPr>
+          </a:lstStyle>
+          <a:p>
+            <a:endParaRPr lang="es-CL"/>
+          </a:p>
+        </p:txBody>
+      </p:sp>
+      <p:sp>
+        <p:nvSpPr>
+          <p:cNvPr id="3" name="Marcador de fecha 2"/>
+          <p:cNvSpPr>
+            <a:spLocks noGrp="1"/>
+          </p:cNvSpPr>
+          <p:nvPr>
+            <p:ph type="dt" idx="1"/>
+          </p:nvPr>
+        </p:nvSpPr>
+        <p:spPr>
+          <a:xfrm>
+            <a:off x="3884613" y="0"/>
+            <a:ext cx="2971800" cy="458788"/>
+          </a:xfrm>
+          <a:prstGeom prst="rect">
+            <a:avLst/>
+          </a:prstGeom>
+        </p:spPr>
+        <p:txBody>
+          <a:bodyPr vert="horz" lIns="91440" tIns="45720" rIns="91440" bIns="45720" rtlCol="0"/>
+          <a:lstStyle>
+            <a:lvl1pPr algn="r">
+              <a:defRPr sz="1200"/>
+            </a:lvl1pPr>
+          </a:lstStyle>
+          <a:p>
+            <a:fld id="{FC9A961B-54C5-4E60-A31A-A69090C7D62D}" type="datetimeFigureOut">
+              <a:rPr lang="es-CL" smtClean="0"/>
+              <a:t>10-09-2026</a:t>
+            </a:fld>
+            <a:endParaRPr lang="es-CL"/>
+          </a:p>
+        </p:txBody>
+      </p:sp>
+      <p:sp>
+        <p:nvSpPr>
+          <p:cNvPr id="4" name="Marcador de imagen de diapositiva 3"/>
+          <p:cNvSpPr>
+            <a:spLocks noGrp="1" noRot="1" noChangeAspect="1"/>
+          </p:cNvSpPr>
+          <p:nvPr>
+            <p:ph type="sldImg" idx="2"/>
+          </p:nvPr>
+        </p:nvSpPr>
+        <p:spPr>
+          <a:xfrm>
+            <a:off x="685800" y="1143000"/>
+            <a:ext cx="5486400" cy="3086100"/>
+          </a:xfrm>
+          <a:prstGeom prst="rect">
+            <a:avLst/>
+          </a:prstGeom>
+          <a:noFill/>
+          <a:ln w="12700">
+            <a:solidFill>
+              <a:prstClr val="black"/>
+            </a:solidFill>
+          </a:ln>
+        </p:spPr>
+        <p:txBody>
+          <a:bodyPr vert="horz" lIns="91440" tIns="45720" rIns="91440" bIns="45720" rtlCol="0" anchor="ctr"/>
+          <a:lstStyle/>
+          <a:p>
+            <a:endParaRPr lang="es-CL"/>
+          </a:p>
+        </p:txBody>
+      </p:sp>
+      <p:sp>
+        <p:nvSpPr>
+          <p:cNvPr id="5" name="Marcador de notas 4"/>
+          <p:cNvSpPr>
+            <a:spLocks noGrp="1"/>
+          </p:cNvSpPr>
+          <p:nvPr>
+            <p:ph type="body" sz="quarter" idx="3"/>
+          </p:nvPr>
+        </p:nvSpPr>
+        <p:spPr>
+          <a:xfrm>
+            <a:off x="685800" y="4400550"/>
+            <a:ext cx="5486400" cy="3600450"/>
+          </a:xfrm>
+          <a:prstGeom prst="rect">
+            <a:avLst/>
+          </a:prstGeom>
+        </p:spPr>
+        <p:txBody>
+          <a:bodyPr vert="horz" lIns="91440" tIns="45720" rIns="91440" bIns="45720" rtlCol="0"/>
+          <a:lstStyle/>
+          <a:p>
+            <a:pPr lvl="0"/>
+            <a:r>
+              <a:rPr lang="es-ES"/>
+              <a:t>Haga clic para modificar los estilos de texto del patrón</a:t>
+            </a:r>
+          </a:p>
+          <a:p>
+            <a:pPr lvl="1"/>
+            <a:r>
+              <a:rPr lang="es-ES"/>
+              <a:t>Segundo nivel</a:t>
+            </a:r>
+          </a:p>
+          <a:p>
+            <a:pPr lvl="2"/>
+            <a:r>
+              <a:rPr lang="es-ES"/>
+              <a:t>Tercer nivel</a:t>
+            </a:r>
+          </a:p>
+          <a:p>
+            <a:pPr lvl="3"/>
+            <a:r>
+              <a:rPr lang="es-ES"/>
+              <a:t>Cuarto nivel</a:t>
+            </a:r>
+          </a:p>
+          <a:p>
+            <a:pPr lvl="4"/>
+            <a:r>
+              <a:rPr lang="es-ES"/>
+              <a:t>Quinto nivel</a:t>
+            </a:r>
+            <a:endParaRPr lang="es-CL"/>
+          </a:p>
+        </p:txBody>
+      </p:sp>
+      <p:sp>
+        <p:nvSpPr>
+          <p:cNvPr id="6" name="Marcador de pie de página 5"/>
+          <p:cNvSpPr>
+            <a:spLocks noGrp="1"/>
+          </p:cNvSpPr>
+          <p:nvPr>
+            <p:ph type="ftr" sz="quarter" idx="4"/>
+          </p:nvPr>
+        </p:nvSpPr>
+        <p:spPr>
+          <a:xfrm>
+            <a:off x="0" y="8685213"/>
+            <a:ext cx="2971800" cy="458787"/>
+          </a:xfrm>
+          <a:prstGeom prst="rect">
+            <a:avLst/>
+          </a:prstGeom>
+        </p:spPr>
+        <p:txBody>
+          <a:bodyPr vert="horz" lIns="91440" tIns="45720" rIns="91440" bIns="45720" rtlCol="0" anchor="b"/>
+          <a:lstStyle>
+            <a:lvl1pPr algn="l">
+              <a:defRPr sz="1200"/>
+            </a:lvl1pPr>
+          </a:lstStyle>
+          <a:p>
+            <a:endParaRPr lang="es-CL"/>
+          </a:p>
+        </p:txBody>
+      </p:sp>
+      <p:sp>
+        <p:nvSpPr>
+          <p:cNvPr id="7" name="Marcador de número de diapositiva 6"/>
+          <p:cNvSpPr>
+            <a:spLocks noGrp="1"/>
+          </p:cNvSpPr>
+          <p:nvPr>
+            <p:ph type="sldNum" sz="quarter" idx="5"/>
+          </p:nvPr>
+        </p:nvSpPr>
+        <p:spPr>
+          <a:xfrm>
+            <a:off x="3884613" y="8685213"/>
+            <a:ext cx="2971800" cy="458787"/>
+          </a:xfrm>
+          <a:prstGeom prst="rect">
+            <a:avLst/>
+          </a:prstGeom>
+        </p:spPr>
+        <p:txBody>
+          <a:bodyPr vert="horz" lIns="91440" tIns="45720" rIns="91440" bIns="45720" rtlCol="0" anchor="b"/>
+          <a:lstStyle>
+            <a:lvl1pPr algn="r">
+              <a:defRPr sz="1200"/>
+            </a:lvl1pPr>
+          </a:lstStyle>
+          <a:p>
+            <a:fld id="{4A082FA4-1ED1-4347-A84E-CB528A22EA7B}" type="slidenum">
+              <a:rPr lang="es-CL" smtClean="0"/>
+              <a:t>‹Nº›</a:t>
+            </a:fld>
+            <a:endParaRPr lang="es-CL"/>
+          </a:p>
+        </p:txBody>
+      </p:sp>
+    </p:spTree>
+    <p:extLst>
+      <p:ext uri="{BB962C8B-B14F-4D97-AF65-F5344CB8AC3E}">
+        <p14:creationId xmlns:p14="http://schemas.microsoft.com/office/powerpoint/2010/main" val="3045497780"/>
+      </p:ext>
+    </p:extLst>
+  </p:cSld>
+  <p:clrMap bg1="lt1" tx1="dk1" bg2="lt2" tx2="dk2" accent1="accent1" accent2="accent2" accent3="accent3" accent4="accent4" accent5="accent5" accent6="accent6" hlink="hlink" folHlink="folHlink"/>
+  <p:notesStyle>
+    <a:lvl1pPr marL="0" algn="l" defTabSz="914400" rtl="0" eaLnBrk="1" latinLnBrk="0" hangingPunct="1">
+      <a:defRPr sz="1200" kern="1200">
+        <a:solidFill>
+          <a:schemeClr val="tx1"/>
+        </a:solidFill>
+        <a:latin typeface="+mn-lt"/>
+        <a:ea typeface="+mn-ea"/>
+        <a:cs typeface="+mn-cs"/>
+      </a:defRPr>
+    </a:lvl1pPr>
+    <a:lvl2pPr marL="457200" algn="l" defTabSz="914400" rtl="0" eaLnBrk="1" latinLnBrk="0" hangingPunct="1">
+      <a:defRPr sz="1200" kern="1200">
+        <a:solidFill>
+          <a:schemeClr val="tx1"/>
+        </a:solidFill>
+        <a:latin typeface="+mn-lt"/>
+        <a:ea typeface="+mn-ea"/>
+        <a:cs typeface="+mn-cs"/>
+      </a:defRPr>
+    </a:lvl2pPr>
+    <a:lvl3pPr marL="914400" algn="l" defTabSz="914400" rtl="0" eaLnBrk="1" latinLnBrk="0" hangingPunct="1">
+      <a:defRPr sz="1200" kern="1200">
+        <a:solidFill>
+          <a:schemeClr val="tx1"/>
+        </a:solidFill>
+        <a:latin typeface="+mn-lt"/>
+        <a:ea typeface="+mn-ea"/>
+        <a:cs typeface="+mn-cs"/>
+      </a:defRPr>
+    </a:lvl3pPr>
+    <a:lvl4pPr marL="1371600" algn="l" defTabSz="914400" rtl="0" eaLnBrk="1" latinLnBrk="0" hangingPunct="1">
+      <a:defRPr sz="1200" kern="1200">
+        <a:solidFill>
+          <a:schemeClr val="tx1"/>
+        </a:solidFill>
+        <a:latin typeface="+mn-lt"/>
+        <a:ea typeface="+mn-ea"/>
+        <a:cs typeface="+mn-cs"/>
+      </a:defRPr>
+    </a:lvl4pPr>
+    <a:lvl5pPr marL="1828800" algn="l" defTabSz="914400" rtl="0" eaLnBrk="1" latinLnBrk="0" hangingPunct="1">
+      <a:defRPr sz="1200" kern="1200">
+        <a:solidFill>
+          <a:schemeClr val="tx1"/>
+        </a:solidFill>
+        <a:latin typeface="+mn-lt"/>
+        <a:ea typeface="+mn-ea"/>
+        <a:cs typeface="+mn-cs"/>
+      </a:defRPr>
+    </a:lvl5pPr>
+    <a:lvl6pPr marL="2286000" algn="l" defTabSz="914400" rtl="0" eaLnBrk="1" latinLnBrk="0" hangingPunct="1">
+      <a:defRPr sz="1200" kern="1200">
+        <a:solidFill>
+          <a:schemeClr val="tx1"/>
+        </a:solidFill>
+        <a:latin typeface="+mn-lt"/>
+        <a:ea typeface="+mn-ea"/>
+        <a:cs typeface="+mn-cs"/>
+      </a:defRPr>
+    </a:lvl6pPr>
+    <a:lvl7pPr marL="2743200" algn="l" defTabSz="914400" rtl="0" eaLnBrk="1" latinLnBrk="0" hangingPunct="1">
+      <a:defRPr sz="1200" kern="1200">
+        <a:solidFill>
+          <a:schemeClr val="tx1"/>
+        </a:solidFill>
+        <a:latin typeface="+mn-lt"/>
+        <a:ea typeface="+mn-ea"/>
+        <a:cs typeface="+mn-cs"/>
+      </a:defRPr>
+    </a:lvl7pPr>
+    <a:lvl8pPr marL="3200400" algn="l" defTabSz="914400" rtl="0" eaLnBrk="1" latinLnBrk="0" hangingPunct="1">
+      <a:defRPr sz="1200" kern="1200">
+        <a:solidFill>
+          <a:schemeClr val="tx1"/>
+        </a:solidFill>
+        <a:latin typeface="+mn-lt"/>
+        <a:ea typeface="+mn-ea"/>
+        <a:cs typeface="+mn-cs"/>
+      </a:defRPr>
+    </a:lvl8pPr>
+    <a:lvl9pPr marL="3657600" algn="l" defTabSz="914400" rtl="0" eaLnBrk="1" latinLnBrk="0" hangingPunct="1">
+      <a:defRPr sz="1200" kern="1200">
+        <a:solidFill>
+          <a:schemeClr val="tx1"/>
+        </a:solidFill>
+        <a:latin typeface="+mn-lt"/>
+        <a:ea typeface="+mn-ea"/>
+        <a:cs typeface="+mn-cs"/>
+      </a:defRPr>
+    </a:lvl9pPr>
+  </p:notesStyle>
+</p:notesMaster>
+</file>
+
+<file path=ppt/notesSlides/notesSlide1.xml><?xml version="1.0" encoding="utf-8"?>
+<p:notes xmlns:a="http://schemas.openxmlformats.org/drawingml/2006/main" xmlns:r="http://schemas.openxmlformats.org/officeDocument/2006/relationships" xmlns:p="http://schemas.openxmlformats.org/presentationml/2006/main">
+  <p:cSld>
+    <p:spTree>
+      <p:nvGrpSpPr>
+        <p:cNvPr id="1" name=""/>
+        <p:cNvGrpSpPr/>
+        <p:nvPr/>
+      </p:nvGrpSpPr>
+      <p:grpSpPr>
+        <a:xfrm>
+          <a:off x="0" y="0"/>
+          <a:ext cx="0" cy="0"/>
+          <a:chOff x="0" y="0"/>
+          <a:chExt cx="0" cy="0"/>
+        </a:xfrm>
+      </p:grpSpPr>
+      <p:sp>
+        <p:nvSpPr>
+          <p:cNvPr id="2" name="Marcador de imagen de diapositiva 1"/>
+          <p:cNvSpPr>
+            <a:spLocks noGrp="1" noRot="1" noChangeAspect="1"/>
+          </p:cNvSpPr>
+          <p:nvPr>
+            <p:ph type="sldImg"/>
+          </p:nvPr>
+        </p:nvSpPr>
+        <p:spPr/>
+      </p:sp>
+      <p:sp>
+        <p:nvSpPr>
+          <p:cNvPr id="3" name="Marcador de notas 2"/>
+          <p:cNvSpPr>
+            <a:spLocks noGrp="1"/>
+          </p:cNvSpPr>
+          <p:nvPr>
+            <p:ph type="body" idx="1"/>
+          </p:nvPr>
+        </p:nvSpPr>
+        <p:spPr/>
+        <p:txBody>
+          <a:bodyPr/>
+          <a:lstStyle/>
+          <a:p>
+            <a:endParaRPr lang="es-CL" dirty="0"/>
+          </a:p>
+        </p:txBody>
+      </p:sp>
+      <p:sp>
+        <p:nvSpPr>
+          <p:cNvPr id="4" name="Marcador de número de diapositiva 3"/>
+          <p:cNvSpPr>
+            <a:spLocks noGrp="1"/>
+          </p:cNvSpPr>
+          <p:nvPr>
+            <p:ph type="sldNum" sz="quarter" idx="5"/>
+          </p:nvPr>
+        </p:nvSpPr>
+        <p:spPr/>
+        <p:txBody>
+          <a:bodyPr/>
+          <a:lstStyle/>
+          <a:p>
+            <a:fld id="{4A082FA4-1ED1-4347-A84E-CB528A22EA7B}" type="slidenum">
+              <a:rPr lang="es-CL" smtClean="0"/>
+              <a:t>5</a:t>
+            </a:fld>
+            <a:endParaRPr lang="es-CL"/>
+          </a:p>
+        </p:txBody>
+      </p:sp>
+    </p:spTree>
+    <p:extLst>
+      <p:ext uri="{BB962C8B-B14F-4D97-AF65-F5344CB8AC3E}">
+        <p14:creationId xmlns:p14="http://schemas.microsoft.com/office/powerpoint/2010/main" val="416029808"/>
+      </p:ext>
+    </p:extLst>
+  </p:cSld>
+  <p:clrMapOvr>
+    <a:masterClrMapping/>
+  </p:clrMapOvr>
+</p:notes>
 </file>
 
 <file path=ppt/slideLayouts/slideLayout1.xml><?xml version="1.0" encoding="utf-8"?>
@@ -3641,377 +4078,6 @@
       </p:sp>
       <p:grpSp>
         <p:nvGrpSpPr>
-          <p:cNvPr id="7" name="Group 7"/>
-          <p:cNvGrpSpPr/>
-          <p:nvPr/>
-        </p:nvGrpSpPr>
-        <p:grpSpPr>
-          <a:xfrm>
-            <a:off x="857250" y="2905125"/>
-            <a:ext cx="7524750" cy="2714625"/>
-            <a:chOff x="0" y="0"/>
-            <a:chExt cx="10033000" cy="3619500"/>
-          </a:xfrm>
-        </p:grpSpPr>
-        <p:grpSp>
-          <p:nvGrpSpPr>
-            <p:cNvPr id="8" name="Group 8"/>
-            <p:cNvGrpSpPr/>
-            <p:nvPr/>
-          </p:nvGrpSpPr>
-          <p:grpSpPr>
-            <a:xfrm>
-              <a:off x="0" y="0"/>
-              <a:ext cx="10033000" cy="3619500"/>
-              <a:chOff x="0" y="0"/>
-              <a:chExt cx="10033000" cy="3619500"/>
-            </a:xfrm>
-          </p:grpSpPr>
-          <p:sp>
-            <p:nvSpPr>
-              <p:cNvPr id="9" name="Freeform 9"/>
-              <p:cNvSpPr/>
-              <p:nvPr/>
-            </p:nvSpPr>
-            <p:spPr>
-              <a:xfrm>
-                <a:off x="0" y="0"/>
-                <a:ext cx="10033000" cy="3619500"/>
-              </a:xfrm>
-              <a:custGeom>
-                <a:avLst/>
-                <a:gdLst/>
-                <a:ahLst/>
-                <a:cxnLst/>
-                <a:rect l="l" t="t" r="r" b="b"/>
-                <a:pathLst>
-                  <a:path w="10033000" h="3619500">
-                    <a:moveTo>
-                      <a:pt x="0" y="0"/>
-                    </a:moveTo>
-                    <a:lnTo>
-                      <a:pt x="10033000" y="0"/>
-                    </a:lnTo>
-                    <a:lnTo>
-                      <a:pt x="10033000" y="3619500"/>
-                    </a:lnTo>
-                    <a:lnTo>
-                      <a:pt x="0" y="3619500"/>
-                    </a:lnTo>
-                    <a:close/>
-                  </a:path>
-                </a:pathLst>
-              </a:custGeom>
-              <a:solidFill>
-                <a:srgbClr val="FFFFFF"/>
-              </a:solidFill>
-              <a:ln w="9525" cap="sq">
-                <a:solidFill>
-                  <a:srgbClr val="D7E0E8"/>
-                </a:solidFill>
-                <a:prstDash val="solid"/>
-                <a:miter/>
-              </a:ln>
-            </p:spPr>
-            <p:txBody>
-              <a:bodyPr/>
-              <a:lstStyle/>
-              <a:p>
-                <a:endParaRPr lang="es-CL" noProof="0" dirty="0"/>
-              </a:p>
-            </p:txBody>
-          </p:sp>
-          <p:sp>
-            <p:nvSpPr>
-              <p:cNvPr id="10" name="TextBox 10"/>
-              <p:cNvSpPr txBox="1"/>
-              <p:nvPr/>
-            </p:nvSpPr>
-            <p:spPr>
-              <a:xfrm>
-                <a:off x="0" y="-38100"/>
-                <a:ext cx="10033000" cy="3657600"/>
-              </a:xfrm>
-              <a:prstGeom prst="rect">
-                <a:avLst/>
-              </a:prstGeom>
-            </p:spPr>
-            <p:txBody>
-              <a:bodyPr lIns="50800" tIns="50800" rIns="50800" bIns="50800" rtlCol="0" anchor="ctr"/>
-              <a:lstStyle/>
-              <a:p>
-                <a:pPr algn="l">
-                  <a:lnSpc>
-                    <a:spcPts val="1679"/>
-                  </a:lnSpc>
-                </a:pPr>
-                <a:endParaRPr lang="es-CL" noProof="0" dirty="0"/>
-              </a:p>
-            </p:txBody>
-          </p:sp>
-        </p:grpSp>
-        <p:grpSp>
-          <p:nvGrpSpPr>
-            <p:cNvPr id="11" name="Group 11"/>
-            <p:cNvGrpSpPr/>
-            <p:nvPr/>
-          </p:nvGrpSpPr>
-          <p:grpSpPr>
-            <a:xfrm>
-              <a:off x="431800" y="381000"/>
-              <a:ext cx="1270000" cy="1270000"/>
-              <a:chOff x="0" y="0"/>
-              <a:chExt cx="1270000" cy="1270000"/>
-            </a:xfrm>
-          </p:grpSpPr>
-          <p:sp>
-            <p:nvSpPr>
-              <p:cNvPr id="12" name="Freeform 12"/>
-              <p:cNvSpPr/>
-              <p:nvPr/>
-            </p:nvSpPr>
-            <p:spPr>
-              <a:xfrm>
-                <a:off x="0" y="0"/>
-                <a:ext cx="1270000" cy="1270000"/>
-              </a:xfrm>
-              <a:custGeom>
-                <a:avLst/>
-                <a:gdLst/>
-                <a:ahLst/>
-                <a:cxnLst/>
-                <a:rect l="l" t="t" r="r" b="b"/>
-                <a:pathLst>
-                  <a:path w="1270000" h="1270000">
-                    <a:moveTo>
-                      <a:pt x="0" y="0"/>
-                    </a:moveTo>
-                    <a:lnTo>
-                      <a:pt x="1270000" y="0"/>
-                    </a:lnTo>
-                    <a:lnTo>
-                      <a:pt x="1270000" y="1270000"/>
-                    </a:lnTo>
-                    <a:lnTo>
-                      <a:pt x="0" y="1270000"/>
-                    </a:lnTo>
-                    <a:close/>
-                  </a:path>
-                </a:pathLst>
-              </a:custGeom>
-              <a:solidFill>
-                <a:srgbClr val="F58220"/>
-              </a:solidFill>
-              <a:ln cap="sq">
-                <a:noFill/>
-                <a:prstDash val="solid"/>
-                <a:miter/>
-              </a:ln>
-            </p:spPr>
-            <p:txBody>
-              <a:bodyPr/>
-              <a:lstStyle/>
-              <a:p>
-                <a:endParaRPr lang="es-CL" noProof="0" dirty="0"/>
-              </a:p>
-            </p:txBody>
-          </p:sp>
-          <p:sp>
-            <p:nvSpPr>
-              <p:cNvPr id="13" name="TextBox 13"/>
-              <p:cNvSpPr txBox="1"/>
-              <p:nvPr/>
-            </p:nvSpPr>
-            <p:spPr>
-              <a:xfrm>
-                <a:off x="0" y="-38100"/>
-                <a:ext cx="1270000" cy="1308100"/>
-              </a:xfrm>
-              <a:prstGeom prst="rect">
-                <a:avLst/>
-              </a:prstGeom>
-            </p:spPr>
-            <p:txBody>
-              <a:bodyPr lIns="50800" tIns="50800" rIns="50800" bIns="50800" rtlCol="0" anchor="ctr"/>
-              <a:lstStyle/>
-              <a:p>
-                <a:pPr algn="l">
-                  <a:lnSpc>
-                    <a:spcPts val="1679"/>
-                  </a:lnSpc>
-                </a:pPr>
-                <a:endParaRPr lang="es-CL" noProof="0" dirty="0"/>
-              </a:p>
-            </p:txBody>
-          </p:sp>
-        </p:grpSp>
-        <p:sp>
-          <p:nvSpPr>
-            <p:cNvPr id="14" name="TextBox 14"/>
-            <p:cNvSpPr txBox="1"/>
-            <p:nvPr/>
-          </p:nvSpPr>
-          <p:spPr>
-            <a:xfrm>
-              <a:off x="431800" y="396875"/>
-              <a:ext cx="1270000" cy="624205"/>
-            </a:xfrm>
-            <a:prstGeom prst="rect">
-              <a:avLst/>
-            </a:prstGeom>
-          </p:spPr>
-          <p:txBody>
-            <a:bodyPr lIns="0" tIns="0" rIns="0" bIns="0" rtlCol="0" anchor="t">
-              <a:spAutoFit/>
-            </a:bodyPr>
-            <a:lstStyle/>
-            <a:p>
-              <a:pPr algn="ctr">
-                <a:lnSpc>
-                  <a:spcPts val="3990"/>
-                </a:lnSpc>
-              </a:pPr>
-              <a:r>
-                <a:rPr lang="es-CL" sz="2850" b="1" noProof="0" dirty="0">
-                  <a:solidFill>
-                    <a:srgbClr val="FFFFFF"/>
-                  </a:solidFill>
-                  <a:latin typeface="Montserrat Bold"/>
-                  <a:ea typeface="Montserrat Bold"/>
-                  <a:cs typeface="Montserrat Bold"/>
-                  <a:sym typeface="Montserrat Bold"/>
-                </a:rPr>
-                <a:t>MG</a:t>
-              </a:r>
-            </a:p>
-          </p:txBody>
-        </p:sp>
-        <p:sp>
-          <p:nvSpPr>
-            <p:cNvPr id="15" name="TextBox 15"/>
-            <p:cNvSpPr txBox="1"/>
-            <p:nvPr/>
-          </p:nvSpPr>
-          <p:spPr>
-            <a:xfrm>
-              <a:off x="2222500" y="473075"/>
-              <a:ext cx="7493000" cy="456565"/>
-            </a:xfrm>
-            <a:prstGeom prst="rect">
-              <a:avLst/>
-            </a:prstGeom>
-          </p:spPr>
-          <p:txBody>
-            <a:bodyPr lIns="0" tIns="0" rIns="0" bIns="0" rtlCol="0" anchor="t">
-              <a:spAutoFit/>
-            </a:bodyPr>
-            <a:lstStyle/>
-            <a:p>
-              <a:pPr algn="l">
-                <a:lnSpc>
-                  <a:spcPts val="2640"/>
-                </a:lnSpc>
-              </a:pPr>
-              <a:r>
-                <a:rPr lang="es-CL" sz="2400" b="1" noProof="0" dirty="0">
-                  <a:solidFill>
-                    <a:srgbClr val="082B4C"/>
-                  </a:solidFill>
-                  <a:latin typeface="Montserrat Bold"/>
-                  <a:ea typeface="Montserrat Bold"/>
-                  <a:cs typeface="Montserrat Bold"/>
-                  <a:sym typeface="Montserrat Bold"/>
-                </a:rPr>
-                <a:t>María Trinidad Gaete</a:t>
-              </a:r>
-            </a:p>
-          </p:txBody>
-        </p:sp>
-        <p:sp>
-          <p:nvSpPr>
-            <p:cNvPr id="16" name="TextBox 16"/>
-            <p:cNvSpPr txBox="1"/>
-            <p:nvPr/>
-          </p:nvSpPr>
-          <p:spPr>
-            <a:xfrm>
-              <a:off x="2222500" y="1266825"/>
-              <a:ext cx="7493000" cy="310515"/>
-            </a:xfrm>
-            <a:prstGeom prst="rect">
-              <a:avLst/>
-            </a:prstGeom>
-          </p:spPr>
-          <p:txBody>
-            <a:bodyPr lIns="0" tIns="0" rIns="0" bIns="0" rtlCol="0" anchor="t">
-              <a:spAutoFit/>
-            </a:bodyPr>
-            <a:lstStyle/>
-            <a:p>
-              <a:pPr algn="l">
-                <a:lnSpc>
-                  <a:spcPts val="1995"/>
-                </a:lnSpc>
-              </a:pPr>
-              <a:r>
-                <a:rPr lang="es-CL" sz="1425" b="1" spc="114" noProof="0" dirty="0">
-                  <a:solidFill>
-                    <a:srgbClr val="0878B9"/>
-                  </a:solidFill>
-                  <a:latin typeface="Montserrat Bold"/>
-                  <a:ea typeface="Montserrat Bold"/>
-                  <a:cs typeface="Montserrat Bold"/>
-                  <a:sym typeface="Montserrat Bold"/>
-                </a:rPr>
-                <a:t>ANÁLISIS Y COORDINACIÓN</a:t>
-              </a:r>
-            </a:p>
-          </p:txBody>
-        </p:sp>
-        <p:sp>
-          <p:nvSpPr>
-            <p:cNvPr id="17" name="TextBox 17"/>
-            <p:cNvSpPr txBox="1"/>
-            <p:nvPr/>
-          </p:nvSpPr>
-          <p:spPr>
-            <a:xfrm>
-              <a:off x="2222500" y="1949450"/>
-              <a:ext cx="7493000" cy="800100"/>
-            </a:xfrm>
-            <a:prstGeom prst="rect">
-              <a:avLst/>
-            </a:prstGeom>
-          </p:spPr>
-          <p:txBody>
-            <a:bodyPr lIns="0" tIns="0" rIns="0" bIns="0" rtlCol="0" anchor="t">
-              <a:spAutoFit/>
-            </a:bodyPr>
-            <a:lstStyle/>
-            <a:p>
-              <a:pPr algn="l">
-                <a:lnSpc>
-                  <a:spcPts val="2437"/>
-                </a:lnSpc>
-              </a:pPr>
-              <a:r>
-                <a:rPr lang="es-CL" sz="1875" noProof="0" dirty="0">
-                  <a:solidFill>
-                    <a:srgbClr val="082B4C"/>
-                  </a:solidFill>
-                  <a:latin typeface="Source Sans 3"/>
-                  <a:ea typeface="Source Sans 3"/>
-                  <a:cs typeface="Source Sans 3"/>
-                  <a:sym typeface="Source Sans 3"/>
-                </a:rPr>
-                <a:t>Levantamiento de requerimientos, documentación y coordinación general</a:t>
-              </a:r>
-            </a:p>
-          </p:txBody>
-        </p:sp>
-      </p:grpSp>
-      <p:grpSp>
-        <p:nvGrpSpPr>
           <p:cNvPr id="18" name="Group 18"/>
           <p:cNvGrpSpPr/>
           <p:nvPr/>
@@ -4218,47 +4284,6 @@
         </p:grpSp>
         <p:sp>
           <p:nvSpPr>
-            <p:cNvPr id="25" name="TextBox 25"/>
-            <p:cNvSpPr txBox="1"/>
-            <p:nvPr/>
-          </p:nvSpPr>
-          <p:spPr>
-            <a:xfrm>
-              <a:off x="431800" y="396875"/>
-              <a:ext cx="1270000" cy="624205"/>
-            </a:xfrm>
-            <a:prstGeom prst="rect">
-              <a:avLst/>
-            </a:prstGeom>
-          </p:spPr>
-          <p:txBody>
-            <a:bodyPr lIns="0" tIns="0" rIns="0" bIns="0" rtlCol="0" anchor="t">
-              <a:spAutoFit/>
-            </a:bodyPr>
-            <a:lstStyle/>
-            <a:p>
-              <a:pPr algn="ctr">
-                <a:lnSpc>
-                  <a:spcPts val="3990"/>
-                </a:lnSpc>
-              </a:pPr>
-              <a:r>
-                <a:rPr lang="es-CL" sz="2850" b="1" noProof="0" dirty="0">
-                  <a:solidFill>
-                    <a:srgbClr val="FFFFFF"/>
-                  </a:solidFill>
-                  <a:latin typeface="Montserrat Bold"/>
-                  <a:ea typeface="Montserrat Bold"/>
-                  <a:cs typeface="Montserrat Bold"/>
-                  <a:sym typeface="Montserrat Bold"/>
-                </a:rPr>
-                <a:t>TC</a:t>
-              </a:r>
-            </a:p>
-          </p:txBody>
-        </p:sp>
-        <p:sp>
-          <p:nvSpPr>
             <p:cNvPr id="26" name="TextBox 26"/>
             <p:cNvSpPr txBox="1"/>
             <p:nvPr/>
@@ -4383,402 +4408,7 @@
       </p:grpSp>
       <p:grpSp>
         <p:nvGrpSpPr>
-          <p:cNvPr id="29" name="Group 29"/>
-          <p:cNvGrpSpPr/>
-          <p:nvPr/>
-        </p:nvGrpSpPr>
-        <p:grpSpPr>
-          <a:xfrm>
-            <a:off x="857250" y="6238875"/>
-            <a:ext cx="7524750" cy="2714625"/>
-            <a:chOff x="0" y="0"/>
-            <a:chExt cx="10033000" cy="3619500"/>
-          </a:xfrm>
-        </p:grpSpPr>
-        <p:grpSp>
-          <p:nvGrpSpPr>
-            <p:cNvPr id="30" name="Group 30"/>
-            <p:cNvGrpSpPr/>
-            <p:nvPr/>
-          </p:nvGrpSpPr>
-          <p:grpSpPr>
-            <a:xfrm>
-              <a:off x="0" y="0"/>
-              <a:ext cx="10033000" cy="3619500"/>
-              <a:chOff x="0" y="0"/>
-              <a:chExt cx="10033000" cy="3619500"/>
-            </a:xfrm>
-          </p:grpSpPr>
-          <p:sp>
-            <p:nvSpPr>
-              <p:cNvPr id="31" name="Freeform 31"/>
-              <p:cNvSpPr/>
-              <p:nvPr/>
-            </p:nvSpPr>
-            <p:spPr>
-              <a:xfrm>
-                <a:off x="0" y="0"/>
-                <a:ext cx="10033000" cy="3619500"/>
-              </a:xfrm>
-              <a:custGeom>
-                <a:avLst/>
-                <a:gdLst/>
-                <a:ahLst/>
-                <a:cxnLst/>
-                <a:rect l="l" t="t" r="r" b="b"/>
-                <a:pathLst>
-                  <a:path w="10033000" h="3619500">
-                    <a:moveTo>
-                      <a:pt x="0" y="0"/>
-                    </a:moveTo>
-                    <a:lnTo>
-                      <a:pt x="10033000" y="0"/>
-                    </a:lnTo>
-                    <a:lnTo>
-                      <a:pt x="10033000" y="3619500"/>
-                    </a:lnTo>
-                    <a:lnTo>
-                      <a:pt x="0" y="3619500"/>
-                    </a:lnTo>
-                    <a:close/>
-                  </a:path>
-                </a:pathLst>
-              </a:custGeom>
-              <a:solidFill>
-                <a:srgbClr val="FFFFFF"/>
-              </a:solidFill>
-              <a:ln w="9525" cap="sq">
-                <a:solidFill>
-                  <a:srgbClr val="D7E0E8"/>
-                </a:solidFill>
-                <a:prstDash val="solid"/>
-                <a:miter/>
-              </a:ln>
-            </p:spPr>
-            <p:txBody>
-              <a:bodyPr/>
-              <a:lstStyle/>
-              <a:p>
-                <a:endParaRPr lang="es-CL" noProof="0" dirty="0"/>
-              </a:p>
-            </p:txBody>
-          </p:sp>
-          <p:sp>
-            <p:nvSpPr>
-              <p:cNvPr id="32" name="TextBox 32"/>
-              <p:cNvSpPr txBox="1"/>
-              <p:nvPr/>
-            </p:nvSpPr>
-            <p:spPr>
-              <a:xfrm>
-                <a:off x="0" y="-38100"/>
-                <a:ext cx="10033000" cy="3657600"/>
-              </a:xfrm>
-              <a:prstGeom prst="rect">
-                <a:avLst/>
-              </a:prstGeom>
-            </p:spPr>
-            <p:txBody>
-              <a:bodyPr lIns="50800" tIns="50800" rIns="50800" bIns="50800" rtlCol="0" anchor="ctr"/>
-              <a:lstStyle/>
-              <a:p>
-                <a:pPr algn="l">
-                  <a:lnSpc>
-                    <a:spcPts val="1679"/>
-                  </a:lnSpc>
-                </a:pPr>
-                <a:endParaRPr lang="es-CL" noProof="0" dirty="0"/>
-              </a:p>
-            </p:txBody>
-          </p:sp>
-        </p:grpSp>
-        <p:grpSp>
-          <p:nvGrpSpPr>
-            <p:cNvPr id="33" name="Group 33"/>
-            <p:cNvGrpSpPr/>
-            <p:nvPr/>
-          </p:nvGrpSpPr>
-          <p:grpSpPr>
-            <a:xfrm>
-              <a:off x="431800" y="381000"/>
-              <a:ext cx="1270000" cy="1270000"/>
-              <a:chOff x="0" y="0"/>
-              <a:chExt cx="1270000" cy="1270000"/>
-            </a:xfrm>
-          </p:grpSpPr>
-          <p:sp>
-            <p:nvSpPr>
-              <p:cNvPr id="34" name="Freeform 34"/>
-              <p:cNvSpPr/>
-              <p:nvPr/>
-            </p:nvSpPr>
-            <p:spPr>
-              <a:xfrm>
-                <a:off x="0" y="0"/>
-                <a:ext cx="1270000" cy="1270000"/>
-              </a:xfrm>
-              <a:custGeom>
-                <a:avLst/>
-                <a:gdLst/>
-                <a:ahLst/>
-                <a:cxnLst/>
-                <a:rect l="l" t="t" r="r" b="b"/>
-                <a:pathLst>
-                  <a:path w="1270000" h="1270000">
-                    <a:moveTo>
-                      <a:pt x="0" y="0"/>
-                    </a:moveTo>
-                    <a:lnTo>
-                      <a:pt x="1270000" y="0"/>
-                    </a:lnTo>
-                    <a:lnTo>
-                      <a:pt x="1270000" y="1270000"/>
-                    </a:lnTo>
-                    <a:lnTo>
-                      <a:pt x="0" y="1270000"/>
-                    </a:lnTo>
-                    <a:close/>
-                  </a:path>
-                </a:pathLst>
-              </a:custGeom>
-              <a:solidFill>
-                <a:srgbClr val="0878B9"/>
-              </a:solidFill>
-              <a:ln cap="sq">
-                <a:noFill/>
-                <a:prstDash val="solid"/>
-                <a:miter/>
-              </a:ln>
-            </p:spPr>
-            <p:txBody>
-              <a:bodyPr/>
-              <a:lstStyle/>
-              <a:p>
-                <a:endParaRPr lang="es-CL" noProof="0" dirty="0"/>
-              </a:p>
-            </p:txBody>
-          </p:sp>
-          <p:sp>
-            <p:nvSpPr>
-              <p:cNvPr id="35" name="TextBox 35"/>
-              <p:cNvSpPr txBox="1"/>
-              <p:nvPr/>
-            </p:nvSpPr>
-            <p:spPr>
-              <a:xfrm>
-                <a:off x="0" y="-38100"/>
-                <a:ext cx="1270000" cy="1308100"/>
-              </a:xfrm>
-              <a:prstGeom prst="rect">
-                <a:avLst/>
-              </a:prstGeom>
-            </p:spPr>
-            <p:txBody>
-              <a:bodyPr lIns="50800" tIns="50800" rIns="50800" bIns="50800" rtlCol="0" anchor="ctr"/>
-              <a:lstStyle/>
-              <a:p>
-                <a:pPr algn="l">
-                  <a:lnSpc>
-                    <a:spcPts val="1679"/>
-                  </a:lnSpc>
-                </a:pPr>
-                <a:endParaRPr lang="es-CL" noProof="0" dirty="0"/>
-              </a:p>
-            </p:txBody>
-          </p:sp>
-        </p:grpSp>
-        <p:sp>
-          <p:nvSpPr>
-            <p:cNvPr id="36" name="TextBox 36"/>
-            <p:cNvSpPr txBox="1"/>
-            <p:nvPr/>
-          </p:nvSpPr>
-          <p:spPr>
-            <a:xfrm>
-              <a:off x="431800" y="396875"/>
-              <a:ext cx="1270000" cy="624205"/>
-            </a:xfrm>
-            <a:prstGeom prst="rect">
-              <a:avLst/>
-            </a:prstGeom>
-          </p:spPr>
-          <p:txBody>
-            <a:bodyPr lIns="0" tIns="0" rIns="0" bIns="0" rtlCol="0" anchor="t">
-              <a:spAutoFit/>
-            </a:bodyPr>
-            <a:lstStyle/>
-            <a:p>
-              <a:pPr algn="ctr">
-                <a:lnSpc>
-                  <a:spcPts val="3990"/>
-                </a:lnSpc>
-              </a:pPr>
-              <a:r>
-                <a:rPr lang="es-CL" sz="2850" b="1" noProof="0" dirty="0">
-                  <a:solidFill>
-                    <a:srgbClr val="FFFFFF"/>
-                  </a:solidFill>
-                  <a:latin typeface="Montserrat Bold"/>
-                  <a:ea typeface="Montserrat Bold"/>
-                  <a:cs typeface="Montserrat Bold"/>
-                  <a:sym typeface="Montserrat Bold"/>
-                </a:rPr>
-                <a:t>DM</a:t>
-              </a:r>
-            </a:p>
-          </p:txBody>
-        </p:sp>
-        <p:sp>
-          <p:nvSpPr>
-            <p:cNvPr id="37" name="TextBox 37"/>
-            <p:cNvSpPr txBox="1"/>
-            <p:nvPr/>
-          </p:nvSpPr>
-          <p:spPr>
-            <a:xfrm>
-              <a:off x="2222500" y="473075"/>
-              <a:ext cx="7493000" cy="456565"/>
-            </a:xfrm>
-            <a:prstGeom prst="rect">
-              <a:avLst/>
-            </a:prstGeom>
-          </p:spPr>
-          <p:txBody>
-            <a:bodyPr lIns="0" tIns="0" rIns="0" bIns="0" rtlCol="0" anchor="t">
-              <a:spAutoFit/>
-            </a:bodyPr>
-            <a:lstStyle/>
-            <a:p>
-              <a:pPr algn="l">
-                <a:lnSpc>
-                  <a:spcPts val="2640"/>
-                </a:lnSpc>
-              </a:pPr>
-              <a:r>
-                <a:rPr lang="es-CL" sz="2400" b="1" noProof="0" dirty="0">
-                  <a:solidFill>
-                    <a:srgbClr val="082B4C"/>
-                  </a:solidFill>
-                  <a:latin typeface="Montserrat Bold"/>
-                  <a:ea typeface="Montserrat Bold"/>
-                  <a:cs typeface="Montserrat Bold"/>
-                  <a:sym typeface="Montserrat Bold"/>
-                </a:rPr>
-                <a:t>David Muñoz Bravo</a:t>
-              </a:r>
-            </a:p>
-          </p:txBody>
-        </p:sp>
-        <p:sp>
-          <p:nvSpPr>
-            <p:cNvPr id="38" name="TextBox 38"/>
-            <p:cNvSpPr txBox="1"/>
-            <p:nvPr/>
-          </p:nvSpPr>
-          <p:spPr>
-            <a:xfrm>
-              <a:off x="2222500" y="1266825"/>
-              <a:ext cx="7493000" cy="310515"/>
-            </a:xfrm>
-            <a:prstGeom prst="rect">
-              <a:avLst/>
-            </a:prstGeom>
-          </p:spPr>
-          <p:txBody>
-            <a:bodyPr lIns="0" tIns="0" rIns="0" bIns="0" rtlCol="0" anchor="t">
-              <a:spAutoFit/>
-            </a:bodyPr>
-            <a:lstStyle/>
-            <a:p>
-              <a:pPr algn="l">
-                <a:lnSpc>
-                  <a:spcPts val="1995"/>
-                </a:lnSpc>
-              </a:pPr>
-              <a:r>
-                <a:rPr lang="es-CL" sz="1425" b="1" spc="114" noProof="0" dirty="0">
-                  <a:solidFill>
-                    <a:srgbClr val="0878B9"/>
-                  </a:solidFill>
-                  <a:latin typeface="Montserrat Bold"/>
-                  <a:ea typeface="Montserrat Bold"/>
-                  <a:cs typeface="Montserrat Bold"/>
-                  <a:sym typeface="Montserrat Bold"/>
-                </a:rPr>
-                <a:t>APLICACIÓN Y NEGOCIO</a:t>
-              </a:r>
-            </a:p>
-          </p:txBody>
-        </p:sp>
-        <p:sp>
-          <p:nvSpPr>
-            <p:cNvPr id="39" name="TextBox 39"/>
-            <p:cNvSpPr txBox="1"/>
-            <p:nvPr/>
-          </p:nvSpPr>
-          <p:spPr>
-            <a:xfrm>
-              <a:off x="2222500" y="1949450"/>
-              <a:ext cx="7493000" cy="800100"/>
-            </a:xfrm>
-            <a:prstGeom prst="rect">
-              <a:avLst/>
-            </a:prstGeom>
-          </p:spPr>
-          <p:txBody>
-            <a:bodyPr lIns="0" tIns="0" rIns="0" bIns="0" rtlCol="0" anchor="t">
-              <a:spAutoFit/>
-            </a:bodyPr>
-            <a:lstStyle/>
-            <a:p>
-              <a:pPr algn="l">
-                <a:lnSpc>
-                  <a:spcPts val="2437"/>
-                </a:lnSpc>
-              </a:pPr>
-              <a:r>
-                <a:rPr lang="es-CL" sz="1875" noProof="0" dirty="0">
-                  <a:solidFill>
-                    <a:srgbClr val="082B4C"/>
-                  </a:solidFill>
-                  <a:latin typeface="Source Sans 3"/>
-                  <a:ea typeface="Source Sans 3"/>
-                  <a:cs typeface="Source Sans 3"/>
-                  <a:sym typeface="Source Sans 3"/>
-                </a:rPr>
-                <a:t>Desarrollo, validaciones, reglas de negocio, </a:t>
-              </a:r>
-              <a:r>
-                <a:rPr lang="es-CL" sz="1875" noProof="0" dirty="0" err="1">
-                  <a:solidFill>
-                    <a:srgbClr val="082B4C"/>
-                  </a:solidFill>
-                  <a:latin typeface="Source Sans 3"/>
-                  <a:ea typeface="Source Sans 3"/>
-                  <a:cs typeface="Source Sans 3"/>
-                  <a:sym typeface="Source Sans 3"/>
-                </a:rPr>
-                <a:t>dashboard</a:t>
-              </a:r>
-              <a:r>
-                <a:rPr lang="es-CL" sz="1875" noProof="0" dirty="0">
-                  <a:solidFill>
-                    <a:srgbClr val="082B4C"/>
-                  </a:solidFill>
-                  <a:latin typeface="Source Sans 3"/>
-                  <a:ea typeface="Source Sans 3"/>
-                  <a:cs typeface="Source Sans 3"/>
-                  <a:sym typeface="Source Sans 3"/>
-                </a:rPr>
-                <a:t> y reportes</a:t>
-              </a:r>
-            </a:p>
-          </p:txBody>
-        </p:sp>
-      </p:grpSp>
-      <p:grpSp>
-        <p:nvGrpSpPr>
-          <p:cNvPr id="40" name="Group 40"/>
+          <p:cNvPr id="41" name="Group 41"/>
           <p:cNvGrpSpPr/>
           <p:nvPr/>
         </p:nvGrpSpPr>
@@ -4790,363 +4420,212 @@
             <a:chExt cx="10033000" cy="3619500"/>
           </a:xfrm>
         </p:grpSpPr>
-        <p:grpSp>
-          <p:nvGrpSpPr>
-            <p:cNvPr id="41" name="Group 41"/>
-            <p:cNvGrpSpPr/>
+        <p:sp>
+          <p:nvSpPr>
+            <p:cNvPr id="42" name="Freeform 42"/>
+            <p:cNvSpPr/>
             <p:nvPr/>
-          </p:nvGrpSpPr>
-          <p:grpSpPr>
+          </p:nvSpPr>
+          <p:spPr>
             <a:xfrm>
               <a:off x="0" y="0"/>
               <a:ext cx="10033000" cy="3619500"/>
-              <a:chOff x="0" y="0"/>
-              <a:chExt cx="10033000" cy="3619500"/>
             </a:xfrm>
-          </p:grpSpPr>
-          <p:sp>
-            <p:nvSpPr>
-              <p:cNvPr id="42" name="Freeform 42"/>
-              <p:cNvSpPr/>
-              <p:nvPr/>
-            </p:nvSpPr>
-            <p:spPr>
-              <a:xfrm>
-                <a:off x="0" y="0"/>
-                <a:ext cx="10033000" cy="3619500"/>
-              </a:xfrm>
-              <a:custGeom>
-                <a:avLst/>
-                <a:gdLst/>
-                <a:ahLst/>
-                <a:cxnLst/>
-                <a:rect l="l" t="t" r="r" b="b"/>
-                <a:pathLst>
-                  <a:path w="10033000" h="3619500">
-                    <a:moveTo>
-                      <a:pt x="0" y="0"/>
-                    </a:moveTo>
-                    <a:lnTo>
-                      <a:pt x="10033000" y="0"/>
-                    </a:lnTo>
-                    <a:lnTo>
-                      <a:pt x="10033000" y="3619500"/>
-                    </a:lnTo>
-                    <a:lnTo>
-                      <a:pt x="0" y="3619500"/>
-                    </a:lnTo>
-                    <a:close/>
-                  </a:path>
-                </a:pathLst>
-              </a:custGeom>
+            <a:custGeom>
+              <a:avLst/>
+              <a:gdLst/>
+              <a:ahLst/>
+              <a:cxnLst/>
+              <a:rect l="l" t="t" r="r" b="b"/>
+              <a:pathLst>
+                <a:path w="10033000" h="3619500">
+                  <a:moveTo>
+                    <a:pt x="0" y="0"/>
+                  </a:moveTo>
+                  <a:lnTo>
+                    <a:pt x="10033000" y="0"/>
+                  </a:lnTo>
+                  <a:lnTo>
+                    <a:pt x="10033000" y="3619500"/>
+                  </a:lnTo>
+                  <a:lnTo>
+                    <a:pt x="0" y="3619500"/>
+                  </a:lnTo>
+                  <a:close/>
+                </a:path>
+              </a:pathLst>
+            </a:custGeom>
+            <a:solidFill>
+              <a:srgbClr val="FFFFFF"/>
+            </a:solidFill>
+            <a:ln w="9525" cap="sq">
               <a:solidFill>
-                <a:srgbClr val="FFFFFF"/>
+                <a:srgbClr val="D7E0E8"/>
               </a:solidFill>
-              <a:ln w="9525" cap="sq">
-                <a:solidFill>
-                  <a:srgbClr val="D7E0E8"/>
-                </a:solidFill>
-                <a:prstDash val="solid"/>
-                <a:miter/>
-              </a:ln>
-            </p:spPr>
-            <p:txBody>
-              <a:bodyPr/>
-              <a:lstStyle/>
-              <a:p>
-                <a:endParaRPr lang="es-CL" noProof="0" dirty="0"/>
-              </a:p>
-            </p:txBody>
-          </p:sp>
-          <p:sp>
-            <p:nvSpPr>
-              <p:cNvPr id="43" name="TextBox 43"/>
-              <p:cNvSpPr txBox="1"/>
-              <p:nvPr/>
-            </p:nvSpPr>
-            <p:spPr>
-              <a:xfrm>
-                <a:off x="0" y="-38100"/>
-                <a:ext cx="10033000" cy="3657600"/>
-              </a:xfrm>
-              <a:prstGeom prst="rect">
-                <a:avLst/>
-              </a:prstGeom>
-            </p:spPr>
-            <p:txBody>
-              <a:bodyPr lIns="50800" tIns="50800" rIns="50800" bIns="50800" rtlCol="0" anchor="ctr"/>
-              <a:lstStyle/>
-              <a:p>
-                <a:pPr algn="l">
-                  <a:lnSpc>
-                    <a:spcPts val="1679"/>
-                  </a:lnSpc>
-                </a:pPr>
-                <a:endParaRPr lang="es-CL" noProof="0" dirty="0"/>
-              </a:p>
-            </p:txBody>
-          </p:sp>
-        </p:grpSp>
-        <p:grpSp>
-          <p:nvGrpSpPr>
-            <p:cNvPr id="44" name="Group 44"/>
-            <p:cNvGrpSpPr/>
-            <p:nvPr/>
-          </p:nvGrpSpPr>
-          <p:grpSpPr>
-            <a:xfrm>
-              <a:off x="431800" y="381000"/>
-              <a:ext cx="1270000" cy="1270000"/>
-              <a:chOff x="0" y="0"/>
-              <a:chExt cx="1270000" cy="1270000"/>
-            </a:xfrm>
-          </p:grpSpPr>
-          <p:sp>
-            <p:nvSpPr>
-              <p:cNvPr id="45" name="Freeform 45"/>
-              <p:cNvSpPr/>
-              <p:nvPr/>
-            </p:nvSpPr>
-            <p:spPr>
-              <a:xfrm>
-                <a:off x="0" y="0"/>
-                <a:ext cx="1270000" cy="1270000"/>
-              </a:xfrm>
-              <a:custGeom>
-                <a:avLst/>
-                <a:gdLst/>
-                <a:ahLst/>
-                <a:cxnLst/>
-                <a:rect l="l" t="t" r="r" b="b"/>
-                <a:pathLst>
-                  <a:path w="1270000" h="1270000">
-                    <a:moveTo>
-                      <a:pt x="0" y="0"/>
-                    </a:moveTo>
-                    <a:lnTo>
-                      <a:pt x="1270000" y="0"/>
-                    </a:lnTo>
-                    <a:lnTo>
-                      <a:pt x="1270000" y="1270000"/>
-                    </a:lnTo>
-                    <a:lnTo>
-                      <a:pt x="0" y="1270000"/>
-                    </a:lnTo>
-                    <a:close/>
-                  </a:path>
-                </a:pathLst>
-              </a:custGeom>
-              <a:solidFill>
-                <a:srgbClr val="0878B9"/>
-              </a:solidFill>
-              <a:ln cap="sq">
-                <a:noFill/>
-                <a:prstDash val="solid"/>
-                <a:miter/>
-              </a:ln>
-            </p:spPr>
-            <p:txBody>
-              <a:bodyPr/>
-              <a:lstStyle/>
-              <a:p>
-                <a:endParaRPr lang="es-CL" noProof="0" dirty="0"/>
-              </a:p>
-            </p:txBody>
-          </p:sp>
-          <p:sp>
-            <p:nvSpPr>
-              <p:cNvPr id="46" name="TextBox 46"/>
-              <p:cNvSpPr txBox="1"/>
-              <p:nvPr/>
-            </p:nvSpPr>
-            <p:spPr>
-              <a:xfrm>
-                <a:off x="0" y="-38100"/>
-                <a:ext cx="1270000" cy="1308100"/>
-              </a:xfrm>
-              <a:prstGeom prst="rect">
-                <a:avLst/>
-              </a:prstGeom>
-            </p:spPr>
-            <p:txBody>
-              <a:bodyPr lIns="50800" tIns="50800" rIns="50800" bIns="50800" rtlCol="0" anchor="ctr"/>
-              <a:lstStyle/>
-              <a:p>
-                <a:pPr algn="l">
-                  <a:lnSpc>
-                    <a:spcPts val="1679"/>
-                  </a:lnSpc>
-                </a:pPr>
-                <a:endParaRPr lang="es-CL" noProof="0" dirty="0"/>
-              </a:p>
-            </p:txBody>
-          </p:sp>
-        </p:grpSp>
+              <a:prstDash val="solid"/>
+              <a:miter/>
+            </a:ln>
+          </p:spPr>
+          <p:txBody>
+            <a:bodyPr/>
+            <a:lstStyle/>
+            <a:p>
+              <a:endParaRPr lang="es-CL" noProof="0" dirty="0"/>
+            </a:p>
+          </p:txBody>
+        </p:sp>
         <p:sp>
           <p:nvSpPr>
-            <p:cNvPr id="47" name="TextBox 47"/>
+            <p:cNvPr id="43" name="TextBox 43"/>
             <p:cNvSpPr txBox="1"/>
             <p:nvPr/>
           </p:nvSpPr>
           <p:spPr>
             <a:xfrm>
-              <a:off x="431800" y="396875"/>
-              <a:ext cx="1270000" cy="624205"/>
+              <a:off x="0" y="-38100"/>
+              <a:ext cx="10033000" cy="3657600"/>
             </a:xfrm>
             <a:prstGeom prst="rect">
               <a:avLst/>
             </a:prstGeom>
           </p:spPr>
           <p:txBody>
-            <a:bodyPr lIns="0" tIns="0" rIns="0" bIns="0" rtlCol="0" anchor="t">
-              <a:spAutoFit/>
-            </a:bodyPr>
-            <a:lstStyle/>
-            <a:p>
-              <a:pPr algn="ctr">
-                <a:lnSpc>
-                  <a:spcPts val="3990"/>
-                </a:lnSpc>
-              </a:pPr>
-              <a:r>
-                <a:rPr lang="es-CL" sz="2850" b="1" noProof="0" dirty="0">
-                  <a:solidFill>
-                    <a:srgbClr val="FFFFFF"/>
-                  </a:solidFill>
-                  <a:latin typeface="Montserrat Bold"/>
-                  <a:ea typeface="Montserrat Bold"/>
-                  <a:cs typeface="Montserrat Bold"/>
-                  <a:sym typeface="Montserrat Bold"/>
-                </a:rPr>
-                <a:t>HS</a:t>
-              </a:r>
-            </a:p>
-          </p:txBody>
-        </p:sp>
-        <p:sp>
-          <p:nvSpPr>
-            <p:cNvPr id="48" name="TextBox 48"/>
-            <p:cNvSpPr txBox="1"/>
-            <p:nvPr/>
-          </p:nvSpPr>
-          <p:spPr>
-            <a:xfrm>
-              <a:off x="2222500" y="473075"/>
-              <a:ext cx="7493000" cy="456565"/>
-            </a:xfrm>
-            <a:prstGeom prst="rect">
-              <a:avLst/>
-            </a:prstGeom>
-          </p:spPr>
-          <p:txBody>
-            <a:bodyPr lIns="0" tIns="0" rIns="0" bIns="0" rtlCol="0" anchor="t">
-              <a:spAutoFit/>
-            </a:bodyPr>
+            <a:bodyPr lIns="50800" tIns="50800" rIns="50800" bIns="50800" rtlCol="0" anchor="ctr"/>
             <a:lstStyle/>
             <a:p>
               <a:pPr algn="l">
                 <a:lnSpc>
-                  <a:spcPts val="2640"/>
+                  <a:spcPts val="1679"/>
                 </a:lnSpc>
               </a:pPr>
-              <a:r>
-                <a:rPr lang="es-CL" sz="2400" b="1" noProof="0" dirty="0">
-                  <a:solidFill>
-                    <a:srgbClr val="082B4C"/>
-                  </a:solidFill>
-                  <a:latin typeface="Montserrat Bold"/>
-                  <a:ea typeface="Montserrat Bold"/>
-                  <a:cs typeface="Montserrat Bold"/>
-                  <a:sym typeface="Montserrat Bold"/>
-                </a:rPr>
-                <a:t>Héctor Sanhueza Castro</a:t>
-              </a:r>
-            </a:p>
-          </p:txBody>
-        </p:sp>
-        <p:sp>
-          <p:nvSpPr>
-            <p:cNvPr id="49" name="TextBox 49"/>
-            <p:cNvSpPr txBox="1"/>
-            <p:nvPr/>
-          </p:nvSpPr>
-          <p:spPr>
-            <a:xfrm>
-              <a:off x="2222500" y="1266825"/>
-              <a:ext cx="7493000" cy="310515"/>
-            </a:xfrm>
-            <a:prstGeom prst="rect">
-              <a:avLst/>
-            </a:prstGeom>
-          </p:spPr>
-          <p:txBody>
-            <a:bodyPr lIns="0" tIns="0" rIns="0" bIns="0" rtlCol="0" anchor="t">
-              <a:spAutoFit/>
-            </a:bodyPr>
-            <a:lstStyle/>
-            <a:p>
-              <a:pPr algn="l">
-                <a:lnSpc>
-                  <a:spcPts val="1995"/>
-                </a:lnSpc>
-              </a:pPr>
-              <a:r>
-                <a:rPr lang="es-CL" sz="1425" b="1" spc="114" noProof="0" dirty="0">
-                  <a:solidFill>
-                    <a:srgbClr val="0878B9"/>
-                  </a:solidFill>
-                  <a:latin typeface="Montserrat Bold"/>
-                  <a:ea typeface="Montserrat Bold"/>
-                  <a:cs typeface="Montserrat Bold"/>
-                  <a:sym typeface="Montserrat Bold"/>
-                </a:rPr>
-                <a:t>IA Y PRUEBAS</a:t>
-              </a:r>
-            </a:p>
-          </p:txBody>
-        </p:sp>
-        <p:sp>
-          <p:nvSpPr>
-            <p:cNvPr id="50" name="TextBox 50"/>
-            <p:cNvSpPr txBox="1"/>
-            <p:nvPr/>
-          </p:nvSpPr>
-          <p:spPr>
-            <a:xfrm>
-              <a:off x="2222500" y="1949450"/>
-              <a:ext cx="7493000" cy="393700"/>
-            </a:xfrm>
-            <a:prstGeom prst="rect">
-              <a:avLst/>
-            </a:prstGeom>
-          </p:spPr>
-          <p:txBody>
-            <a:bodyPr lIns="0" tIns="0" rIns="0" bIns="0" rtlCol="0" anchor="t">
-              <a:spAutoFit/>
-            </a:bodyPr>
-            <a:lstStyle/>
-            <a:p>
-              <a:pPr algn="l">
-                <a:lnSpc>
-                  <a:spcPts val="2437"/>
-                </a:lnSpc>
-              </a:pPr>
-              <a:r>
-                <a:rPr lang="es-CL" sz="1875" noProof="0" dirty="0">
-                  <a:solidFill>
-                    <a:srgbClr val="082B4C"/>
-                  </a:solidFill>
-                  <a:latin typeface="Source Sans 3"/>
-                  <a:ea typeface="Source Sans 3"/>
-                  <a:cs typeface="Source Sans 3"/>
-                  <a:sym typeface="Source Sans 3"/>
-                </a:rPr>
-                <a:t>Análisis IA, pruebas e integración</a:t>
-              </a:r>
+              <a:endParaRPr lang="es-CL" noProof="0" dirty="0"/>
             </a:p>
           </p:txBody>
         </p:sp>
       </p:grpSp>
+      <p:sp>
+        <p:nvSpPr>
+          <p:cNvPr id="48" name="TextBox 48"/>
+          <p:cNvSpPr txBox="1"/>
+          <p:nvPr/>
+        </p:nvSpPr>
+        <p:spPr>
+          <a:xfrm>
+            <a:off x="10906125" y="6593681"/>
+            <a:ext cx="5619750" cy="342424"/>
+          </a:xfrm>
+          <a:prstGeom prst="rect">
+            <a:avLst/>
+          </a:prstGeom>
+        </p:spPr>
+        <p:txBody>
+          <a:bodyPr lIns="0" tIns="0" rIns="0" bIns="0" rtlCol="0" anchor="t">
+            <a:spAutoFit/>
+          </a:bodyPr>
+          <a:lstStyle/>
+          <a:p>
+            <a:pPr algn="l">
+              <a:lnSpc>
+                <a:spcPts val="2640"/>
+              </a:lnSpc>
+            </a:pPr>
+            <a:r>
+              <a:rPr lang="es-CL" sz="2400" b="1" noProof="0" dirty="0">
+                <a:solidFill>
+                  <a:srgbClr val="082B4C"/>
+                </a:solidFill>
+                <a:latin typeface="Montserrat Bold"/>
+                <a:ea typeface="Montserrat Bold"/>
+                <a:cs typeface="Montserrat Bold"/>
+                <a:sym typeface="Montserrat Bold"/>
+              </a:rPr>
+              <a:t>Héctor Sanhueza Castro</a:t>
+            </a:r>
+          </a:p>
+        </p:txBody>
+      </p:sp>
+      <p:sp>
+        <p:nvSpPr>
+          <p:cNvPr id="49" name="TextBox 49"/>
+          <p:cNvSpPr txBox="1"/>
+          <p:nvPr/>
+        </p:nvSpPr>
+        <p:spPr>
+          <a:xfrm>
+            <a:off x="10906125" y="7188994"/>
+            <a:ext cx="5619750" cy="232886"/>
+          </a:xfrm>
+          <a:prstGeom prst="rect">
+            <a:avLst/>
+          </a:prstGeom>
+        </p:spPr>
+        <p:txBody>
+          <a:bodyPr lIns="0" tIns="0" rIns="0" bIns="0" rtlCol="0" anchor="t">
+            <a:spAutoFit/>
+          </a:bodyPr>
+          <a:lstStyle/>
+          <a:p>
+            <a:pPr algn="l">
+              <a:lnSpc>
+                <a:spcPts val="1995"/>
+              </a:lnSpc>
+            </a:pPr>
+            <a:r>
+              <a:rPr lang="es-CL" sz="1425" b="1" spc="114" noProof="0" dirty="0">
+                <a:solidFill>
+                  <a:srgbClr val="0878B9"/>
+                </a:solidFill>
+                <a:latin typeface="Montserrat Bold"/>
+                <a:ea typeface="Montserrat Bold"/>
+                <a:cs typeface="Montserrat Bold"/>
+                <a:sym typeface="Montserrat Bold"/>
+              </a:rPr>
+              <a:t>IA Y PRUEBAS</a:t>
+            </a:r>
+          </a:p>
+        </p:txBody>
+      </p:sp>
+      <p:sp>
+        <p:nvSpPr>
+          <p:cNvPr id="50" name="TextBox 50"/>
+          <p:cNvSpPr txBox="1"/>
+          <p:nvPr/>
+        </p:nvSpPr>
+        <p:spPr>
+          <a:xfrm>
+            <a:off x="10906125" y="7700963"/>
+            <a:ext cx="5619750" cy="295275"/>
+          </a:xfrm>
+          <a:prstGeom prst="rect">
+            <a:avLst/>
+          </a:prstGeom>
+        </p:spPr>
+        <p:txBody>
+          <a:bodyPr lIns="0" tIns="0" rIns="0" bIns="0" rtlCol="0" anchor="t">
+            <a:spAutoFit/>
+          </a:bodyPr>
+          <a:lstStyle/>
+          <a:p>
+            <a:pPr algn="l">
+              <a:lnSpc>
+                <a:spcPts val="2437"/>
+              </a:lnSpc>
+            </a:pPr>
+            <a:r>
+              <a:rPr lang="es-CL" sz="1875" noProof="0" dirty="0">
+                <a:solidFill>
+                  <a:srgbClr val="082B4C"/>
+                </a:solidFill>
+                <a:latin typeface="Source Sans 3"/>
+                <a:ea typeface="Source Sans 3"/>
+                <a:cs typeface="Source Sans 3"/>
+                <a:sym typeface="Source Sans 3"/>
+              </a:rPr>
+              <a:t>Análisis IA, pruebas e integración</a:t>
+            </a:r>
+          </a:p>
+        </p:txBody>
+      </p:sp>
       <p:grpSp>
         <p:nvGrpSpPr>
           <p:cNvPr id="56" name="Grupo 55">
@@ -5300,6 +4779,1004 @@
           </p:txBody>
         </p:sp>
       </p:grpSp>
+      <p:grpSp>
+        <p:nvGrpSpPr>
+          <p:cNvPr id="59" name="Grupo 58">
+            <a:extLst>
+              <a:ext uri="{FF2B5EF4-FFF2-40B4-BE49-F238E27FC236}">
+                <a16:creationId xmlns:a16="http://schemas.microsoft.com/office/drawing/2014/main" id="{E79AB83C-8ED7-FF0A-6A85-3926B6FD9786}"/>
+              </a:ext>
+            </a:extLst>
+          </p:cNvPr>
+          <p:cNvGrpSpPr/>
+          <p:nvPr/>
+        </p:nvGrpSpPr>
+        <p:grpSpPr>
+          <a:xfrm>
+            <a:off x="857250" y="2849280"/>
+            <a:ext cx="7548563" cy="2770470"/>
+            <a:chOff x="857250" y="2849280"/>
+            <a:chExt cx="7548563" cy="2770470"/>
+          </a:xfrm>
+        </p:grpSpPr>
+        <p:grpSp>
+          <p:nvGrpSpPr>
+            <p:cNvPr id="8" name="Group 8"/>
+            <p:cNvGrpSpPr/>
+            <p:nvPr/>
+          </p:nvGrpSpPr>
+          <p:grpSpPr>
+            <a:xfrm>
+              <a:off x="857250" y="2849280"/>
+              <a:ext cx="7548563" cy="2770470"/>
+              <a:chOff x="0" y="-74460"/>
+              <a:chExt cx="10064751" cy="3693960"/>
+            </a:xfrm>
+          </p:grpSpPr>
+          <p:sp>
+            <p:nvSpPr>
+              <p:cNvPr id="9" name="Freeform 9"/>
+              <p:cNvSpPr/>
+              <p:nvPr/>
+            </p:nvSpPr>
+            <p:spPr>
+              <a:xfrm>
+                <a:off x="31751" y="-74460"/>
+                <a:ext cx="10033000" cy="3619500"/>
+              </a:xfrm>
+              <a:custGeom>
+                <a:avLst/>
+                <a:gdLst/>
+                <a:ahLst/>
+                <a:cxnLst/>
+                <a:rect l="l" t="t" r="r" b="b"/>
+                <a:pathLst>
+                  <a:path w="10033000" h="3619500">
+                    <a:moveTo>
+                      <a:pt x="0" y="0"/>
+                    </a:moveTo>
+                    <a:lnTo>
+                      <a:pt x="10033000" y="0"/>
+                    </a:lnTo>
+                    <a:lnTo>
+                      <a:pt x="10033000" y="3619500"/>
+                    </a:lnTo>
+                    <a:lnTo>
+                      <a:pt x="0" y="3619500"/>
+                    </a:lnTo>
+                    <a:close/>
+                  </a:path>
+                </a:pathLst>
+              </a:custGeom>
+              <a:solidFill>
+                <a:srgbClr val="FFFFFF"/>
+              </a:solidFill>
+              <a:ln w="9525" cap="sq">
+                <a:solidFill>
+                  <a:srgbClr val="D7E0E8"/>
+                </a:solidFill>
+                <a:prstDash val="solid"/>
+                <a:miter/>
+              </a:ln>
+            </p:spPr>
+            <p:txBody>
+              <a:bodyPr/>
+              <a:lstStyle/>
+              <a:p>
+                <a:endParaRPr lang="es-CL" noProof="0" dirty="0"/>
+              </a:p>
+            </p:txBody>
+          </p:sp>
+          <p:sp>
+            <p:nvSpPr>
+              <p:cNvPr id="10" name="TextBox 10"/>
+              <p:cNvSpPr txBox="1"/>
+              <p:nvPr/>
+            </p:nvSpPr>
+            <p:spPr>
+              <a:xfrm>
+                <a:off x="0" y="-38100"/>
+                <a:ext cx="10033000" cy="3657600"/>
+              </a:xfrm>
+              <a:prstGeom prst="rect">
+                <a:avLst/>
+              </a:prstGeom>
+            </p:spPr>
+            <p:txBody>
+              <a:bodyPr lIns="50800" tIns="50800" rIns="50800" bIns="50800" rtlCol="0" anchor="ctr"/>
+              <a:lstStyle/>
+              <a:p>
+                <a:pPr algn="l">
+                  <a:lnSpc>
+                    <a:spcPts val="1679"/>
+                  </a:lnSpc>
+                </a:pPr>
+                <a:endParaRPr lang="es-CL" noProof="0" dirty="0"/>
+              </a:p>
+            </p:txBody>
+          </p:sp>
+        </p:grpSp>
+        <p:sp>
+          <p:nvSpPr>
+            <p:cNvPr id="15" name="TextBox 15"/>
+            <p:cNvSpPr txBox="1"/>
+            <p:nvPr/>
+          </p:nvSpPr>
+          <p:spPr>
+            <a:xfrm>
+              <a:off x="2524125" y="3259931"/>
+              <a:ext cx="5619750" cy="342424"/>
+            </a:xfrm>
+            <a:prstGeom prst="rect">
+              <a:avLst/>
+            </a:prstGeom>
+          </p:spPr>
+          <p:txBody>
+            <a:bodyPr lIns="0" tIns="0" rIns="0" bIns="0" rtlCol="0" anchor="t">
+              <a:spAutoFit/>
+            </a:bodyPr>
+            <a:lstStyle/>
+            <a:p>
+              <a:pPr algn="l">
+                <a:lnSpc>
+                  <a:spcPts val="2640"/>
+                </a:lnSpc>
+              </a:pPr>
+              <a:r>
+                <a:rPr lang="es-CL" sz="2400" b="1" noProof="0" dirty="0">
+                  <a:solidFill>
+                    <a:srgbClr val="082B4C"/>
+                  </a:solidFill>
+                  <a:latin typeface="Montserrat Bold"/>
+                  <a:ea typeface="Montserrat Bold"/>
+                  <a:cs typeface="Montserrat Bold"/>
+                  <a:sym typeface="Montserrat Bold"/>
+                </a:rPr>
+                <a:t>María Trinidad Gaete</a:t>
+              </a:r>
+            </a:p>
+          </p:txBody>
+        </p:sp>
+        <p:sp>
+          <p:nvSpPr>
+            <p:cNvPr id="16" name="TextBox 16"/>
+            <p:cNvSpPr txBox="1"/>
+            <p:nvPr/>
+          </p:nvSpPr>
+          <p:spPr>
+            <a:xfrm>
+              <a:off x="2524125" y="3855244"/>
+              <a:ext cx="5619750" cy="232886"/>
+            </a:xfrm>
+            <a:prstGeom prst="rect">
+              <a:avLst/>
+            </a:prstGeom>
+          </p:spPr>
+          <p:txBody>
+            <a:bodyPr lIns="0" tIns="0" rIns="0" bIns="0" rtlCol="0" anchor="t">
+              <a:spAutoFit/>
+            </a:bodyPr>
+            <a:lstStyle/>
+            <a:p>
+              <a:pPr algn="l">
+                <a:lnSpc>
+                  <a:spcPts val="1995"/>
+                </a:lnSpc>
+              </a:pPr>
+              <a:r>
+                <a:rPr lang="es-CL" sz="1425" b="1" spc="114" noProof="0" dirty="0">
+                  <a:solidFill>
+                    <a:srgbClr val="0878B9"/>
+                  </a:solidFill>
+                  <a:latin typeface="Montserrat Bold"/>
+                  <a:ea typeface="Montserrat Bold"/>
+                  <a:cs typeface="Montserrat Bold"/>
+                  <a:sym typeface="Montserrat Bold"/>
+                </a:rPr>
+                <a:t>ANÁLISIS Y COORDINACIÓN</a:t>
+              </a:r>
+            </a:p>
+          </p:txBody>
+        </p:sp>
+        <p:sp>
+          <p:nvSpPr>
+            <p:cNvPr id="17" name="TextBox 17"/>
+            <p:cNvSpPr txBox="1"/>
+            <p:nvPr/>
+          </p:nvSpPr>
+          <p:spPr>
+            <a:xfrm>
+              <a:off x="2524125" y="4367213"/>
+              <a:ext cx="5619750" cy="600075"/>
+            </a:xfrm>
+            <a:prstGeom prst="rect">
+              <a:avLst/>
+            </a:prstGeom>
+          </p:spPr>
+          <p:txBody>
+            <a:bodyPr lIns="0" tIns="0" rIns="0" bIns="0" rtlCol="0" anchor="t">
+              <a:spAutoFit/>
+            </a:bodyPr>
+            <a:lstStyle/>
+            <a:p>
+              <a:pPr algn="l">
+                <a:lnSpc>
+                  <a:spcPts val="2437"/>
+                </a:lnSpc>
+              </a:pPr>
+              <a:r>
+                <a:rPr lang="es-CL" sz="1875" noProof="0" dirty="0">
+                  <a:solidFill>
+                    <a:srgbClr val="082B4C"/>
+                  </a:solidFill>
+                  <a:latin typeface="Source Sans 3"/>
+                  <a:ea typeface="Source Sans 3"/>
+                  <a:cs typeface="Source Sans 3"/>
+                  <a:sym typeface="Source Sans 3"/>
+                </a:rPr>
+                <a:t>Levantamiento de requerimientos, documentación y coordinación general</a:t>
+              </a:r>
+            </a:p>
+          </p:txBody>
+        </p:sp>
+        <p:grpSp>
+          <p:nvGrpSpPr>
+            <p:cNvPr id="57" name="Grupo 56">
+              <a:extLst>
+                <a:ext uri="{FF2B5EF4-FFF2-40B4-BE49-F238E27FC236}">
+                  <a16:creationId xmlns:a16="http://schemas.microsoft.com/office/drawing/2014/main" id="{18F0FD5E-84CA-DBD3-E0B2-A53E7B3F6B48}"/>
+                </a:ext>
+              </a:extLst>
+            </p:cNvPr>
+            <p:cNvGrpSpPr/>
+            <p:nvPr/>
+          </p:nvGrpSpPr>
+          <p:grpSpPr>
+            <a:xfrm>
+              <a:off x="1181100" y="3190875"/>
+              <a:ext cx="952500" cy="952500"/>
+              <a:chOff x="1181100" y="3190875"/>
+              <a:chExt cx="952500" cy="952500"/>
+            </a:xfrm>
+          </p:grpSpPr>
+          <p:grpSp>
+            <p:nvGrpSpPr>
+              <p:cNvPr id="11" name="Group 11"/>
+              <p:cNvGrpSpPr/>
+              <p:nvPr/>
+            </p:nvGrpSpPr>
+            <p:grpSpPr>
+              <a:xfrm>
+                <a:off x="1181100" y="3190875"/>
+                <a:ext cx="952500" cy="952500"/>
+                <a:chOff x="0" y="0"/>
+                <a:chExt cx="1270000" cy="1270000"/>
+              </a:xfrm>
+            </p:grpSpPr>
+            <p:sp>
+              <p:nvSpPr>
+                <p:cNvPr id="12" name="Freeform 12"/>
+                <p:cNvSpPr/>
+                <p:nvPr/>
+              </p:nvSpPr>
+              <p:spPr>
+                <a:xfrm>
+                  <a:off x="0" y="0"/>
+                  <a:ext cx="1270000" cy="1270000"/>
+                </a:xfrm>
+                <a:custGeom>
+                  <a:avLst/>
+                  <a:gdLst/>
+                  <a:ahLst/>
+                  <a:cxnLst/>
+                  <a:rect l="l" t="t" r="r" b="b"/>
+                  <a:pathLst>
+                    <a:path w="1270000" h="1270000">
+                      <a:moveTo>
+                        <a:pt x="0" y="0"/>
+                      </a:moveTo>
+                      <a:lnTo>
+                        <a:pt x="1270000" y="0"/>
+                      </a:lnTo>
+                      <a:lnTo>
+                        <a:pt x="1270000" y="1270000"/>
+                      </a:lnTo>
+                      <a:lnTo>
+                        <a:pt x="0" y="1270000"/>
+                      </a:lnTo>
+                      <a:close/>
+                    </a:path>
+                  </a:pathLst>
+                </a:custGeom>
+                <a:solidFill>
+                  <a:srgbClr val="F58220"/>
+                </a:solidFill>
+                <a:ln cap="sq">
+                  <a:noFill/>
+                  <a:prstDash val="solid"/>
+                  <a:miter/>
+                </a:ln>
+              </p:spPr>
+              <p:txBody>
+                <a:bodyPr/>
+                <a:lstStyle/>
+                <a:p>
+                  <a:endParaRPr lang="es-CL" noProof="0" dirty="0"/>
+                </a:p>
+              </p:txBody>
+            </p:sp>
+            <p:sp>
+              <p:nvSpPr>
+                <p:cNvPr id="13" name="TextBox 13"/>
+                <p:cNvSpPr txBox="1"/>
+                <p:nvPr/>
+              </p:nvSpPr>
+              <p:spPr>
+                <a:xfrm>
+                  <a:off x="0" y="-38100"/>
+                  <a:ext cx="1270000" cy="1308100"/>
+                </a:xfrm>
+                <a:prstGeom prst="rect">
+                  <a:avLst/>
+                </a:prstGeom>
+              </p:spPr>
+              <p:txBody>
+                <a:bodyPr lIns="50800" tIns="50800" rIns="50800" bIns="50800" rtlCol="0" anchor="ctr"/>
+                <a:lstStyle/>
+                <a:p>
+                  <a:pPr algn="l">
+                    <a:lnSpc>
+                      <a:spcPts val="1679"/>
+                    </a:lnSpc>
+                  </a:pPr>
+                  <a:endParaRPr lang="es-CL" noProof="0" dirty="0"/>
+                </a:p>
+              </p:txBody>
+            </p:sp>
+          </p:grpSp>
+          <p:pic>
+            <p:nvPicPr>
+              <p:cNvPr id="51" name="Gráfico 50">
+                <a:extLst>
+                  <a:ext uri="{FF2B5EF4-FFF2-40B4-BE49-F238E27FC236}">
+                    <a16:creationId xmlns:a16="http://schemas.microsoft.com/office/drawing/2014/main" id="{D7007BC8-4F19-57C3-0256-F113EB408889}"/>
+                  </a:ext>
+                </a:extLst>
+              </p:cNvPr>
+              <p:cNvPicPr>
+                <a:picLocks noChangeAspect="1"/>
+              </p:cNvPicPr>
+              <p:nvPr/>
+            </p:nvPicPr>
+            <p:blipFill>
+              <a:blip>
+                <a:extLst>
+                  <a:ext uri="{96DAC541-7B7A-43D3-8B79-37D633B846F1}">
+                    <asvg:svgBlip xmlns:asvg="http://schemas.microsoft.com/office/drawing/2016/SVG/main" r:embed="rId3"/>
+                  </a:ext>
+                </a:extLst>
+              </a:blip>
+              <a:stretch>
+                <a:fillRect/>
+              </a:stretch>
+            </p:blipFill>
+            <p:spPr>
+              <a:xfrm>
+                <a:off x="1287066" y="3300650"/>
+                <a:ext cx="740569" cy="740569"/>
+              </a:xfrm>
+              <a:prstGeom prst="rect">
+                <a:avLst/>
+              </a:prstGeom>
+            </p:spPr>
+          </p:pic>
+        </p:grpSp>
+      </p:grpSp>
+      <p:pic>
+        <p:nvPicPr>
+          <p:cNvPr id="54" name="Gráfico 53">
+            <a:extLst>
+              <a:ext uri="{FF2B5EF4-FFF2-40B4-BE49-F238E27FC236}">
+                <a16:creationId xmlns:a16="http://schemas.microsoft.com/office/drawing/2014/main" id="{1F8E10D2-5853-8985-2424-E003E7A61585}"/>
+              </a:ext>
+            </a:extLst>
+          </p:cNvPr>
+          <p:cNvPicPr>
+            <a:picLocks noChangeAspect="1"/>
+          </p:cNvPicPr>
+          <p:nvPr/>
+        </p:nvPicPr>
+        <p:blipFill>
+          <a:blip>
+            <a:extLst>
+              <a:ext uri="{96DAC541-7B7A-43D3-8B79-37D633B846F1}">
+                <asvg:svgBlip xmlns:asvg="http://schemas.microsoft.com/office/drawing/2016/SVG/main" r:embed="rId4"/>
+              </a:ext>
+            </a:extLst>
+          </a:blip>
+          <a:stretch>
+            <a:fillRect/>
+          </a:stretch>
+        </p:blipFill>
+        <p:spPr>
+          <a:xfrm>
+            <a:off x="9691782" y="3276600"/>
+            <a:ext cx="695135" cy="781050"/>
+          </a:xfrm>
+          <a:prstGeom prst="rect">
+            <a:avLst/>
+          </a:prstGeom>
+        </p:spPr>
+      </p:pic>
+      <p:grpSp>
+        <p:nvGrpSpPr>
+          <p:cNvPr id="63" name="Grupo 62">
+            <a:extLst>
+              <a:ext uri="{FF2B5EF4-FFF2-40B4-BE49-F238E27FC236}">
+                <a16:creationId xmlns:a16="http://schemas.microsoft.com/office/drawing/2014/main" id="{4715A9D2-1231-21E1-89F3-4C561C5859CB}"/>
+              </a:ext>
+            </a:extLst>
+          </p:cNvPr>
+          <p:cNvGrpSpPr/>
+          <p:nvPr/>
+        </p:nvGrpSpPr>
+        <p:grpSpPr>
+          <a:xfrm>
+            <a:off x="857250" y="6238875"/>
+            <a:ext cx="7524750" cy="2714625"/>
+            <a:chOff x="857250" y="6238875"/>
+            <a:chExt cx="7524750" cy="2714625"/>
+          </a:xfrm>
+        </p:grpSpPr>
+        <p:grpSp>
+          <p:nvGrpSpPr>
+            <p:cNvPr id="30" name="Group 30"/>
+            <p:cNvGrpSpPr/>
+            <p:nvPr/>
+          </p:nvGrpSpPr>
+          <p:grpSpPr>
+            <a:xfrm>
+              <a:off x="857250" y="6238875"/>
+              <a:ext cx="7524750" cy="2714625"/>
+              <a:chOff x="0" y="0"/>
+              <a:chExt cx="10033000" cy="3619500"/>
+            </a:xfrm>
+          </p:grpSpPr>
+          <p:sp>
+            <p:nvSpPr>
+              <p:cNvPr id="31" name="Freeform 31"/>
+              <p:cNvSpPr/>
+              <p:nvPr/>
+            </p:nvSpPr>
+            <p:spPr>
+              <a:xfrm>
+                <a:off x="0" y="0"/>
+                <a:ext cx="10033000" cy="3619500"/>
+              </a:xfrm>
+              <a:custGeom>
+                <a:avLst/>
+                <a:gdLst/>
+                <a:ahLst/>
+                <a:cxnLst/>
+                <a:rect l="l" t="t" r="r" b="b"/>
+                <a:pathLst>
+                  <a:path w="10033000" h="3619500">
+                    <a:moveTo>
+                      <a:pt x="0" y="0"/>
+                    </a:moveTo>
+                    <a:lnTo>
+                      <a:pt x="10033000" y="0"/>
+                    </a:lnTo>
+                    <a:lnTo>
+                      <a:pt x="10033000" y="3619500"/>
+                    </a:lnTo>
+                    <a:lnTo>
+                      <a:pt x="0" y="3619500"/>
+                    </a:lnTo>
+                    <a:close/>
+                  </a:path>
+                </a:pathLst>
+              </a:custGeom>
+              <a:solidFill>
+                <a:srgbClr val="FFFFFF"/>
+              </a:solidFill>
+              <a:ln w="9525" cap="sq">
+                <a:solidFill>
+                  <a:srgbClr val="D7E0E8"/>
+                </a:solidFill>
+                <a:prstDash val="solid"/>
+                <a:miter/>
+              </a:ln>
+            </p:spPr>
+            <p:txBody>
+              <a:bodyPr/>
+              <a:lstStyle/>
+              <a:p>
+                <a:endParaRPr lang="es-CL" noProof="0" dirty="0"/>
+              </a:p>
+            </p:txBody>
+          </p:sp>
+          <p:sp>
+            <p:nvSpPr>
+              <p:cNvPr id="32" name="TextBox 32"/>
+              <p:cNvSpPr txBox="1"/>
+              <p:nvPr/>
+            </p:nvSpPr>
+            <p:spPr>
+              <a:xfrm>
+                <a:off x="0" y="-38100"/>
+                <a:ext cx="10033000" cy="3657600"/>
+              </a:xfrm>
+              <a:prstGeom prst="rect">
+                <a:avLst/>
+              </a:prstGeom>
+            </p:spPr>
+            <p:txBody>
+              <a:bodyPr lIns="50800" tIns="50800" rIns="50800" bIns="50800" rtlCol="0" anchor="ctr"/>
+              <a:lstStyle/>
+              <a:p>
+                <a:pPr algn="l">
+                  <a:lnSpc>
+                    <a:spcPts val="1679"/>
+                  </a:lnSpc>
+                </a:pPr>
+                <a:endParaRPr lang="es-CL" noProof="0" dirty="0"/>
+              </a:p>
+            </p:txBody>
+          </p:sp>
+        </p:grpSp>
+        <p:sp>
+          <p:nvSpPr>
+            <p:cNvPr id="37" name="TextBox 37"/>
+            <p:cNvSpPr txBox="1"/>
+            <p:nvPr/>
+          </p:nvSpPr>
+          <p:spPr>
+            <a:xfrm>
+              <a:off x="2524125" y="6593681"/>
+              <a:ext cx="5619750" cy="342424"/>
+            </a:xfrm>
+            <a:prstGeom prst="rect">
+              <a:avLst/>
+            </a:prstGeom>
+          </p:spPr>
+          <p:txBody>
+            <a:bodyPr lIns="0" tIns="0" rIns="0" bIns="0" rtlCol="0" anchor="t">
+              <a:spAutoFit/>
+            </a:bodyPr>
+            <a:lstStyle/>
+            <a:p>
+              <a:pPr algn="l">
+                <a:lnSpc>
+                  <a:spcPts val="2640"/>
+                </a:lnSpc>
+              </a:pPr>
+              <a:r>
+                <a:rPr lang="es-CL" sz="2400" b="1" noProof="0" dirty="0">
+                  <a:solidFill>
+                    <a:srgbClr val="082B4C"/>
+                  </a:solidFill>
+                  <a:latin typeface="Montserrat Bold"/>
+                  <a:ea typeface="Montserrat Bold"/>
+                  <a:cs typeface="Montserrat Bold"/>
+                  <a:sym typeface="Montserrat Bold"/>
+                </a:rPr>
+                <a:t>David Muñoz Bravo</a:t>
+              </a:r>
+            </a:p>
+          </p:txBody>
+        </p:sp>
+        <p:sp>
+          <p:nvSpPr>
+            <p:cNvPr id="38" name="TextBox 38"/>
+            <p:cNvSpPr txBox="1"/>
+            <p:nvPr/>
+          </p:nvSpPr>
+          <p:spPr>
+            <a:xfrm>
+              <a:off x="2524125" y="7188994"/>
+              <a:ext cx="5619750" cy="232886"/>
+            </a:xfrm>
+            <a:prstGeom prst="rect">
+              <a:avLst/>
+            </a:prstGeom>
+          </p:spPr>
+          <p:txBody>
+            <a:bodyPr lIns="0" tIns="0" rIns="0" bIns="0" rtlCol="0" anchor="t">
+              <a:spAutoFit/>
+            </a:bodyPr>
+            <a:lstStyle/>
+            <a:p>
+              <a:pPr algn="l">
+                <a:lnSpc>
+                  <a:spcPts val="1995"/>
+                </a:lnSpc>
+              </a:pPr>
+              <a:r>
+                <a:rPr lang="es-CL" sz="1425" b="1" spc="114" noProof="0" dirty="0">
+                  <a:solidFill>
+                    <a:srgbClr val="0878B9"/>
+                  </a:solidFill>
+                  <a:latin typeface="Montserrat Bold"/>
+                  <a:ea typeface="Montserrat Bold"/>
+                  <a:cs typeface="Montserrat Bold"/>
+                  <a:sym typeface="Montserrat Bold"/>
+                </a:rPr>
+                <a:t>APLICACIÓN Y NEGOCIO</a:t>
+              </a:r>
+            </a:p>
+          </p:txBody>
+        </p:sp>
+        <p:sp>
+          <p:nvSpPr>
+            <p:cNvPr id="39" name="TextBox 39"/>
+            <p:cNvSpPr txBox="1"/>
+            <p:nvPr/>
+          </p:nvSpPr>
+          <p:spPr>
+            <a:xfrm>
+              <a:off x="2524125" y="7700963"/>
+              <a:ext cx="5619750" cy="600075"/>
+            </a:xfrm>
+            <a:prstGeom prst="rect">
+              <a:avLst/>
+            </a:prstGeom>
+          </p:spPr>
+          <p:txBody>
+            <a:bodyPr lIns="0" tIns="0" rIns="0" bIns="0" rtlCol="0" anchor="t">
+              <a:spAutoFit/>
+            </a:bodyPr>
+            <a:lstStyle/>
+            <a:p>
+              <a:pPr algn="l">
+                <a:lnSpc>
+                  <a:spcPts val="2437"/>
+                </a:lnSpc>
+              </a:pPr>
+              <a:r>
+                <a:rPr lang="es-CL" sz="1875" noProof="0" dirty="0">
+                  <a:solidFill>
+                    <a:srgbClr val="082B4C"/>
+                  </a:solidFill>
+                  <a:latin typeface="Source Sans 3"/>
+                  <a:ea typeface="Source Sans 3"/>
+                  <a:cs typeface="Source Sans 3"/>
+                  <a:sym typeface="Source Sans 3"/>
+                </a:rPr>
+                <a:t>Desarrollo, validaciones, reglas de negocio, </a:t>
+              </a:r>
+              <a:r>
+                <a:rPr lang="es-CL" sz="1875" noProof="0" dirty="0" err="1">
+                  <a:solidFill>
+                    <a:srgbClr val="082B4C"/>
+                  </a:solidFill>
+                  <a:latin typeface="Source Sans 3"/>
+                  <a:ea typeface="Source Sans 3"/>
+                  <a:cs typeface="Source Sans 3"/>
+                  <a:sym typeface="Source Sans 3"/>
+                </a:rPr>
+                <a:t>dashboard</a:t>
+              </a:r>
+              <a:r>
+                <a:rPr lang="es-CL" sz="1875" noProof="0" dirty="0">
+                  <a:solidFill>
+                    <a:srgbClr val="082B4C"/>
+                  </a:solidFill>
+                  <a:latin typeface="Source Sans 3"/>
+                  <a:ea typeface="Source Sans 3"/>
+                  <a:cs typeface="Source Sans 3"/>
+                  <a:sym typeface="Source Sans 3"/>
+                </a:rPr>
+                <a:t> y reportes</a:t>
+              </a:r>
+            </a:p>
+          </p:txBody>
+        </p:sp>
+        <p:grpSp>
+          <p:nvGrpSpPr>
+            <p:cNvPr id="62" name="Grupo 61">
+              <a:extLst>
+                <a:ext uri="{FF2B5EF4-FFF2-40B4-BE49-F238E27FC236}">
+                  <a16:creationId xmlns:a16="http://schemas.microsoft.com/office/drawing/2014/main" id="{EE9A7481-50DB-7470-A054-3621BB2489F2}"/>
+                </a:ext>
+              </a:extLst>
+            </p:cNvPr>
+            <p:cNvGrpSpPr/>
+            <p:nvPr/>
+          </p:nvGrpSpPr>
+          <p:grpSpPr>
+            <a:xfrm>
+              <a:off x="1181100" y="6496050"/>
+              <a:ext cx="952500" cy="981075"/>
+              <a:chOff x="1181100" y="6496050"/>
+              <a:chExt cx="952500" cy="981075"/>
+            </a:xfrm>
+          </p:grpSpPr>
+          <p:grpSp>
+            <p:nvGrpSpPr>
+              <p:cNvPr id="33" name="Group 33"/>
+              <p:cNvGrpSpPr/>
+              <p:nvPr/>
+            </p:nvGrpSpPr>
+            <p:grpSpPr>
+              <a:xfrm>
+                <a:off x="1181100" y="6496050"/>
+                <a:ext cx="952500" cy="981075"/>
+                <a:chOff x="0" y="-38100"/>
+                <a:chExt cx="1270000" cy="1308100"/>
+              </a:xfrm>
+            </p:grpSpPr>
+            <p:sp>
+              <p:nvSpPr>
+                <p:cNvPr id="34" name="Freeform 34"/>
+                <p:cNvSpPr/>
+                <p:nvPr/>
+              </p:nvSpPr>
+              <p:spPr>
+                <a:xfrm>
+                  <a:off x="0" y="0"/>
+                  <a:ext cx="1270000" cy="1270000"/>
+                </a:xfrm>
+                <a:custGeom>
+                  <a:avLst/>
+                  <a:gdLst/>
+                  <a:ahLst/>
+                  <a:cxnLst/>
+                  <a:rect l="l" t="t" r="r" b="b"/>
+                  <a:pathLst>
+                    <a:path w="1270000" h="1270000">
+                      <a:moveTo>
+                        <a:pt x="0" y="0"/>
+                      </a:moveTo>
+                      <a:lnTo>
+                        <a:pt x="1270000" y="0"/>
+                      </a:lnTo>
+                      <a:lnTo>
+                        <a:pt x="1270000" y="1270000"/>
+                      </a:lnTo>
+                      <a:lnTo>
+                        <a:pt x="0" y="1270000"/>
+                      </a:lnTo>
+                      <a:close/>
+                    </a:path>
+                  </a:pathLst>
+                </a:custGeom>
+                <a:solidFill>
+                  <a:srgbClr val="0878B9"/>
+                </a:solidFill>
+                <a:ln cap="sq">
+                  <a:noFill/>
+                  <a:prstDash val="solid"/>
+                  <a:miter/>
+                </a:ln>
+              </p:spPr>
+              <p:txBody>
+                <a:bodyPr/>
+                <a:lstStyle/>
+                <a:p>
+                  <a:endParaRPr lang="es-CL" noProof="0" dirty="0"/>
+                </a:p>
+              </p:txBody>
+            </p:sp>
+            <p:sp>
+              <p:nvSpPr>
+                <p:cNvPr id="35" name="TextBox 35"/>
+                <p:cNvSpPr txBox="1"/>
+                <p:nvPr/>
+              </p:nvSpPr>
+              <p:spPr>
+                <a:xfrm>
+                  <a:off x="0" y="-38100"/>
+                  <a:ext cx="1270000" cy="1308100"/>
+                </a:xfrm>
+                <a:prstGeom prst="rect">
+                  <a:avLst/>
+                </a:prstGeom>
+              </p:spPr>
+              <p:txBody>
+                <a:bodyPr lIns="50800" tIns="50800" rIns="50800" bIns="50800" rtlCol="0" anchor="ctr"/>
+                <a:lstStyle/>
+                <a:p>
+                  <a:pPr algn="l">
+                    <a:lnSpc>
+                      <a:spcPts val="1679"/>
+                    </a:lnSpc>
+                  </a:pPr>
+                  <a:endParaRPr lang="es-CL" noProof="0" dirty="0"/>
+                </a:p>
+              </p:txBody>
+            </p:sp>
+          </p:grpSp>
+          <p:pic>
+            <p:nvPicPr>
+              <p:cNvPr id="61" name="Gráfico 60">
+                <a:extLst>
+                  <a:ext uri="{FF2B5EF4-FFF2-40B4-BE49-F238E27FC236}">
+                    <a16:creationId xmlns:a16="http://schemas.microsoft.com/office/drawing/2014/main" id="{D7EF0C3B-5F20-1AA6-5493-5CB47AE889A1}"/>
+                  </a:ext>
+                </a:extLst>
+              </p:cNvPr>
+              <p:cNvPicPr>
+                <a:picLocks noChangeAspect="1"/>
+              </p:cNvPicPr>
+              <p:nvPr/>
+            </p:nvPicPr>
+            <p:blipFill>
+              <a:blip>
+                <a:extLst>
+                  <a:ext uri="{96DAC541-7B7A-43D3-8B79-37D633B846F1}">
+                    <asvg:svgBlip xmlns:asvg="http://schemas.microsoft.com/office/drawing/2016/SVG/main" r:embed="rId5"/>
+                  </a:ext>
+                </a:extLst>
+              </a:blip>
+              <a:stretch>
+                <a:fillRect/>
+              </a:stretch>
+            </p:blipFill>
+            <p:spPr>
+              <a:xfrm>
+                <a:off x="1276350" y="6672262"/>
+                <a:ext cx="762000" cy="657225"/>
+              </a:xfrm>
+              <a:prstGeom prst="rect">
+                <a:avLst/>
+              </a:prstGeom>
+            </p:spPr>
+          </p:pic>
+        </p:grpSp>
+      </p:grpSp>
+      <p:grpSp>
+        <p:nvGrpSpPr>
+          <p:cNvPr id="66" name="Grupo 65">
+            <a:extLst>
+              <a:ext uri="{FF2B5EF4-FFF2-40B4-BE49-F238E27FC236}">
+                <a16:creationId xmlns:a16="http://schemas.microsoft.com/office/drawing/2014/main" id="{39FDCCC1-85DD-F62A-7793-B89FD6F41E78}"/>
+              </a:ext>
+            </a:extLst>
+          </p:cNvPr>
+          <p:cNvGrpSpPr/>
+          <p:nvPr/>
+        </p:nvGrpSpPr>
+        <p:grpSpPr>
+          <a:xfrm>
+            <a:off x="9563100" y="6515100"/>
+            <a:ext cx="952500" cy="952500"/>
+            <a:chOff x="9563100" y="6515100"/>
+            <a:chExt cx="952500" cy="952500"/>
+          </a:xfrm>
+        </p:grpSpPr>
+        <p:grpSp>
+          <p:nvGrpSpPr>
+            <p:cNvPr id="44" name="Group 44"/>
+            <p:cNvGrpSpPr/>
+            <p:nvPr/>
+          </p:nvGrpSpPr>
+          <p:grpSpPr>
+            <a:xfrm>
+              <a:off x="9563100" y="6515100"/>
+              <a:ext cx="952500" cy="952500"/>
+              <a:chOff x="0" y="0"/>
+              <a:chExt cx="1270000" cy="1270000"/>
+            </a:xfrm>
+          </p:grpSpPr>
+          <p:sp>
+            <p:nvSpPr>
+              <p:cNvPr id="45" name="Freeform 45"/>
+              <p:cNvSpPr/>
+              <p:nvPr/>
+            </p:nvSpPr>
+            <p:spPr>
+              <a:xfrm>
+                <a:off x="0" y="0"/>
+                <a:ext cx="1270000" cy="1270000"/>
+              </a:xfrm>
+              <a:custGeom>
+                <a:avLst/>
+                <a:gdLst/>
+                <a:ahLst/>
+                <a:cxnLst/>
+                <a:rect l="l" t="t" r="r" b="b"/>
+                <a:pathLst>
+                  <a:path w="1270000" h="1270000">
+                    <a:moveTo>
+                      <a:pt x="0" y="0"/>
+                    </a:moveTo>
+                    <a:lnTo>
+                      <a:pt x="1270000" y="0"/>
+                    </a:lnTo>
+                    <a:lnTo>
+                      <a:pt x="1270000" y="1270000"/>
+                    </a:lnTo>
+                    <a:lnTo>
+                      <a:pt x="0" y="1270000"/>
+                    </a:lnTo>
+                    <a:close/>
+                  </a:path>
+                </a:pathLst>
+              </a:custGeom>
+              <a:solidFill>
+                <a:srgbClr val="0878B9"/>
+              </a:solidFill>
+              <a:ln cap="sq">
+                <a:noFill/>
+                <a:prstDash val="solid"/>
+                <a:miter/>
+              </a:ln>
+            </p:spPr>
+            <p:txBody>
+              <a:bodyPr/>
+              <a:lstStyle/>
+              <a:p>
+                <a:endParaRPr lang="es-CL" noProof="0" dirty="0"/>
+              </a:p>
+            </p:txBody>
+          </p:sp>
+          <p:sp>
+            <p:nvSpPr>
+              <p:cNvPr id="46" name="TextBox 46"/>
+              <p:cNvSpPr txBox="1"/>
+              <p:nvPr/>
+            </p:nvSpPr>
+            <p:spPr>
+              <a:xfrm>
+                <a:off x="0" y="-38100"/>
+                <a:ext cx="1270000" cy="1308100"/>
+              </a:xfrm>
+              <a:prstGeom prst="rect">
+                <a:avLst/>
+              </a:prstGeom>
+            </p:spPr>
+            <p:txBody>
+              <a:bodyPr lIns="50800" tIns="50800" rIns="50800" bIns="50800" rtlCol="0" anchor="ctr"/>
+              <a:lstStyle/>
+              <a:p>
+                <a:pPr algn="l">
+                  <a:lnSpc>
+                    <a:spcPts val="1679"/>
+                  </a:lnSpc>
+                </a:pPr>
+                <a:endParaRPr lang="es-CL" noProof="0" dirty="0"/>
+              </a:p>
+            </p:txBody>
+          </p:sp>
+        </p:grpSp>
+        <p:pic>
+          <p:nvPicPr>
+            <p:cNvPr id="65" name="Gráfico 64">
+              <a:extLst>
+                <a:ext uri="{FF2B5EF4-FFF2-40B4-BE49-F238E27FC236}">
+                  <a16:creationId xmlns:a16="http://schemas.microsoft.com/office/drawing/2014/main" id="{58C0FEDA-D6DE-0F1C-73AE-78DC8590885C}"/>
+                </a:ext>
+              </a:extLst>
+            </p:cNvPr>
+            <p:cNvPicPr>
+              <a:picLocks noChangeAspect="1"/>
+            </p:cNvPicPr>
+            <p:nvPr/>
+          </p:nvPicPr>
+          <p:blipFill>
+            <a:blip>
+              <a:extLst>
+                <a:ext uri="{96DAC541-7B7A-43D3-8B79-37D633B846F1}">
+                  <asvg:svgBlip xmlns:asvg="http://schemas.microsoft.com/office/drawing/2016/SVG/main" r:embed="rId6"/>
+                </a:ext>
+              </a:extLst>
+            </a:blip>
+            <a:stretch>
+              <a:fillRect/>
+            </a:stretch>
+          </p:blipFill>
+          <p:spPr>
+            <a:xfrm>
+              <a:off x="9656158" y="6599917"/>
+              <a:ext cx="766385" cy="782867"/>
+            </a:xfrm>
+            <a:prstGeom prst="rect">
+              <a:avLst/>
+            </a:prstGeom>
+          </p:spPr>
+        </p:pic>
+      </p:grpSp>
     </p:spTree>
   </p:cSld>
   <p:clrMapOvr>
@@ -5333,610 +5810,6 @@
           <a:chExt cx="0" cy="0"/>
         </a:xfrm>
       </p:grpSpPr>
-      <p:grpSp>
-        <p:nvGrpSpPr>
-          <p:cNvPr id="7" name="Group 7"/>
-          <p:cNvGrpSpPr/>
-          <p:nvPr/>
-        </p:nvGrpSpPr>
-        <p:grpSpPr>
-          <a:xfrm>
-            <a:off x="982317" y="3081130"/>
-            <a:ext cx="5715000" cy="4000500"/>
-            <a:chOff x="0" y="0"/>
-            <a:chExt cx="7620000" cy="5334000"/>
-          </a:xfrm>
-        </p:grpSpPr>
-        <p:sp>
-          <p:nvSpPr>
-            <p:cNvPr id="8" name="Freeform 8"/>
-            <p:cNvSpPr/>
-            <p:nvPr/>
-          </p:nvSpPr>
-          <p:spPr>
-            <a:xfrm>
-              <a:off x="0" y="0"/>
-              <a:ext cx="7620000" cy="5334000"/>
-            </a:xfrm>
-            <a:custGeom>
-              <a:avLst/>
-              <a:gdLst/>
-              <a:ahLst/>
-              <a:cxnLst/>
-              <a:rect l="l" t="t" r="r" b="b"/>
-              <a:pathLst>
-                <a:path w="7620000" h="5334000">
-                  <a:moveTo>
-                    <a:pt x="25400" y="0"/>
-                  </a:moveTo>
-                  <a:lnTo>
-                    <a:pt x="7594600" y="0"/>
-                  </a:lnTo>
-                  <a:cubicBezTo>
-                    <a:pt x="7608628" y="0"/>
-                    <a:pt x="7620000" y="11372"/>
-                    <a:pt x="7620000" y="25400"/>
-                  </a:cubicBezTo>
-                  <a:lnTo>
-                    <a:pt x="7620000" y="5308600"/>
-                  </a:lnTo>
-                  <a:cubicBezTo>
-                    <a:pt x="7620000" y="5322628"/>
-                    <a:pt x="7608628" y="5334000"/>
-                    <a:pt x="7594600" y="5334000"/>
-                  </a:cubicBezTo>
-                  <a:lnTo>
-                    <a:pt x="25400" y="5334000"/>
-                  </a:lnTo>
-                  <a:cubicBezTo>
-                    <a:pt x="11372" y="5334000"/>
-                    <a:pt x="0" y="5322628"/>
-                    <a:pt x="0" y="5308600"/>
-                  </a:cubicBezTo>
-                  <a:lnTo>
-                    <a:pt x="0" y="25400"/>
-                  </a:lnTo>
-                  <a:cubicBezTo>
-                    <a:pt x="0" y="11372"/>
-                    <a:pt x="11372" y="0"/>
-                    <a:pt x="25400" y="0"/>
-                  </a:cubicBezTo>
-                  <a:close/>
-                </a:path>
-              </a:pathLst>
-            </a:custGeom>
-            <a:solidFill>
-              <a:srgbClr val="FFFFFF"/>
-            </a:solidFill>
-            <a:ln cap="sq">
-              <a:noFill/>
-              <a:prstDash val="solid"/>
-              <a:miter/>
-            </a:ln>
-          </p:spPr>
-          <p:txBody>
-            <a:bodyPr/>
-            <a:lstStyle/>
-            <a:p>
-              <a:endParaRPr lang="es-CL" noProof="0" dirty="0"/>
-            </a:p>
-          </p:txBody>
-        </p:sp>
-        <p:sp>
-          <p:nvSpPr>
-            <p:cNvPr id="9" name="TextBox 9"/>
-            <p:cNvSpPr txBox="1"/>
-            <p:nvPr/>
-          </p:nvSpPr>
-          <p:spPr>
-            <a:xfrm>
-              <a:off x="0" y="19050"/>
-              <a:ext cx="7620000" cy="5314950"/>
-            </a:xfrm>
-            <a:prstGeom prst="rect">
-              <a:avLst/>
-            </a:prstGeom>
-          </p:spPr>
-          <p:txBody>
-            <a:bodyPr lIns="50800" tIns="50800" rIns="50800" bIns="50800" rtlCol="0" anchor="ctr"/>
-            <a:lstStyle/>
-            <a:p>
-              <a:pPr algn="ctr">
-                <a:lnSpc>
-                  <a:spcPts val="2310"/>
-                </a:lnSpc>
-              </a:pPr>
-              <a:r>
-                <a:rPr lang="es-CL" sz="2100" b="1" noProof="0" dirty="0">
-                  <a:solidFill>
-                    <a:srgbClr val="082B4C"/>
-                  </a:solidFill>
-                  <a:latin typeface="Montserrat Bold"/>
-                  <a:ea typeface="Montserrat Bold"/>
-                  <a:cs typeface="Montserrat Bold"/>
-                  <a:sym typeface="Montserrat Bold"/>
-                </a:rPr>
-                <a:t>PROBLEMA</a:t>
-              </a:r>
-            </a:p>
-          </p:txBody>
-        </p:sp>
-      </p:grpSp>
-      <p:grpSp>
-        <p:nvGrpSpPr>
-          <p:cNvPr id="10" name="Group 10"/>
-          <p:cNvGrpSpPr/>
-          <p:nvPr/>
-        </p:nvGrpSpPr>
-        <p:grpSpPr>
-          <a:xfrm>
-            <a:off x="11620500" y="2571750"/>
-            <a:ext cx="5810250" cy="4572000"/>
-            <a:chOff x="0" y="0"/>
-            <a:chExt cx="7747000" cy="6096000"/>
-          </a:xfrm>
-        </p:grpSpPr>
-        <p:sp>
-          <p:nvSpPr>
-            <p:cNvPr id="11" name="Freeform 11"/>
-            <p:cNvSpPr/>
-            <p:nvPr/>
-          </p:nvSpPr>
-          <p:spPr>
-            <a:xfrm>
-              <a:off x="0" y="0"/>
-              <a:ext cx="7747000" cy="6096000"/>
-            </a:xfrm>
-            <a:custGeom>
-              <a:avLst/>
-              <a:gdLst/>
-              <a:ahLst/>
-              <a:cxnLst/>
-              <a:rect l="l" t="t" r="r" b="b"/>
-              <a:pathLst>
-                <a:path w="7747000" h="6096000">
-                  <a:moveTo>
-                    <a:pt x="24984" y="0"/>
-                  </a:moveTo>
-                  <a:lnTo>
-                    <a:pt x="7722016" y="0"/>
-                  </a:lnTo>
-                  <a:cubicBezTo>
-                    <a:pt x="7728642" y="0"/>
-                    <a:pt x="7734997" y="2632"/>
-                    <a:pt x="7739683" y="7318"/>
-                  </a:cubicBezTo>
-                  <a:cubicBezTo>
-                    <a:pt x="7744368" y="12003"/>
-                    <a:pt x="7747000" y="18358"/>
-                    <a:pt x="7747000" y="24984"/>
-                  </a:cubicBezTo>
-                  <a:lnTo>
-                    <a:pt x="7747000" y="6071016"/>
-                  </a:lnTo>
-                  <a:cubicBezTo>
-                    <a:pt x="7747000" y="6077643"/>
-                    <a:pt x="7744368" y="6083997"/>
-                    <a:pt x="7739683" y="6088683"/>
-                  </a:cubicBezTo>
-                  <a:cubicBezTo>
-                    <a:pt x="7734997" y="6093368"/>
-                    <a:pt x="7728642" y="6096000"/>
-                    <a:pt x="7722016" y="6096000"/>
-                  </a:cubicBezTo>
-                  <a:lnTo>
-                    <a:pt x="24984" y="6096000"/>
-                  </a:lnTo>
-                  <a:cubicBezTo>
-                    <a:pt x="18358" y="6096000"/>
-                    <a:pt x="12003" y="6093368"/>
-                    <a:pt x="7318" y="6088683"/>
-                  </a:cubicBezTo>
-                  <a:cubicBezTo>
-                    <a:pt x="2632" y="6083997"/>
-                    <a:pt x="0" y="6077643"/>
-                    <a:pt x="0" y="6071016"/>
-                  </a:cubicBezTo>
-                  <a:lnTo>
-                    <a:pt x="0" y="24984"/>
-                  </a:lnTo>
-                  <a:cubicBezTo>
-                    <a:pt x="0" y="18358"/>
-                    <a:pt x="2632" y="12003"/>
-                    <a:pt x="7318" y="7318"/>
-                  </a:cubicBezTo>
-                  <a:cubicBezTo>
-                    <a:pt x="12003" y="2632"/>
-                    <a:pt x="18358" y="0"/>
-                    <a:pt x="24984" y="0"/>
-                  </a:cubicBezTo>
-                  <a:close/>
-                </a:path>
-              </a:pathLst>
-            </a:custGeom>
-            <a:solidFill>
-              <a:srgbClr val="082B4C"/>
-            </a:solidFill>
-            <a:ln cap="sq">
-              <a:noFill/>
-              <a:prstDash val="solid"/>
-              <a:miter/>
-            </a:ln>
-          </p:spPr>
-          <p:txBody>
-            <a:bodyPr/>
-            <a:lstStyle/>
-            <a:p>
-              <a:endParaRPr lang="es-CL" noProof="0" dirty="0"/>
-            </a:p>
-          </p:txBody>
-        </p:sp>
-        <p:sp>
-          <p:nvSpPr>
-            <p:cNvPr id="12" name="TextBox 12"/>
-            <p:cNvSpPr txBox="1"/>
-            <p:nvPr/>
-          </p:nvSpPr>
-          <p:spPr>
-            <a:xfrm>
-              <a:off x="0" y="28575"/>
-              <a:ext cx="7747000" cy="6067425"/>
-            </a:xfrm>
-            <a:prstGeom prst="rect">
-              <a:avLst/>
-            </a:prstGeom>
-          </p:spPr>
-          <p:txBody>
-            <a:bodyPr lIns="50800" tIns="50800" rIns="50800" bIns="50800" rtlCol="0" anchor="ctr"/>
-            <a:lstStyle/>
-            <a:p>
-              <a:pPr algn="ctr">
-                <a:lnSpc>
-                  <a:spcPts val="2392"/>
-                </a:lnSpc>
-              </a:pPr>
-              <a:r>
-                <a:rPr lang="es-CL" sz="2175" b="1" noProof="0" dirty="0">
-                  <a:solidFill>
-                    <a:srgbClr val="FFFFFF"/>
-                  </a:solidFill>
-                  <a:latin typeface="Montserrat Bold"/>
-                  <a:ea typeface="Montserrat Bold"/>
-                  <a:cs typeface="Montserrat Bold"/>
-                  <a:sym typeface="Montserrat Bold"/>
-                </a:rPr>
-                <a:t>TTDH AUTOMATION</a:t>
-              </a:r>
-            </a:p>
-          </p:txBody>
-        </p:sp>
-      </p:grpSp>
-      <p:sp>
-        <p:nvSpPr>
-          <p:cNvPr id="13" name="AutoShape 13"/>
-          <p:cNvSpPr/>
-          <p:nvPr/>
-        </p:nvSpPr>
-        <p:spPr>
-          <a:xfrm>
-            <a:off x="6858000" y="5162550"/>
-            <a:ext cx="4572000" cy="0"/>
-          </a:xfrm>
-          <a:prstGeom prst="line">
-            <a:avLst/>
-          </a:prstGeom>
-          <a:ln w="38100" cap="rnd">
-            <a:solidFill>
-              <a:srgbClr val="F58220"/>
-            </a:solidFill>
-            <a:prstDash val="solid"/>
-            <a:headEnd type="none" w="sm" len="sm"/>
-            <a:tailEnd type="arrow" w="med" len="sm"/>
-          </a:ln>
-        </p:spPr>
-        <p:txBody>
-          <a:bodyPr/>
-          <a:lstStyle/>
-          <a:p>
-            <a:endParaRPr lang="es-CL" noProof="0" dirty="0"/>
-          </a:p>
-        </p:txBody>
-      </p:sp>
-      <p:sp>
-        <p:nvSpPr>
-          <p:cNvPr id="14" name="TextBox 14"/>
-          <p:cNvSpPr txBox="1"/>
-          <p:nvPr/>
-        </p:nvSpPr>
-        <p:spPr>
-          <a:xfrm>
-            <a:off x="1506192" y="3879056"/>
-            <a:ext cx="4667250" cy="2128838"/>
-          </a:xfrm>
-          <a:prstGeom prst="rect">
-            <a:avLst/>
-          </a:prstGeom>
-        </p:spPr>
-        <p:txBody>
-          <a:bodyPr lIns="0" tIns="0" rIns="0" bIns="0" rtlCol="0" anchor="t">
-            <a:spAutoFit/>
-          </a:bodyPr>
-          <a:lstStyle/>
-          <a:p>
-            <a:pPr algn="l">
-              <a:lnSpc>
-                <a:spcPts val="2437"/>
-              </a:lnSpc>
-            </a:pPr>
-            <a:r>
-              <a:rPr lang="es-CL" sz="1875" noProof="0" dirty="0">
-                <a:solidFill>
-                  <a:srgbClr val="082B4C"/>
-                </a:solidFill>
-                <a:latin typeface="Source Sans 3"/>
-                <a:ea typeface="Source Sans 3"/>
-                <a:cs typeface="Source Sans 3"/>
-                <a:sym typeface="Source Sans 3"/>
-              </a:rPr>
-              <a:t>Procesamiento manual de gran volumen</a:t>
-            </a:r>
-          </a:p>
-          <a:p>
-            <a:pPr algn="l">
-              <a:lnSpc>
-                <a:spcPts val="2437"/>
-              </a:lnSpc>
-            </a:pPr>
-            <a:endParaRPr lang="es-CL" sz="1875" noProof="0" dirty="0">
-              <a:solidFill>
-                <a:srgbClr val="082B4C"/>
-              </a:solidFill>
-              <a:latin typeface="Source Sans 3"/>
-              <a:ea typeface="Source Sans 3"/>
-              <a:cs typeface="Source Sans 3"/>
-              <a:sym typeface="Source Sans 3"/>
-            </a:endParaRPr>
-          </a:p>
-          <a:p>
-            <a:pPr algn="l">
-              <a:lnSpc>
-                <a:spcPts val="2437"/>
-              </a:lnSpc>
-            </a:pPr>
-            <a:r>
-              <a:rPr lang="es-CL" sz="1875" noProof="0" dirty="0">
-                <a:solidFill>
-                  <a:srgbClr val="082B4C"/>
-                </a:solidFill>
-                <a:latin typeface="Source Sans 3"/>
-                <a:ea typeface="Source Sans 3"/>
-                <a:cs typeface="Source Sans 3"/>
-                <a:sym typeface="Source Sans 3"/>
-              </a:rPr>
-              <a:t>Errores, duplicidades e inconsistencias</a:t>
-            </a:r>
-          </a:p>
-          <a:p>
-            <a:pPr algn="l">
-              <a:lnSpc>
-                <a:spcPts val="2437"/>
-              </a:lnSpc>
-            </a:pPr>
-            <a:endParaRPr lang="es-CL" sz="1875" noProof="0" dirty="0">
-              <a:solidFill>
-                <a:srgbClr val="082B4C"/>
-              </a:solidFill>
-              <a:latin typeface="Source Sans 3"/>
-              <a:ea typeface="Source Sans 3"/>
-              <a:cs typeface="Source Sans 3"/>
-              <a:sym typeface="Source Sans 3"/>
-            </a:endParaRPr>
-          </a:p>
-          <a:p>
-            <a:pPr algn="l">
-              <a:lnSpc>
-                <a:spcPts val="2437"/>
-              </a:lnSpc>
-            </a:pPr>
-            <a:endParaRPr lang="es-CL" sz="1875" noProof="0" dirty="0">
-              <a:solidFill>
-                <a:srgbClr val="082B4C"/>
-              </a:solidFill>
-              <a:latin typeface="Source Sans 3"/>
-              <a:ea typeface="Source Sans 3"/>
-              <a:cs typeface="Source Sans 3"/>
-              <a:sym typeface="Source Sans 3"/>
-            </a:endParaRPr>
-          </a:p>
-          <a:p>
-            <a:pPr algn="l">
-              <a:lnSpc>
-                <a:spcPts val="2437"/>
-              </a:lnSpc>
-            </a:pPr>
-            <a:endParaRPr lang="es-CL" sz="1875" noProof="0" dirty="0">
-              <a:solidFill>
-                <a:srgbClr val="082B4C"/>
-              </a:solidFill>
-              <a:latin typeface="Source Sans 3"/>
-              <a:ea typeface="Source Sans 3"/>
-              <a:cs typeface="Source Sans 3"/>
-              <a:sym typeface="Source Sans 3"/>
-            </a:endParaRPr>
-          </a:p>
-          <a:p>
-            <a:pPr algn="l">
-              <a:lnSpc>
-                <a:spcPts val="2437"/>
-              </a:lnSpc>
-            </a:pPr>
-            <a:r>
-              <a:rPr lang="es-CL" sz="1875" noProof="0" dirty="0">
-                <a:solidFill>
-                  <a:srgbClr val="082B4C"/>
-                </a:solidFill>
-                <a:latin typeface="Source Sans 3"/>
-                <a:ea typeface="Source Sans 3"/>
-                <a:cs typeface="Source Sans 3"/>
-                <a:sym typeface="Source Sans 3"/>
-              </a:rPr>
-              <a:t>Baja trazabilidad</a:t>
-            </a:r>
-          </a:p>
-        </p:txBody>
-      </p:sp>
-      <p:sp>
-        <p:nvSpPr>
-          <p:cNvPr id="15" name="TextBox 15"/>
-          <p:cNvSpPr txBox="1"/>
-          <p:nvPr/>
-        </p:nvSpPr>
-        <p:spPr>
-          <a:xfrm>
-            <a:off x="7191375" y="4629150"/>
-            <a:ext cx="3905250" cy="323850"/>
-          </a:xfrm>
-          <a:prstGeom prst="rect">
-            <a:avLst/>
-          </a:prstGeom>
-        </p:spPr>
-        <p:txBody>
-          <a:bodyPr lIns="0" tIns="0" rIns="0" bIns="0" rtlCol="0" anchor="t">
-            <a:spAutoFit/>
-          </a:bodyPr>
-          <a:lstStyle/>
-          <a:p>
-            <a:pPr algn="ctr">
-              <a:lnSpc>
-                <a:spcPts val="2625"/>
-              </a:lnSpc>
-            </a:pPr>
-            <a:r>
-              <a:rPr lang="es-CL" sz="1875" b="1" noProof="0" dirty="0">
-                <a:solidFill>
-                  <a:srgbClr val="F58220"/>
-                </a:solidFill>
-                <a:latin typeface="Montserrat Bold"/>
-                <a:ea typeface="Montserrat Bold"/>
-                <a:cs typeface="Montserrat Bold"/>
-                <a:sym typeface="Montserrat Bold"/>
-              </a:rPr>
-              <a:t>INTEGRAR  →  AUTOMATIZAR</a:t>
-            </a:r>
-          </a:p>
-        </p:txBody>
-      </p:sp>
-      <p:sp>
-        <p:nvSpPr>
-          <p:cNvPr id="16" name="TextBox 16"/>
-          <p:cNvSpPr txBox="1"/>
-          <p:nvPr/>
-        </p:nvSpPr>
-        <p:spPr>
-          <a:xfrm>
-            <a:off x="12192000" y="3695700"/>
-            <a:ext cx="4667250" cy="1519238"/>
-          </a:xfrm>
-          <a:prstGeom prst="rect">
-            <a:avLst/>
-          </a:prstGeom>
-        </p:spPr>
-        <p:txBody>
-          <a:bodyPr lIns="0" tIns="0" rIns="0" bIns="0" rtlCol="0" anchor="t">
-            <a:spAutoFit/>
-          </a:bodyPr>
-          <a:lstStyle/>
-          <a:p>
-            <a:pPr algn="l">
-              <a:lnSpc>
-                <a:spcPts val="2437"/>
-              </a:lnSpc>
-            </a:pPr>
-            <a:r>
-              <a:rPr lang="es-CL" sz="1875" noProof="0" dirty="0">
-                <a:solidFill>
-                  <a:srgbClr val="082B4C"/>
-                </a:solidFill>
-                <a:latin typeface="Source Sans 3"/>
-                <a:ea typeface="Source Sans 3"/>
-                <a:cs typeface="Source Sans 3"/>
-                <a:sym typeface="Source Sans 3"/>
-              </a:rPr>
-              <a:t>ETL, validaciones y reglas de negocio</a:t>
-            </a:r>
-          </a:p>
-          <a:p>
-            <a:pPr algn="l">
-              <a:lnSpc>
-                <a:spcPts val="2437"/>
-              </a:lnSpc>
-            </a:pPr>
-            <a:endParaRPr lang="es-CL" sz="1875" noProof="0" dirty="0">
-              <a:solidFill>
-                <a:srgbClr val="082B4C"/>
-              </a:solidFill>
-              <a:latin typeface="Source Sans 3"/>
-              <a:ea typeface="Source Sans 3"/>
-              <a:cs typeface="Source Sans 3"/>
-              <a:sym typeface="Source Sans 3"/>
-            </a:endParaRPr>
-          </a:p>
-          <a:p>
-            <a:pPr algn="l">
-              <a:lnSpc>
-                <a:spcPts val="2437"/>
-              </a:lnSpc>
-            </a:pPr>
-            <a:r>
-              <a:rPr lang="es-CL" sz="1875" noProof="0" dirty="0">
-                <a:solidFill>
-                  <a:srgbClr val="082B4C"/>
-                </a:solidFill>
-                <a:latin typeface="Source Sans 3"/>
-                <a:ea typeface="Source Sans 3"/>
-                <a:cs typeface="Source Sans 3"/>
-                <a:sym typeface="Source Sans 3"/>
-              </a:rPr>
-              <a:t>Comparación histórica y trazabilidad</a:t>
-            </a:r>
-          </a:p>
-          <a:p>
-            <a:pPr algn="l">
-              <a:lnSpc>
-                <a:spcPts val="2437"/>
-              </a:lnSpc>
-            </a:pPr>
-            <a:endParaRPr lang="es-CL" sz="1875" noProof="0" dirty="0">
-              <a:solidFill>
-                <a:srgbClr val="082B4C"/>
-              </a:solidFill>
-              <a:latin typeface="Source Sans 3"/>
-              <a:ea typeface="Source Sans 3"/>
-              <a:cs typeface="Source Sans 3"/>
-              <a:sym typeface="Source Sans 3"/>
-            </a:endParaRPr>
-          </a:p>
-          <a:p>
-            <a:pPr algn="l">
-              <a:lnSpc>
-                <a:spcPts val="2437"/>
-              </a:lnSpc>
-            </a:pPr>
-            <a:r>
-              <a:rPr lang="es-CL" sz="1875" noProof="0" dirty="0">
-                <a:solidFill>
-                  <a:srgbClr val="082B4C"/>
-                </a:solidFill>
-                <a:latin typeface="Source Sans 3"/>
-                <a:ea typeface="Source Sans 3"/>
-                <a:cs typeface="Source Sans 3"/>
-                <a:sym typeface="Source Sans 3"/>
-              </a:rPr>
-              <a:t>Reportes parametrizables + apoyo IA</a:t>
-            </a:r>
-          </a:p>
-        </p:txBody>
-      </p:sp>
       <p:sp>
         <p:nvSpPr>
           <p:cNvPr id="17" name="TextBox 17"/>
@@ -5945,7 +5818,7 @@
         </p:nvSpPr>
         <p:spPr>
           <a:xfrm>
-            <a:off x="4000500" y="8058150"/>
+            <a:off x="4000500" y="9391650"/>
             <a:ext cx="10287000" cy="323850"/>
           </a:xfrm>
           <a:prstGeom prst="rect">
@@ -6184,6 +6057,36 @@
           </p:txBody>
         </p:sp>
       </p:grpSp>
+      <p:pic>
+        <p:nvPicPr>
+          <p:cNvPr id="18" name="Imagen 17">
+            <a:extLst>
+              <a:ext uri="{FF2B5EF4-FFF2-40B4-BE49-F238E27FC236}">
+                <a16:creationId xmlns:a16="http://schemas.microsoft.com/office/drawing/2014/main" id="{41875267-CBF9-D311-9969-5F4A4484C184}"/>
+              </a:ext>
+            </a:extLst>
+          </p:cNvPr>
+          <p:cNvPicPr>
+            <a:picLocks noChangeAspect="1"/>
+          </p:cNvPicPr>
+          <p:nvPr/>
+        </p:nvPicPr>
+        <p:blipFill>
+          <a:blip r:embed="rId3"/>
+          <a:stretch>
+            <a:fillRect/>
+          </a:stretch>
+        </p:blipFill>
+        <p:spPr>
+          <a:xfrm>
+            <a:off x="1318120" y="2473578"/>
+            <a:ext cx="15651759" cy="6468378"/>
+          </a:xfrm>
+          <a:prstGeom prst="rect">
+            <a:avLst/>
+          </a:prstGeom>
+        </p:spPr>
+      </p:pic>
     </p:spTree>
   </p:cSld>
   <p:clrMapOvr>
@@ -6217,1078 +6120,6 @@
           <a:chExt cx="0" cy="0"/>
         </a:xfrm>
       </p:grpSpPr>
-      <p:grpSp>
-        <p:nvGrpSpPr>
-          <p:cNvPr id="41" name="Grupo 40">
-            <a:extLst>
-              <a:ext uri="{FF2B5EF4-FFF2-40B4-BE49-F238E27FC236}">
-                <a16:creationId xmlns:a16="http://schemas.microsoft.com/office/drawing/2014/main" id="{DD14A437-1D64-A67C-7FF7-B171C682F5D6}"/>
-              </a:ext>
-            </a:extLst>
-          </p:cNvPr>
-          <p:cNvGrpSpPr/>
-          <p:nvPr/>
-        </p:nvGrpSpPr>
-        <p:grpSpPr>
-          <a:xfrm>
-            <a:off x="952500" y="2795587"/>
-            <a:ext cx="16383000" cy="2095500"/>
-            <a:chOff x="952500" y="1790700"/>
-            <a:chExt cx="16383000" cy="2095500"/>
-          </a:xfrm>
-        </p:grpSpPr>
-        <p:grpSp>
-          <p:nvGrpSpPr>
-            <p:cNvPr id="7" name="Group 7"/>
-            <p:cNvGrpSpPr/>
-            <p:nvPr/>
-          </p:nvGrpSpPr>
-          <p:grpSpPr>
-            <a:xfrm>
-              <a:off x="952500" y="1790700"/>
-              <a:ext cx="16383000" cy="2095500"/>
-              <a:chOff x="0" y="0"/>
-              <a:chExt cx="21844000" cy="2794000"/>
-            </a:xfrm>
-          </p:grpSpPr>
-          <p:sp>
-            <p:nvSpPr>
-              <p:cNvPr id="8" name="Freeform 8"/>
-              <p:cNvSpPr/>
-              <p:nvPr/>
-            </p:nvSpPr>
-            <p:spPr>
-              <a:xfrm>
-                <a:off x="0" y="0"/>
-                <a:ext cx="21844000" cy="2794000"/>
-              </a:xfrm>
-              <a:custGeom>
-                <a:avLst/>
-                <a:gdLst/>
-                <a:ahLst/>
-                <a:cxnLst/>
-                <a:rect l="l" t="t" r="r" b="b"/>
-                <a:pathLst>
-                  <a:path w="21844000" h="2794000">
-                    <a:moveTo>
-                      <a:pt x="0" y="0"/>
-                    </a:moveTo>
-                    <a:lnTo>
-                      <a:pt x="21844000" y="0"/>
-                    </a:lnTo>
-                    <a:lnTo>
-                      <a:pt x="21844000" y="2794000"/>
-                    </a:lnTo>
-                    <a:lnTo>
-                      <a:pt x="0" y="2794000"/>
-                    </a:lnTo>
-                    <a:close/>
-                  </a:path>
-                </a:pathLst>
-              </a:custGeom>
-              <a:solidFill>
-                <a:srgbClr val="EAF3F8"/>
-              </a:solidFill>
-              <a:ln cap="sq">
-                <a:noFill/>
-                <a:prstDash val="solid"/>
-                <a:miter/>
-              </a:ln>
-            </p:spPr>
-            <p:txBody>
-              <a:bodyPr/>
-              <a:lstStyle/>
-              <a:p>
-                <a:endParaRPr lang="es-CL" noProof="0" dirty="0"/>
-              </a:p>
-            </p:txBody>
-          </p:sp>
-          <p:sp>
-            <p:nvSpPr>
-              <p:cNvPr id="9" name="TextBox 9"/>
-              <p:cNvSpPr txBox="1"/>
-              <p:nvPr/>
-            </p:nvSpPr>
-            <p:spPr>
-              <a:xfrm>
-                <a:off x="0" y="-38100"/>
-                <a:ext cx="21844000" cy="2832100"/>
-              </a:xfrm>
-              <a:prstGeom prst="rect">
-                <a:avLst/>
-              </a:prstGeom>
-            </p:spPr>
-            <p:txBody>
-              <a:bodyPr lIns="50800" tIns="50800" rIns="50800" bIns="50800" rtlCol="0" anchor="ctr"/>
-              <a:lstStyle/>
-              <a:p>
-                <a:pPr algn="l">
-                  <a:lnSpc>
-                    <a:spcPts val="1679"/>
-                  </a:lnSpc>
-                </a:pPr>
-                <a:endParaRPr lang="es-CL" noProof="0" dirty="0"/>
-              </a:p>
-            </p:txBody>
-          </p:sp>
-        </p:grpSp>
-        <p:sp>
-          <p:nvSpPr>
-            <p:cNvPr id="10" name="TextBox 10"/>
-            <p:cNvSpPr txBox="1"/>
-            <p:nvPr/>
-          </p:nvSpPr>
-          <p:spPr>
-            <a:xfrm>
-              <a:off x="7239000" y="1924050"/>
-              <a:ext cx="3810000" cy="240030"/>
-            </a:xfrm>
-            <a:prstGeom prst="rect">
-              <a:avLst/>
-            </a:prstGeom>
-          </p:spPr>
-          <p:txBody>
-            <a:bodyPr lIns="0" tIns="0" rIns="0" bIns="0" rtlCol="0" anchor="t">
-              <a:spAutoFit/>
-            </a:bodyPr>
-            <a:lstStyle/>
-            <a:p>
-              <a:pPr algn="ctr">
-                <a:lnSpc>
-                  <a:spcPts val="1995"/>
-                </a:lnSpc>
-              </a:pPr>
-              <a:r>
-                <a:rPr lang="es-CL" sz="1425" b="1" spc="114" noProof="0" dirty="0">
-                  <a:solidFill>
-                    <a:srgbClr val="0878B9"/>
-                  </a:solidFill>
-                  <a:latin typeface="Montserrat Bold"/>
-                  <a:ea typeface="Montserrat Bold"/>
-                  <a:cs typeface="Montserrat Bold"/>
-                  <a:sym typeface="Montserrat Bold"/>
-                </a:rPr>
-                <a:t>OBJETIVO GENERAL</a:t>
-              </a:r>
-            </a:p>
-          </p:txBody>
-        </p:sp>
-        <p:sp>
-          <p:nvSpPr>
-            <p:cNvPr id="11" name="TextBox 11"/>
-            <p:cNvSpPr txBox="1"/>
-            <p:nvPr/>
-          </p:nvSpPr>
-          <p:spPr>
-            <a:xfrm>
-              <a:off x="1238250" y="2333625"/>
-              <a:ext cx="15811500" cy="914400"/>
-            </a:xfrm>
-            <a:prstGeom prst="rect">
-              <a:avLst/>
-            </a:prstGeom>
-          </p:spPr>
-          <p:txBody>
-            <a:bodyPr lIns="0" tIns="0" rIns="0" bIns="0" rtlCol="0" anchor="t">
-              <a:spAutoFit/>
-            </a:bodyPr>
-            <a:lstStyle/>
-            <a:p>
-              <a:pPr algn="ctr">
-                <a:lnSpc>
-                  <a:spcPts val="3675"/>
-                </a:lnSpc>
-              </a:pPr>
-              <a:r>
-                <a:rPr lang="es-CL" sz="2625" b="1" noProof="0" dirty="0">
-                  <a:solidFill>
-                    <a:srgbClr val="082B4C"/>
-                  </a:solidFill>
-                  <a:latin typeface="Montserrat Bold"/>
-                  <a:ea typeface="Montserrat Bold"/>
-                  <a:cs typeface="Montserrat Bold"/>
-                  <a:sym typeface="Montserrat Bold"/>
-                </a:rPr>
-                <a:t>Desarrollar una plataforma para integrar y automatizar registros de deudores, validación, análisis y reportes con ETL, reglas de negocio, trazabilidad e IA.</a:t>
-              </a:r>
-            </a:p>
-          </p:txBody>
-        </p:sp>
-      </p:grpSp>
-      <p:grpSp>
-        <p:nvGrpSpPr>
-          <p:cNvPr id="42" name="Grupo 41">
-            <a:extLst>
-              <a:ext uri="{FF2B5EF4-FFF2-40B4-BE49-F238E27FC236}">
-                <a16:creationId xmlns:a16="http://schemas.microsoft.com/office/drawing/2014/main" id="{156A67E2-8121-AB0E-8BCD-89CFD65FE90F}"/>
-              </a:ext>
-            </a:extLst>
-          </p:cNvPr>
-          <p:cNvGrpSpPr/>
-          <p:nvPr/>
-        </p:nvGrpSpPr>
-        <p:grpSpPr>
-          <a:xfrm>
-            <a:off x="952500" y="6434137"/>
-            <a:ext cx="16002000" cy="1757363"/>
-            <a:chOff x="952500" y="5429250"/>
-            <a:chExt cx="16002000" cy="1757363"/>
-          </a:xfrm>
-        </p:grpSpPr>
-        <p:grpSp>
-          <p:nvGrpSpPr>
-            <p:cNvPr id="12" name="Group 12"/>
-            <p:cNvGrpSpPr/>
-            <p:nvPr/>
-          </p:nvGrpSpPr>
-          <p:grpSpPr>
-            <a:xfrm>
-              <a:off x="952500" y="5429250"/>
-              <a:ext cx="3429000" cy="1190625"/>
-              <a:chOff x="0" y="0"/>
-              <a:chExt cx="4572000" cy="1587500"/>
-            </a:xfrm>
-          </p:grpSpPr>
-          <p:sp>
-            <p:nvSpPr>
-              <p:cNvPr id="13" name="Freeform 13"/>
-              <p:cNvSpPr/>
-              <p:nvPr/>
-            </p:nvSpPr>
-            <p:spPr>
-              <a:xfrm>
-                <a:off x="0" y="0"/>
-                <a:ext cx="4572000" cy="1587500"/>
-              </a:xfrm>
-              <a:custGeom>
-                <a:avLst/>
-                <a:gdLst/>
-                <a:ahLst/>
-                <a:cxnLst/>
-                <a:rect l="l" t="t" r="r" b="b"/>
-                <a:pathLst>
-                  <a:path w="4572000" h="1587500">
-                    <a:moveTo>
-                      <a:pt x="42333" y="0"/>
-                    </a:moveTo>
-                    <a:lnTo>
-                      <a:pt x="4529667" y="0"/>
-                    </a:lnTo>
-                    <a:cubicBezTo>
-                      <a:pt x="4540894" y="0"/>
-                      <a:pt x="4551662" y="4460"/>
-                      <a:pt x="4559601" y="12399"/>
-                    </a:cubicBezTo>
-                    <a:cubicBezTo>
-                      <a:pt x="4567540" y="20338"/>
-                      <a:pt x="4572000" y="31106"/>
-                      <a:pt x="4572000" y="42333"/>
-                    </a:cubicBezTo>
-                    <a:lnTo>
-                      <a:pt x="4572000" y="1545167"/>
-                    </a:lnTo>
-                    <a:cubicBezTo>
-                      <a:pt x="4572000" y="1556394"/>
-                      <a:pt x="4567540" y="1567162"/>
-                      <a:pt x="4559601" y="1575101"/>
-                    </a:cubicBezTo>
-                    <a:cubicBezTo>
-                      <a:pt x="4551662" y="1583040"/>
-                      <a:pt x="4540894" y="1587500"/>
-                      <a:pt x="4529667" y="1587500"/>
-                    </a:cubicBezTo>
-                    <a:lnTo>
-                      <a:pt x="42333" y="1587500"/>
-                    </a:lnTo>
-                    <a:cubicBezTo>
-                      <a:pt x="31106" y="1587500"/>
-                      <a:pt x="20338" y="1583040"/>
-                      <a:pt x="12399" y="1575101"/>
-                    </a:cubicBezTo>
-                    <a:cubicBezTo>
-                      <a:pt x="4460" y="1567162"/>
-                      <a:pt x="0" y="1556394"/>
-                      <a:pt x="0" y="1545167"/>
-                    </a:cubicBezTo>
-                    <a:lnTo>
-                      <a:pt x="0" y="42333"/>
-                    </a:lnTo>
-                    <a:cubicBezTo>
-                      <a:pt x="0" y="31106"/>
-                      <a:pt x="4460" y="20338"/>
-                      <a:pt x="12399" y="12399"/>
-                    </a:cubicBezTo>
-                    <a:cubicBezTo>
-                      <a:pt x="20338" y="4460"/>
-                      <a:pt x="31106" y="0"/>
-                      <a:pt x="42333" y="0"/>
-                    </a:cubicBezTo>
-                    <a:close/>
-                  </a:path>
-                </a:pathLst>
-              </a:custGeom>
-              <a:solidFill>
-                <a:srgbClr val="0878B9"/>
-              </a:solidFill>
-              <a:ln cap="sq">
-                <a:noFill/>
-                <a:prstDash val="solid"/>
-                <a:miter/>
-              </a:ln>
-            </p:spPr>
-            <p:txBody>
-              <a:bodyPr/>
-              <a:lstStyle/>
-              <a:p>
-                <a:endParaRPr lang="es-CL" noProof="0" dirty="0"/>
-              </a:p>
-            </p:txBody>
-          </p:sp>
-          <p:sp>
-            <p:nvSpPr>
-              <p:cNvPr id="14" name="TextBox 14"/>
-              <p:cNvSpPr txBox="1"/>
-              <p:nvPr/>
-            </p:nvSpPr>
-            <p:spPr>
-              <a:xfrm>
-                <a:off x="0" y="9525"/>
-                <a:ext cx="4572000" cy="1577975"/>
-              </a:xfrm>
-              <a:prstGeom prst="rect">
-                <a:avLst/>
-              </a:prstGeom>
-            </p:spPr>
-            <p:txBody>
-              <a:bodyPr lIns="50800" tIns="50800" rIns="50800" bIns="50800" rtlCol="0" anchor="ctr"/>
-              <a:lstStyle/>
-              <a:p>
-                <a:pPr algn="ctr">
-                  <a:lnSpc>
-                    <a:spcPts val="1732"/>
-                  </a:lnSpc>
-                </a:pPr>
-                <a:r>
-                  <a:rPr lang="es-CL" sz="1575" b="1" noProof="0" dirty="0">
-                    <a:solidFill>
-                      <a:srgbClr val="FFFFFF"/>
-                    </a:solidFill>
-                    <a:latin typeface="Montserrat Bold"/>
-                    <a:ea typeface="Montserrat Bold"/>
-                    <a:cs typeface="Montserrat Bold"/>
-                    <a:sym typeface="Montserrat Bold"/>
-                  </a:rPr>
-                  <a:t>01  ANALIZAR</a:t>
-                </a:r>
-              </a:p>
-            </p:txBody>
-          </p:sp>
-        </p:grpSp>
-        <p:sp>
-          <p:nvSpPr>
-            <p:cNvPr id="15" name="TextBox 15"/>
-            <p:cNvSpPr txBox="1"/>
-            <p:nvPr/>
-          </p:nvSpPr>
-          <p:spPr>
-            <a:xfrm>
-              <a:off x="952500" y="6886575"/>
-              <a:ext cx="3429000" cy="300038"/>
-            </a:xfrm>
-            <a:prstGeom prst="rect">
-              <a:avLst/>
-            </a:prstGeom>
-          </p:spPr>
-          <p:txBody>
-            <a:bodyPr lIns="0" tIns="0" rIns="0" bIns="0" rtlCol="0" anchor="t">
-              <a:spAutoFit/>
-            </a:bodyPr>
-            <a:lstStyle/>
-            <a:p>
-              <a:pPr algn="ctr">
-                <a:lnSpc>
-                  <a:spcPts val="2437"/>
-                </a:lnSpc>
-              </a:pPr>
-              <a:r>
-                <a:rPr lang="es-CL" sz="1875" noProof="0" dirty="0">
-                  <a:solidFill>
-                    <a:srgbClr val="082B4C"/>
-                  </a:solidFill>
-                  <a:latin typeface="Source Sans 3"/>
-                  <a:ea typeface="Source Sans 3"/>
-                  <a:cs typeface="Source Sans 3"/>
-                  <a:sym typeface="Source Sans 3"/>
-                </a:rPr>
-                <a:t>Requerimientos, fuentes y reglas</a:t>
-              </a:r>
-            </a:p>
-          </p:txBody>
-        </p:sp>
-        <p:sp>
-          <p:nvSpPr>
-            <p:cNvPr id="16" name="AutoShape 16"/>
-            <p:cNvSpPr/>
-            <p:nvPr/>
-          </p:nvSpPr>
-          <p:spPr>
-            <a:xfrm>
-              <a:off x="4476750" y="6019800"/>
-              <a:ext cx="523875" cy="0"/>
-            </a:xfrm>
-            <a:prstGeom prst="line">
-              <a:avLst/>
-            </a:prstGeom>
-            <a:ln w="38100" cap="rnd">
-              <a:solidFill>
-                <a:srgbClr val="0878B9"/>
-              </a:solidFill>
-              <a:prstDash val="solid"/>
-              <a:headEnd type="none" w="sm" len="sm"/>
-              <a:tailEnd type="arrow" w="med" len="sm"/>
-            </a:ln>
-          </p:spPr>
-          <p:txBody>
-            <a:bodyPr/>
-            <a:lstStyle/>
-            <a:p>
-              <a:endParaRPr lang="es-CL" noProof="0" dirty="0"/>
-            </a:p>
-          </p:txBody>
-        </p:sp>
-        <p:grpSp>
-          <p:nvGrpSpPr>
-            <p:cNvPr id="17" name="Group 17"/>
-            <p:cNvGrpSpPr/>
-            <p:nvPr/>
-          </p:nvGrpSpPr>
-          <p:grpSpPr>
-            <a:xfrm>
-              <a:off x="5143500" y="5429250"/>
-              <a:ext cx="3429000" cy="1190625"/>
-              <a:chOff x="0" y="0"/>
-              <a:chExt cx="4572000" cy="1587500"/>
-            </a:xfrm>
-          </p:grpSpPr>
-          <p:sp>
-            <p:nvSpPr>
-              <p:cNvPr id="18" name="Freeform 18"/>
-              <p:cNvSpPr/>
-              <p:nvPr/>
-            </p:nvSpPr>
-            <p:spPr>
-              <a:xfrm>
-                <a:off x="0" y="0"/>
-                <a:ext cx="4572000" cy="1587500"/>
-              </a:xfrm>
-              <a:custGeom>
-                <a:avLst/>
-                <a:gdLst/>
-                <a:ahLst/>
-                <a:cxnLst/>
-                <a:rect l="l" t="t" r="r" b="b"/>
-                <a:pathLst>
-                  <a:path w="4572000" h="1587500">
-                    <a:moveTo>
-                      <a:pt x="42333" y="0"/>
-                    </a:moveTo>
-                    <a:lnTo>
-                      <a:pt x="4529667" y="0"/>
-                    </a:lnTo>
-                    <a:cubicBezTo>
-                      <a:pt x="4540894" y="0"/>
-                      <a:pt x="4551662" y="4460"/>
-                      <a:pt x="4559601" y="12399"/>
-                    </a:cubicBezTo>
-                    <a:cubicBezTo>
-                      <a:pt x="4567540" y="20338"/>
-                      <a:pt x="4572000" y="31106"/>
-                      <a:pt x="4572000" y="42333"/>
-                    </a:cubicBezTo>
-                    <a:lnTo>
-                      <a:pt x="4572000" y="1545167"/>
-                    </a:lnTo>
-                    <a:cubicBezTo>
-                      <a:pt x="4572000" y="1556394"/>
-                      <a:pt x="4567540" y="1567162"/>
-                      <a:pt x="4559601" y="1575101"/>
-                    </a:cubicBezTo>
-                    <a:cubicBezTo>
-                      <a:pt x="4551662" y="1583040"/>
-                      <a:pt x="4540894" y="1587500"/>
-                      <a:pt x="4529667" y="1587500"/>
-                    </a:cubicBezTo>
-                    <a:lnTo>
-                      <a:pt x="42333" y="1587500"/>
-                    </a:lnTo>
-                    <a:cubicBezTo>
-                      <a:pt x="31106" y="1587500"/>
-                      <a:pt x="20338" y="1583040"/>
-                      <a:pt x="12399" y="1575101"/>
-                    </a:cubicBezTo>
-                    <a:cubicBezTo>
-                      <a:pt x="4460" y="1567162"/>
-                      <a:pt x="0" y="1556394"/>
-                      <a:pt x="0" y="1545167"/>
-                    </a:cubicBezTo>
-                    <a:lnTo>
-                      <a:pt x="0" y="42333"/>
-                    </a:lnTo>
-                    <a:cubicBezTo>
-                      <a:pt x="0" y="31106"/>
-                      <a:pt x="4460" y="20338"/>
-                      <a:pt x="12399" y="12399"/>
-                    </a:cubicBezTo>
-                    <a:cubicBezTo>
-                      <a:pt x="20338" y="4460"/>
-                      <a:pt x="31106" y="0"/>
-                      <a:pt x="42333" y="0"/>
-                    </a:cubicBezTo>
-                    <a:close/>
-                  </a:path>
-                </a:pathLst>
-              </a:custGeom>
-              <a:solidFill>
-                <a:srgbClr val="0878B9"/>
-              </a:solidFill>
-              <a:ln cap="sq">
-                <a:noFill/>
-                <a:prstDash val="solid"/>
-                <a:miter/>
-              </a:ln>
-            </p:spPr>
-            <p:txBody>
-              <a:bodyPr/>
-              <a:lstStyle/>
-              <a:p>
-                <a:endParaRPr lang="es-CL" noProof="0" dirty="0"/>
-              </a:p>
-            </p:txBody>
-          </p:sp>
-          <p:sp>
-            <p:nvSpPr>
-              <p:cNvPr id="19" name="TextBox 19"/>
-              <p:cNvSpPr txBox="1"/>
-              <p:nvPr/>
-            </p:nvSpPr>
-            <p:spPr>
-              <a:xfrm>
-                <a:off x="0" y="9525"/>
-                <a:ext cx="4572000" cy="1577975"/>
-              </a:xfrm>
-              <a:prstGeom prst="rect">
-                <a:avLst/>
-              </a:prstGeom>
-            </p:spPr>
-            <p:txBody>
-              <a:bodyPr lIns="50800" tIns="50800" rIns="50800" bIns="50800" rtlCol="0" anchor="ctr"/>
-              <a:lstStyle/>
-              <a:p>
-                <a:pPr algn="ctr">
-                  <a:lnSpc>
-                    <a:spcPts val="1732"/>
-                  </a:lnSpc>
-                </a:pPr>
-                <a:r>
-                  <a:rPr lang="es-CL" sz="1575" b="1" noProof="0" dirty="0">
-                    <a:solidFill>
-                      <a:srgbClr val="FFFFFF"/>
-                    </a:solidFill>
-                    <a:latin typeface="Montserrat Bold"/>
-                    <a:ea typeface="Montserrat Bold"/>
-                    <a:cs typeface="Montserrat Bold"/>
-                    <a:sym typeface="Montserrat Bold"/>
-                  </a:rPr>
-                  <a:t>02  DISEÑAR</a:t>
-                </a:r>
-              </a:p>
-            </p:txBody>
-          </p:sp>
-        </p:grpSp>
-        <p:sp>
-          <p:nvSpPr>
-            <p:cNvPr id="20" name="TextBox 20"/>
-            <p:cNvSpPr txBox="1"/>
-            <p:nvPr/>
-          </p:nvSpPr>
-          <p:spPr>
-            <a:xfrm>
-              <a:off x="5143500" y="6886575"/>
-              <a:ext cx="3429000" cy="300038"/>
-            </a:xfrm>
-            <a:prstGeom prst="rect">
-              <a:avLst/>
-            </a:prstGeom>
-          </p:spPr>
-          <p:txBody>
-            <a:bodyPr lIns="0" tIns="0" rIns="0" bIns="0" rtlCol="0" anchor="t">
-              <a:spAutoFit/>
-            </a:bodyPr>
-            <a:lstStyle/>
-            <a:p>
-              <a:pPr algn="ctr">
-                <a:lnSpc>
-                  <a:spcPts val="2437"/>
-                </a:lnSpc>
-              </a:pPr>
-              <a:r>
-                <a:rPr lang="es-CL" sz="1875" noProof="0" dirty="0">
-                  <a:solidFill>
-                    <a:srgbClr val="082B4C"/>
-                  </a:solidFill>
-                  <a:latin typeface="Source Sans 3"/>
-                  <a:ea typeface="Source Sans 3"/>
-                  <a:cs typeface="Source Sans 3"/>
-                  <a:sym typeface="Source Sans 3"/>
-                </a:rPr>
-                <a:t>Arquitectura, datos e integración</a:t>
-              </a:r>
-            </a:p>
-          </p:txBody>
-        </p:sp>
-        <p:sp>
-          <p:nvSpPr>
-            <p:cNvPr id="21" name="AutoShape 21"/>
-            <p:cNvSpPr/>
-            <p:nvPr/>
-          </p:nvSpPr>
-          <p:spPr>
-            <a:xfrm>
-              <a:off x="8667750" y="6019800"/>
-              <a:ext cx="523875" cy="0"/>
-            </a:xfrm>
-            <a:prstGeom prst="line">
-              <a:avLst/>
-            </a:prstGeom>
-            <a:ln w="38100" cap="rnd">
-              <a:solidFill>
-                <a:srgbClr val="0878B9"/>
-              </a:solidFill>
-              <a:prstDash val="solid"/>
-              <a:headEnd type="none" w="sm" len="sm"/>
-              <a:tailEnd type="arrow" w="med" len="sm"/>
-            </a:ln>
-          </p:spPr>
-          <p:txBody>
-            <a:bodyPr/>
-            <a:lstStyle/>
-            <a:p>
-              <a:endParaRPr lang="es-CL" noProof="0" dirty="0"/>
-            </a:p>
-          </p:txBody>
-        </p:sp>
-        <p:grpSp>
-          <p:nvGrpSpPr>
-            <p:cNvPr id="22" name="Group 22"/>
-            <p:cNvGrpSpPr/>
-            <p:nvPr/>
-          </p:nvGrpSpPr>
-          <p:grpSpPr>
-            <a:xfrm>
-              <a:off x="9334500" y="5429250"/>
-              <a:ext cx="3429000" cy="1190625"/>
-              <a:chOff x="0" y="0"/>
-              <a:chExt cx="4572000" cy="1587500"/>
-            </a:xfrm>
-          </p:grpSpPr>
-          <p:sp>
-            <p:nvSpPr>
-              <p:cNvPr id="23" name="Freeform 23"/>
-              <p:cNvSpPr/>
-              <p:nvPr/>
-            </p:nvSpPr>
-            <p:spPr>
-              <a:xfrm>
-                <a:off x="0" y="0"/>
-                <a:ext cx="4572000" cy="1587500"/>
-              </a:xfrm>
-              <a:custGeom>
-                <a:avLst/>
-                <a:gdLst/>
-                <a:ahLst/>
-                <a:cxnLst/>
-                <a:rect l="l" t="t" r="r" b="b"/>
-                <a:pathLst>
-                  <a:path w="4572000" h="1587500">
-                    <a:moveTo>
-                      <a:pt x="42333" y="0"/>
-                    </a:moveTo>
-                    <a:lnTo>
-                      <a:pt x="4529667" y="0"/>
-                    </a:lnTo>
-                    <a:cubicBezTo>
-                      <a:pt x="4540894" y="0"/>
-                      <a:pt x="4551662" y="4460"/>
-                      <a:pt x="4559601" y="12399"/>
-                    </a:cubicBezTo>
-                    <a:cubicBezTo>
-                      <a:pt x="4567540" y="20338"/>
-                      <a:pt x="4572000" y="31106"/>
-                      <a:pt x="4572000" y="42333"/>
-                    </a:cubicBezTo>
-                    <a:lnTo>
-                      <a:pt x="4572000" y="1545167"/>
-                    </a:lnTo>
-                    <a:cubicBezTo>
-                      <a:pt x="4572000" y="1556394"/>
-                      <a:pt x="4567540" y="1567162"/>
-                      <a:pt x="4559601" y="1575101"/>
-                    </a:cubicBezTo>
-                    <a:cubicBezTo>
-                      <a:pt x="4551662" y="1583040"/>
-                      <a:pt x="4540894" y="1587500"/>
-                      <a:pt x="4529667" y="1587500"/>
-                    </a:cubicBezTo>
-                    <a:lnTo>
-                      <a:pt x="42333" y="1587500"/>
-                    </a:lnTo>
-                    <a:cubicBezTo>
-                      <a:pt x="31106" y="1587500"/>
-                      <a:pt x="20338" y="1583040"/>
-                      <a:pt x="12399" y="1575101"/>
-                    </a:cubicBezTo>
-                    <a:cubicBezTo>
-                      <a:pt x="4460" y="1567162"/>
-                      <a:pt x="0" y="1556394"/>
-                      <a:pt x="0" y="1545167"/>
-                    </a:cubicBezTo>
-                    <a:lnTo>
-                      <a:pt x="0" y="42333"/>
-                    </a:lnTo>
-                    <a:cubicBezTo>
-                      <a:pt x="0" y="31106"/>
-                      <a:pt x="4460" y="20338"/>
-                      <a:pt x="12399" y="12399"/>
-                    </a:cubicBezTo>
-                    <a:cubicBezTo>
-                      <a:pt x="20338" y="4460"/>
-                      <a:pt x="31106" y="0"/>
-                      <a:pt x="42333" y="0"/>
-                    </a:cubicBezTo>
-                    <a:close/>
-                  </a:path>
-                </a:pathLst>
-              </a:custGeom>
-              <a:solidFill>
-                <a:srgbClr val="0878B9"/>
-              </a:solidFill>
-              <a:ln cap="sq">
-                <a:noFill/>
-                <a:prstDash val="solid"/>
-                <a:miter/>
-              </a:ln>
-            </p:spPr>
-            <p:txBody>
-              <a:bodyPr/>
-              <a:lstStyle/>
-              <a:p>
-                <a:endParaRPr lang="es-CL" noProof="0" dirty="0"/>
-              </a:p>
-            </p:txBody>
-          </p:sp>
-          <p:sp>
-            <p:nvSpPr>
-              <p:cNvPr id="24" name="TextBox 24"/>
-              <p:cNvSpPr txBox="1"/>
-              <p:nvPr/>
-            </p:nvSpPr>
-            <p:spPr>
-              <a:xfrm>
-                <a:off x="0" y="9525"/>
-                <a:ext cx="4572000" cy="1577975"/>
-              </a:xfrm>
-              <a:prstGeom prst="rect">
-                <a:avLst/>
-              </a:prstGeom>
-            </p:spPr>
-            <p:txBody>
-              <a:bodyPr lIns="50800" tIns="50800" rIns="50800" bIns="50800" rtlCol="0" anchor="ctr"/>
-              <a:lstStyle/>
-              <a:p>
-                <a:pPr algn="ctr">
-                  <a:lnSpc>
-                    <a:spcPts val="1732"/>
-                  </a:lnSpc>
-                </a:pPr>
-                <a:r>
-                  <a:rPr lang="es-CL" sz="1575" b="1" noProof="0" dirty="0">
-                    <a:solidFill>
-                      <a:srgbClr val="FFFFFF"/>
-                    </a:solidFill>
-                    <a:latin typeface="Montserrat Bold"/>
-                    <a:ea typeface="Montserrat Bold"/>
-                    <a:cs typeface="Montserrat Bold"/>
-                    <a:sym typeface="Montserrat Bold"/>
-                  </a:rPr>
-                  <a:t>03  DESARROLLAR E INTEGRAR</a:t>
-                </a:r>
-              </a:p>
-            </p:txBody>
-          </p:sp>
-        </p:grpSp>
-        <p:sp>
-          <p:nvSpPr>
-            <p:cNvPr id="25" name="TextBox 25"/>
-            <p:cNvSpPr txBox="1"/>
-            <p:nvPr/>
-          </p:nvSpPr>
-          <p:spPr>
-            <a:xfrm>
-              <a:off x="9334500" y="6886575"/>
-              <a:ext cx="3429000" cy="300038"/>
-            </a:xfrm>
-            <a:prstGeom prst="rect">
-              <a:avLst/>
-            </a:prstGeom>
-          </p:spPr>
-          <p:txBody>
-            <a:bodyPr lIns="0" tIns="0" rIns="0" bIns="0" rtlCol="0" anchor="t">
-              <a:spAutoFit/>
-            </a:bodyPr>
-            <a:lstStyle/>
-            <a:p>
-              <a:pPr algn="ctr">
-                <a:lnSpc>
-                  <a:spcPts val="2437"/>
-                </a:lnSpc>
-              </a:pPr>
-              <a:r>
-                <a:rPr lang="es-CL" sz="1875" noProof="0" dirty="0">
-                  <a:solidFill>
-                    <a:srgbClr val="082B4C"/>
-                  </a:solidFill>
-                  <a:latin typeface="Source Sans 3"/>
-                  <a:ea typeface="Source Sans 3"/>
-                  <a:cs typeface="Source Sans 3"/>
-                  <a:sym typeface="Source Sans 3"/>
-                </a:rPr>
-                <a:t>Componentes y automatización</a:t>
-              </a:r>
-            </a:p>
-          </p:txBody>
-        </p:sp>
-        <p:sp>
-          <p:nvSpPr>
-            <p:cNvPr id="26" name="AutoShape 26"/>
-            <p:cNvSpPr/>
-            <p:nvPr/>
-          </p:nvSpPr>
-          <p:spPr>
-            <a:xfrm>
-              <a:off x="12858750" y="6019800"/>
-              <a:ext cx="523875" cy="0"/>
-            </a:xfrm>
-            <a:prstGeom prst="line">
-              <a:avLst/>
-            </a:prstGeom>
-            <a:ln w="38100" cap="rnd">
-              <a:solidFill>
-                <a:srgbClr val="0878B9"/>
-              </a:solidFill>
-              <a:prstDash val="solid"/>
-              <a:headEnd type="none" w="sm" len="sm"/>
-              <a:tailEnd type="arrow" w="med" len="sm"/>
-            </a:ln>
-          </p:spPr>
-          <p:txBody>
-            <a:bodyPr/>
-            <a:lstStyle/>
-            <a:p>
-              <a:endParaRPr lang="es-CL" noProof="0" dirty="0"/>
-            </a:p>
-          </p:txBody>
-        </p:sp>
-        <p:grpSp>
-          <p:nvGrpSpPr>
-            <p:cNvPr id="27" name="Group 27"/>
-            <p:cNvGrpSpPr/>
-            <p:nvPr/>
-          </p:nvGrpSpPr>
-          <p:grpSpPr>
-            <a:xfrm>
-              <a:off x="13525500" y="5429250"/>
-              <a:ext cx="3429000" cy="1190625"/>
-              <a:chOff x="0" y="0"/>
-              <a:chExt cx="4572000" cy="1587500"/>
-            </a:xfrm>
-          </p:grpSpPr>
-          <p:sp>
-            <p:nvSpPr>
-              <p:cNvPr id="28" name="Freeform 28"/>
-              <p:cNvSpPr/>
-              <p:nvPr/>
-            </p:nvSpPr>
-            <p:spPr>
-              <a:xfrm>
-                <a:off x="0" y="0"/>
-                <a:ext cx="4572000" cy="1587500"/>
-              </a:xfrm>
-              <a:custGeom>
-                <a:avLst/>
-                <a:gdLst/>
-                <a:ahLst/>
-                <a:cxnLst/>
-                <a:rect l="l" t="t" r="r" b="b"/>
-                <a:pathLst>
-                  <a:path w="4572000" h="1587500">
-                    <a:moveTo>
-                      <a:pt x="42333" y="0"/>
-                    </a:moveTo>
-                    <a:lnTo>
-                      <a:pt x="4529667" y="0"/>
-                    </a:lnTo>
-                    <a:cubicBezTo>
-                      <a:pt x="4540894" y="0"/>
-                      <a:pt x="4551662" y="4460"/>
-                      <a:pt x="4559601" y="12399"/>
-                    </a:cubicBezTo>
-                    <a:cubicBezTo>
-                      <a:pt x="4567540" y="20338"/>
-                      <a:pt x="4572000" y="31106"/>
-                      <a:pt x="4572000" y="42333"/>
-                    </a:cubicBezTo>
-                    <a:lnTo>
-                      <a:pt x="4572000" y="1545167"/>
-                    </a:lnTo>
-                    <a:cubicBezTo>
-                      <a:pt x="4572000" y="1556394"/>
-                      <a:pt x="4567540" y="1567162"/>
-                      <a:pt x="4559601" y="1575101"/>
-                    </a:cubicBezTo>
-                    <a:cubicBezTo>
-                      <a:pt x="4551662" y="1583040"/>
-                      <a:pt x="4540894" y="1587500"/>
-                      <a:pt x="4529667" y="1587500"/>
-                    </a:cubicBezTo>
-                    <a:lnTo>
-                      <a:pt x="42333" y="1587500"/>
-                    </a:lnTo>
-                    <a:cubicBezTo>
-                      <a:pt x="31106" y="1587500"/>
-                      <a:pt x="20338" y="1583040"/>
-                      <a:pt x="12399" y="1575101"/>
-                    </a:cubicBezTo>
-                    <a:cubicBezTo>
-                      <a:pt x="4460" y="1567162"/>
-                      <a:pt x="0" y="1556394"/>
-                      <a:pt x="0" y="1545167"/>
-                    </a:cubicBezTo>
-                    <a:lnTo>
-                      <a:pt x="0" y="42333"/>
-                    </a:lnTo>
-                    <a:cubicBezTo>
-                      <a:pt x="0" y="31106"/>
-                      <a:pt x="4460" y="20338"/>
-                      <a:pt x="12399" y="12399"/>
-                    </a:cubicBezTo>
-                    <a:cubicBezTo>
-                      <a:pt x="20338" y="4460"/>
-                      <a:pt x="31106" y="0"/>
-                      <a:pt x="42333" y="0"/>
-                    </a:cubicBezTo>
-                    <a:close/>
-                  </a:path>
-                </a:pathLst>
-              </a:custGeom>
-              <a:solidFill>
-                <a:srgbClr val="F58220"/>
-              </a:solidFill>
-              <a:ln cap="sq">
-                <a:noFill/>
-                <a:prstDash val="solid"/>
-                <a:miter/>
-              </a:ln>
-            </p:spPr>
-            <p:txBody>
-              <a:bodyPr/>
-              <a:lstStyle/>
-              <a:p>
-                <a:endParaRPr lang="es-CL" noProof="0" dirty="0"/>
-              </a:p>
-            </p:txBody>
-          </p:sp>
-          <p:sp>
-            <p:nvSpPr>
-              <p:cNvPr id="29" name="TextBox 29"/>
-              <p:cNvSpPr txBox="1"/>
-              <p:nvPr/>
-            </p:nvSpPr>
-            <p:spPr>
-              <a:xfrm>
-                <a:off x="0" y="9525"/>
-                <a:ext cx="4572000" cy="1577975"/>
-              </a:xfrm>
-              <a:prstGeom prst="rect">
-                <a:avLst/>
-              </a:prstGeom>
-            </p:spPr>
-            <p:txBody>
-              <a:bodyPr lIns="50800" tIns="50800" rIns="50800" bIns="50800" rtlCol="0" anchor="ctr"/>
-              <a:lstStyle/>
-              <a:p>
-                <a:pPr algn="ctr">
-                  <a:lnSpc>
-                    <a:spcPts val="1732"/>
-                  </a:lnSpc>
-                </a:pPr>
-                <a:r>
-                  <a:rPr lang="es-CL" sz="1575" b="1" noProof="0" dirty="0">
-                    <a:solidFill>
-                      <a:srgbClr val="FFFFFF"/>
-                    </a:solidFill>
-                    <a:latin typeface="Montserrat Bold"/>
-                    <a:ea typeface="Montserrat Bold"/>
-                    <a:cs typeface="Montserrat Bold"/>
-                    <a:sym typeface="Montserrat Bold"/>
-                  </a:rPr>
-                  <a:t>04  VALIDAR</a:t>
-                </a:r>
-              </a:p>
-            </p:txBody>
-          </p:sp>
-        </p:grpSp>
-        <p:sp>
-          <p:nvSpPr>
-            <p:cNvPr id="30" name="TextBox 30"/>
-            <p:cNvSpPr txBox="1"/>
-            <p:nvPr/>
-          </p:nvSpPr>
-          <p:spPr>
-            <a:xfrm>
-              <a:off x="13525500" y="6886575"/>
-              <a:ext cx="3429000" cy="300038"/>
-            </a:xfrm>
-            <a:prstGeom prst="rect">
-              <a:avLst/>
-            </a:prstGeom>
-          </p:spPr>
-          <p:txBody>
-            <a:bodyPr lIns="0" tIns="0" rIns="0" bIns="0" rtlCol="0" anchor="t">
-              <a:spAutoFit/>
-            </a:bodyPr>
-            <a:lstStyle/>
-            <a:p>
-              <a:pPr algn="ctr">
-                <a:lnSpc>
-                  <a:spcPts val="2437"/>
-                </a:lnSpc>
-              </a:pPr>
-              <a:r>
-                <a:rPr lang="es-CL" sz="1875" noProof="0" dirty="0">
-                  <a:solidFill>
-                    <a:srgbClr val="082B4C"/>
-                  </a:solidFill>
-                  <a:latin typeface="Source Sans 3"/>
-                  <a:ea typeface="Source Sans 3"/>
-                  <a:cs typeface="Source Sans 3"/>
-                  <a:sym typeface="Source Sans 3"/>
-                </a:rPr>
-                <a:t>Pruebas funcionales e integración</a:t>
-              </a:r>
-            </a:p>
-          </p:txBody>
-        </p:sp>
-      </p:grpSp>
       <p:sp>
         <p:nvSpPr>
           <p:cNvPr id="36" name="TextBox 6">
@@ -7495,6 +6326,1112 @@
           </p:txBody>
         </p:sp>
       </p:grpSp>
+      <p:grpSp>
+        <p:nvGrpSpPr>
+          <p:cNvPr id="93" name="Grupo 92">
+            <a:extLst>
+              <a:ext uri="{FF2B5EF4-FFF2-40B4-BE49-F238E27FC236}">
+                <a16:creationId xmlns:a16="http://schemas.microsoft.com/office/drawing/2014/main" id="{059BF3A4-9394-4F44-AB7B-7B50CDCA9DCB}"/>
+              </a:ext>
+            </a:extLst>
+          </p:cNvPr>
+          <p:cNvGrpSpPr/>
+          <p:nvPr/>
+        </p:nvGrpSpPr>
+        <p:grpSpPr>
+          <a:xfrm>
+            <a:off x="1660376" y="2888576"/>
+            <a:ext cx="14967249" cy="2077351"/>
+            <a:chOff x="1660376" y="2888576"/>
+            <a:chExt cx="14967249" cy="2077351"/>
+          </a:xfrm>
+        </p:grpSpPr>
+        <p:pic>
+          <p:nvPicPr>
+            <p:cNvPr id="3" name="Picture 1" descr="image.png">
+              <a:extLst>
+                <a:ext uri="{FF2B5EF4-FFF2-40B4-BE49-F238E27FC236}">
+                  <a16:creationId xmlns:a16="http://schemas.microsoft.com/office/drawing/2014/main" id="{B688F05A-BCD9-939A-74E5-45DA5E588162}"/>
+                </a:ext>
+              </a:extLst>
+            </p:cNvPr>
+            <p:cNvPicPr>
+              <a:picLocks noChangeAspect="1"/>
+            </p:cNvPicPr>
+            <p:nvPr/>
+          </p:nvPicPr>
+          <p:blipFill>
+            <a:blip r:embed="rId3"/>
+            <a:stretch>
+              <a:fillRect/>
+            </a:stretch>
+          </p:blipFill>
+          <p:spPr>
+            <a:xfrm>
+              <a:off x="1660376" y="2888576"/>
+              <a:ext cx="14967249" cy="2077351"/>
+            </a:xfrm>
+            <a:prstGeom prst="rect">
+              <a:avLst/>
+            </a:prstGeom>
+            <a:ln>
+              <a:noFill/>
+            </a:ln>
+          </p:spPr>
+        </p:pic>
+        <p:sp>
+          <p:nvSpPr>
+            <p:cNvPr id="46" name="TextBox 11">
+              <a:extLst>
+                <a:ext uri="{FF2B5EF4-FFF2-40B4-BE49-F238E27FC236}">
+                  <a16:creationId xmlns:a16="http://schemas.microsoft.com/office/drawing/2014/main" id="{E3F016FE-C827-69FB-5881-2499E879A485}"/>
+                </a:ext>
+              </a:extLst>
+            </p:cNvPr>
+            <p:cNvSpPr txBox="1"/>
+            <p:nvPr/>
+          </p:nvSpPr>
+          <p:spPr>
+            <a:xfrm>
+              <a:off x="1991817" y="3695700"/>
+              <a:ext cx="14304367" cy="1107996"/>
+            </a:xfrm>
+            <a:prstGeom prst="rect">
+              <a:avLst/>
+            </a:prstGeom>
+            <a:noFill/>
+          </p:spPr>
+          <p:txBody>
+            <a:bodyPr wrap="square" lIns="0" tIns="0" rIns="0" bIns="0" anchor="t">
+              <a:spAutoFit/>
+            </a:bodyPr>
+            <a:lstStyle/>
+            <a:p>
+              <a:pPr algn="l"/>
+              <a:r>
+                <a:rPr lang="es-CL" sz="2400" noProof="0" dirty="0">
+                  <a:solidFill>
+                    <a:schemeClr val="bg1"/>
+                  </a:solidFill>
+                  <a:latin typeface="Source Sans 3"/>
+                </a:rPr>
+                <a:t>Desarrollar una plataforma informática que integre la información de deudores de la Tesorería General de la República (TGR) con el Banco, automatizando su procesamiento, validación, análisis y generación de reportes mediante procesos ETL, reglas de negocio y trazabilidad.</a:t>
+              </a:r>
+            </a:p>
+          </p:txBody>
+        </p:sp>
+        <p:grpSp>
+          <p:nvGrpSpPr>
+            <p:cNvPr id="92" name="Grupo 91">
+              <a:extLst>
+                <a:ext uri="{FF2B5EF4-FFF2-40B4-BE49-F238E27FC236}">
+                  <a16:creationId xmlns:a16="http://schemas.microsoft.com/office/drawing/2014/main" id="{4992BB4C-1808-15D6-5F4A-41EF881CFD93}"/>
+                </a:ext>
+              </a:extLst>
+            </p:cNvPr>
+            <p:cNvGrpSpPr/>
+            <p:nvPr/>
+          </p:nvGrpSpPr>
+          <p:grpSpPr>
+            <a:xfrm>
+              <a:off x="1981200" y="3097768"/>
+              <a:ext cx="3811749" cy="421720"/>
+              <a:chOff x="1981200" y="3097768"/>
+              <a:chExt cx="3811749" cy="421720"/>
+            </a:xfrm>
+          </p:grpSpPr>
+          <p:sp>
+            <p:nvSpPr>
+              <p:cNvPr id="44" name="TextBox 10">
+                <a:extLst>
+                  <a:ext uri="{FF2B5EF4-FFF2-40B4-BE49-F238E27FC236}">
+                    <a16:creationId xmlns:a16="http://schemas.microsoft.com/office/drawing/2014/main" id="{63DE47E8-5E5F-BAAC-F979-83A80D9159EE}"/>
+                  </a:ext>
+                </a:extLst>
+              </p:cNvPr>
+              <p:cNvSpPr txBox="1"/>
+              <p:nvPr/>
+            </p:nvSpPr>
+            <p:spPr>
+              <a:xfrm>
+                <a:off x="2511958" y="3150156"/>
+                <a:ext cx="3280991" cy="369332"/>
+              </a:xfrm>
+              <a:prstGeom prst="rect">
+                <a:avLst/>
+              </a:prstGeom>
+              <a:noFill/>
+            </p:spPr>
+            <p:txBody>
+              <a:bodyPr wrap="square" lIns="0" tIns="0" rIns="0" bIns="0" anchor="ctr">
+                <a:spAutoFit/>
+              </a:bodyPr>
+              <a:lstStyle/>
+              <a:p>
+                <a:pPr algn="l"/>
+                <a:r>
+                  <a:rPr lang="es-CL" sz="2400" b="1" i="0" u="none" noProof="0" dirty="0">
+                    <a:solidFill>
+                      <a:schemeClr val="bg1"/>
+                    </a:solidFill>
+                    <a:latin typeface="Montserrat Bold" panose="020B0604020202020204" charset="0"/>
+                  </a:rPr>
+                  <a:t>OBJETIVO GENERAL</a:t>
+                </a:r>
+              </a:p>
+            </p:txBody>
+          </p:sp>
+          <p:pic>
+            <p:nvPicPr>
+              <p:cNvPr id="50" name="Picture 13" descr="image.png">
+                <a:extLst>
+                  <a:ext uri="{FF2B5EF4-FFF2-40B4-BE49-F238E27FC236}">
+                    <a16:creationId xmlns:a16="http://schemas.microsoft.com/office/drawing/2014/main" id="{FCC006E4-3489-6F0A-779C-AC2073EDA04E}"/>
+                  </a:ext>
+                </a:extLst>
+              </p:cNvPr>
+              <p:cNvPicPr>
+                <a:picLocks noChangeAspect="1"/>
+              </p:cNvPicPr>
+              <p:nvPr/>
+            </p:nvPicPr>
+            <p:blipFill>
+              <a:blip r:embed="rId4"/>
+              <a:stretch>
+                <a:fillRect/>
+              </a:stretch>
+            </p:blipFill>
+            <p:spPr>
+              <a:xfrm>
+                <a:off x="1981200" y="3097768"/>
+                <a:ext cx="455893" cy="369332"/>
+              </a:xfrm>
+              <a:prstGeom prst="rect">
+                <a:avLst/>
+              </a:prstGeom>
+            </p:spPr>
+          </p:pic>
+        </p:grpSp>
+      </p:grpSp>
+      <p:grpSp>
+        <p:nvGrpSpPr>
+          <p:cNvPr id="91" name="Grupo 90">
+            <a:extLst>
+              <a:ext uri="{FF2B5EF4-FFF2-40B4-BE49-F238E27FC236}">
+                <a16:creationId xmlns:a16="http://schemas.microsoft.com/office/drawing/2014/main" id="{D1651734-6D0B-3096-A98E-5001B7CBC213}"/>
+              </a:ext>
+            </a:extLst>
+          </p:cNvPr>
+          <p:cNvGrpSpPr/>
+          <p:nvPr/>
+        </p:nvGrpSpPr>
+        <p:grpSpPr>
+          <a:xfrm>
+            <a:off x="1978373" y="5769606"/>
+            <a:ext cx="4008574" cy="364494"/>
+            <a:chOff x="1978373" y="5647436"/>
+            <a:chExt cx="4008574" cy="364494"/>
+          </a:xfrm>
+        </p:grpSpPr>
+        <p:sp>
+          <p:nvSpPr>
+            <p:cNvPr id="48" name="TextBox 12">
+              <a:extLst>
+                <a:ext uri="{FF2B5EF4-FFF2-40B4-BE49-F238E27FC236}">
+                  <a16:creationId xmlns:a16="http://schemas.microsoft.com/office/drawing/2014/main" id="{5F3FC861-44DC-3109-3730-5EC27896A106}"/>
+                </a:ext>
+              </a:extLst>
+            </p:cNvPr>
+            <p:cNvSpPr txBox="1"/>
+            <p:nvPr/>
+          </p:nvSpPr>
+          <p:spPr>
+            <a:xfrm>
+              <a:off x="2511958" y="5647436"/>
+              <a:ext cx="3474989" cy="307777"/>
+            </a:xfrm>
+            <a:prstGeom prst="rect">
+              <a:avLst/>
+            </a:prstGeom>
+            <a:noFill/>
+          </p:spPr>
+          <p:txBody>
+            <a:bodyPr wrap="square" lIns="0" tIns="0" rIns="0" bIns="0" anchor="ctr">
+              <a:spAutoFit/>
+            </a:bodyPr>
+            <a:lstStyle/>
+            <a:p>
+              <a:pPr algn="l"/>
+              <a:r>
+                <a:rPr lang="es-CL" sz="2000" b="1" i="0" u="none" noProof="0" dirty="0">
+                  <a:solidFill>
+                    <a:srgbClr val="64748B"/>
+                  </a:solidFill>
+                  <a:latin typeface="Montserrat Bold" panose="020B0604020202020204" charset="0"/>
+                </a:rPr>
+                <a:t>OBJETIVOS ESPECÍFICOS</a:t>
+              </a:r>
+            </a:p>
+          </p:txBody>
+        </p:sp>
+        <p:pic>
+          <p:nvPicPr>
+            <p:cNvPr id="52" name="Picture 14" descr="image.png">
+              <a:extLst>
+                <a:ext uri="{FF2B5EF4-FFF2-40B4-BE49-F238E27FC236}">
+                  <a16:creationId xmlns:a16="http://schemas.microsoft.com/office/drawing/2014/main" id="{97B0A74D-BD95-9A71-BED7-72164476CB18}"/>
+                </a:ext>
+              </a:extLst>
+            </p:cNvPr>
+            <p:cNvPicPr>
+              <a:picLocks noChangeAspect="1"/>
+            </p:cNvPicPr>
+            <p:nvPr/>
+          </p:nvPicPr>
+          <p:blipFill>
+            <a:blip r:embed="rId5"/>
+            <a:stretch>
+              <a:fillRect/>
+            </a:stretch>
+          </p:blipFill>
+          <p:spPr>
+            <a:xfrm>
+              <a:off x="1978373" y="5676900"/>
+              <a:ext cx="361950" cy="335030"/>
+            </a:xfrm>
+            <a:prstGeom prst="rect">
+              <a:avLst/>
+            </a:prstGeom>
+          </p:spPr>
+        </p:pic>
+      </p:grpSp>
+      <p:grpSp>
+        <p:nvGrpSpPr>
+          <p:cNvPr id="90" name="Grupo 89">
+            <a:extLst>
+              <a:ext uri="{FF2B5EF4-FFF2-40B4-BE49-F238E27FC236}">
+                <a16:creationId xmlns:a16="http://schemas.microsoft.com/office/drawing/2014/main" id="{11601AC0-E190-5E85-F2DA-8BD458BA525D}"/>
+              </a:ext>
+            </a:extLst>
+          </p:cNvPr>
+          <p:cNvGrpSpPr/>
+          <p:nvPr/>
+        </p:nvGrpSpPr>
+        <p:grpSpPr>
+          <a:xfrm>
+            <a:off x="1691495" y="6587584"/>
+            <a:ext cx="14905011" cy="3039016"/>
+            <a:chOff x="1844732" y="6587584"/>
+            <a:chExt cx="14905011" cy="3039016"/>
+          </a:xfrm>
+        </p:grpSpPr>
+        <p:grpSp>
+          <p:nvGrpSpPr>
+            <p:cNvPr id="86" name="Grupo 85">
+              <a:extLst>
+                <a:ext uri="{FF2B5EF4-FFF2-40B4-BE49-F238E27FC236}">
+                  <a16:creationId xmlns:a16="http://schemas.microsoft.com/office/drawing/2014/main" id="{101869D2-046E-8C09-A841-8E52841A0176}"/>
+                </a:ext>
+              </a:extLst>
+            </p:cNvPr>
+            <p:cNvGrpSpPr/>
+            <p:nvPr/>
+          </p:nvGrpSpPr>
+          <p:grpSpPr>
+            <a:xfrm>
+              <a:off x="1844732" y="6587584"/>
+              <a:ext cx="7299268" cy="1392435"/>
+              <a:chOff x="3657154" y="5715714"/>
+              <a:chExt cx="5472112" cy="1043880"/>
+            </a:xfrm>
+          </p:grpSpPr>
+          <p:pic>
+            <p:nvPicPr>
+              <p:cNvPr id="5" name="Picture 2" descr="image.png">
+                <a:extLst>
+                  <a:ext uri="{FF2B5EF4-FFF2-40B4-BE49-F238E27FC236}">
+                    <a16:creationId xmlns:a16="http://schemas.microsoft.com/office/drawing/2014/main" id="{00482795-417B-03F9-A1E5-AC8A0D093FB1}"/>
+                  </a:ext>
+                </a:extLst>
+              </p:cNvPr>
+              <p:cNvPicPr>
+                <a:picLocks noChangeAspect="1"/>
+              </p:cNvPicPr>
+              <p:nvPr/>
+            </p:nvPicPr>
+            <p:blipFill>
+              <a:blip r:embed="rId6"/>
+              <a:stretch>
+                <a:fillRect/>
+              </a:stretch>
+            </p:blipFill>
+            <p:spPr>
+              <a:xfrm>
+                <a:off x="3657154" y="5715714"/>
+                <a:ext cx="5448300" cy="1043880"/>
+              </a:xfrm>
+              <a:prstGeom prst="rect">
+                <a:avLst/>
+              </a:prstGeom>
+            </p:spPr>
+          </p:pic>
+          <p:pic>
+            <p:nvPicPr>
+              <p:cNvPr id="54" name="Picture 15" descr="image.png">
+                <a:extLst>
+                  <a:ext uri="{FF2B5EF4-FFF2-40B4-BE49-F238E27FC236}">
+                    <a16:creationId xmlns:a16="http://schemas.microsoft.com/office/drawing/2014/main" id="{9987A4D8-C90E-5E29-9840-106AC4E58A97}"/>
+                  </a:ext>
+                </a:extLst>
+              </p:cNvPr>
+              <p:cNvPicPr>
+                <a:picLocks noChangeAspect="1"/>
+              </p:cNvPicPr>
+              <p:nvPr/>
+            </p:nvPicPr>
+            <p:blipFill>
+              <a:blip r:embed="rId7"/>
+              <a:stretch>
+                <a:fillRect/>
+              </a:stretch>
+            </p:blipFill>
+            <p:spPr>
+              <a:xfrm>
+                <a:off x="3857179" y="5998965"/>
+                <a:ext cx="419100" cy="419100"/>
+              </a:xfrm>
+              <a:prstGeom prst="rect">
+                <a:avLst/>
+              </a:prstGeom>
+            </p:spPr>
+          </p:pic>
+          <p:pic>
+            <p:nvPicPr>
+              <p:cNvPr id="62" name="Picture 19" descr="image.png">
+                <a:extLst>
+                  <a:ext uri="{FF2B5EF4-FFF2-40B4-BE49-F238E27FC236}">
+                    <a16:creationId xmlns:a16="http://schemas.microsoft.com/office/drawing/2014/main" id="{487216B6-06C6-B72B-3D7A-804537765870}"/>
+                  </a:ext>
+                </a:extLst>
+              </p:cNvPr>
+              <p:cNvPicPr>
+                <a:picLocks noChangeAspect="1"/>
+              </p:cNvPicPr>
+              <p:nvPr/>
+            </p:nvPicPr>
+            <p:blipFill>
+              <a:blip r:embed="rId8"/>
+              <a:stretch>
+                <a:fillRect/>
+              </a:stretch>
+            </p:blipFill>
+            <p:spPr>
+              <a:xfrm>
+                <a:off x="3981004" y="6122790"/>
+                <a:ext cx="171450" cy="171450"/>
+              </a:xfrm>
+              <a:prstGeom prst="rect">
+                <a:avLst/>
+              </a:prstGeom>
+            </p:spPr>
+          </p:pic>
+          <p:sp>
+            <p:nvSpPr>
+              <p:cNvPr id="64" name="TextBox 20">
+                <a:extLst>
+                  <a:ext uri="{FF2B5EF4-FFF2-40B4-BE49-F238E27FC236}">
+                    <a16:creationId xmlns:a16="http://schemas.microsoft.com/office/drawing/2014/main" id="{035F45A1-E0A7-371B-525A-C0F90F8B3798}"/>
+                  </a:ext>
+                </a:extLst>
+              </p:cNvPr>
+              <p:cNvSpPr txBox="1"/>
+              <p:nvPr/>
+            </p:nvSpPr>
+            <p:spPr>
+              <a:xfrm>
+                <a:off x="4428679" y="5998965"/>
+                <a:ext cx="4700587" cy="207660"/>
+              </a:xfrm>
+              <a:prstGeom prst="rect">
+                <a:avLst/>
+              </a:prstGeom>
+              <a:noFill/>
+            </p:spPr>
+            <p:txBody>
+              <a:bodyPr wrap="square" lIns="0" tIns="0" rIns="0" bIns="0" anchor="t">
+                <a:spAutoFit/>
+              </a:bodyPr>
+              <a:lstStyle/>
+              <a:p>
+                <a:pPr algn="l"/>
+                <a:r>
+                  <a:rPr lang="es-CL" b="1" i="0" u="none" noProof="0" dirty="0">
+                    <a:solidFill>
+                      <a:srgbClr val="0F172A"/>
+                    </a:solidFill>
+                    <a:latin typeface="Source Sans 3" panose="020B0604020202020204" charset="0"/>
+                  </a:rPr>
+                  <a:t>1. Análisis y Alcance</a:t>
+                </a:r>
+              </a:p>
+            </p:txBody>
+          </p:sp>
+          <p:sp>
+            <p:nvSpPr>
+              <p:cNvPr id="66" name="TextBox 21">
+                <a:extLst>
+                  <a:ext uri="{FF2B5EF4-FFF2-40B4-BE49-F238E27FC236}">
+                    <a16:creationId xmlns:a16="http://schemas.microsoft.com/office/drawing/2014/main" id="{A9DA1133-C915-9DE1-E891-1471C71B72B3}"/>
+                  </a:ext>
+                </a:extLst>
+              </p:cNvPr>
+              <p:cNvSpPr txBox="1"/>
+              <p:nvPr/>
+            </p:nvSpPr>
+            <p:spPr>
+              <a:xfrm>
+                <a:off x="4428679" y="6256140"/>
+                <a:ext cx="4476750" cy="298512"/>
+              </a:xfrm>
+              <a:prstGeom prst="rect">
+                <a:avLst/>
+              </a:prstGeom>
+              <a:noFill/>
+            </p:spPr>
+            <p:txBody>
+              <a:bodyPr wrap="square" lIns="0" tIns="0" rIns="0" bIns="0" anchor="t">
+                <a:spAutoFit/>
+              </a:bodyPr>
+              <a:lstStyle/>
+              <a:p>
+                <a:pPr algn="l">
+                  <a:lnSpc>
+                    <a:spcPts val="1522"/>
+                  </a:lnSpc>
+                </a:pPr>
+                <a:r>
+                  <a:rPr lang="es-CL" sz="1600" b="0" i="0" u="none" noProof="0" dirty="0">
+                    <a:solidFill>
+                      <a:srgbClr val="475569"/>
+                    </a:solidFill>
+                    <a:latin typeface="Source Sans 3" panose="020B0604020202020204" charset="0"/>
+                  </a:rPr>
+                  <a:t>Analizar requerimientos y reglas de negocio del proceso de integración entre TGR y Banco Genérico.</a:t>
+                </a:r>
+              </a:p>
+            </p:txBody>
+          </p:sp>
+        </p:grpSp>
+        <p:grpSp>
+          <p:nvGrpSpPr>
+            <p:cNvPr id="88" name="Grupo 87">
+              <a:extLst>
+                <a:ext uri="{FF2B5EF4-FFF2-40B4-BE49-F238E27FC236}">
+                  <a16:creationId xmlns:a16="http://schemas.microsoft.com/office/drawing/2014/main" id="{CB60D723-8E9D-C47B-1B74-54AA19C2DD66}"/>
+                </a:ext>
+              </a:extLst>
+            </p:cNvPr>
+            <p:cNvGrpSpPr/>
+            <p:nvPr/>
+          </p:nvGrpSpPr>
+          <p:grpSpPr>
+            <a:xfrm>
+              <a:off x="9450481" y="6587585"/>
+              <a:ext cx="7299262" cy="1392434"/>
+              <a:chOff x="9257854" y="5715715"/>
+              <a:chExt cx="5472111" cy="1043880"/>
+            </a:xfrm>
+          </p:grpSpPr>
+          <p:pic>
+            <p:nvPicPr>
+              <p:cNvPr id="31" name="Picture 3" descr="image.png">
+                <a:extLst>
+                  <a:ext uri="{FF2B5EF4-FFF2-40B4-BE49-F238E27FC236}">
+                    <a16:creationId xmlns:a16="http://schemas.microsoft.com/office/drawing/2014/main" id="{F2DC9DA0-5F95-DE9C-9DED-B89AD61A7111}"/>
+                  </a:ext>
+                </a:extLst>
+              </p:cNvPr>
+              <p:cNvPicPr>
+                <a:picLocks noChangeAspect="1"/>
+              </p:cNvPicPr>
+              <p:nvPr/>
+            </p:nvPicPr>
+            <p:blipFill>
+              <a:blip r:embed="rId9"/>
+              <a:stretch>
+                <a:fillRect/>
+              </a:stretch>
+            </p:blipFill>
+            <p:spPr>
+              <a:xfrm>
+                <a:off x="9257854" y="5715715"/>
+                <a:ext cx="5448300" cy="1043880"/>
+              </a:xfrm>
+              <a:prstGeom prst="rect">
+                <a:avLst/>
+              </a:prstGeom>
+            </p:spPr>
+          </p:pic>
+          <p:pic>
+            <p:nvPicPr>
+              <p:cNvPr id="56" name="Picture 16" descr="image.png">
+                <a:extLst>
+                  <a:ext uri="{FF2B5EF4-FFF2-40B4-BE49-F238E27FC236}">
+                    <a16:creationId xmlns:a16="http://schemas.microsoft.com/office/drawing/2014/main" id="{C30BEC44-888C-E05A-3F1B-D646D37E2613}"/>
+                  </a:ext>
+                </a:extLst>
+              </p:cNvPr>
+              <p:cNvPicPr>
+                <a:picLocks noChangeAspect="1"/>
+              </p:cNvPicPr>
+              <p:nvPr/>
+            </p:nvPicPr>
+            <p:blipFill>
+              <a:blip r:embed="rId10"/>
+              <a:stretch>
+                <a:fillRect/>
+              </a:stretch>
+            </p:blipFill>
+            <p:spPr>
+              <a:xfrm>
+                <a:off x="9457879" y="5998965"/>
+                <a:ext cx="419100" cy="419100"/>
+              </a:xfrm>
+              <a:prstGeom prst="rect">
+                <a:avLst/>
+              </a:prstGeom>
+            </p:spPr>
+          </p:pic>
+          <p:pic>
+            <p:nvPicPr>
+              <p:cNvPr id="68" name="Picture 22" descr="image.png">
+                <a:extLst>
+                  <a:ext uri="{FF2B5EF4-FFF2-40B4-BE49-F238E27FC236}">
+                    <a16:creationId xmlns:a16="http://schemas.microsoft.com/office/drawing/2014/main" id="{B6CF40D6-2075-9BB3-E6E6-73A1A96970A3}"/>
+                  </a:ext>
+                </a:extLst>
+              </p:cNvPr>
+              <p:cNvPicPr>
+                <a:picLocks noChangeAspect="1"/>
+              </p:cNvPicPr>
+              <p:nvPr/>
+            </p:nvPicPr>
+            <p:blipFill>
+              <a:blip r:embed="rId11"/>
+              <a:stretch>
+                <a:fillRect/>
+              </a:stretch>
+            </p:blipFill>
+            <p:spPr>
+              <a:xfrm>
+                <a:off x="9572179" y="6122790"/>
+                <a:ext cx="190500" cy="171450"/>
+              </a:xfrm>
+              <a:prstGeom prst="rect">
+                <a:avLst/>
+              </a:prstGeom>
+            </p:spPr>
+          </p:pic>
+          <p:sp>
+            <p:nvSpPr>
+              <p:cNvPr id="70" name="TextBox 23">
+                <a:extLst>
+                  <a:ext uri="{FF2B5EF4-FFF2-40B4-BE49-F238E27FC236}">
+                    <a16:creationId xmlns:a16="http://schemas.microsoft.com/office/drawing/2014/main" id="{50D19571-19A5-5390-6A8A-4C83913F25A7}"/>
+                  </a:ext>
+                </a:extLst>
+              </p:cNvPr>
+              <p:cNvSpPr txBox="1"/>
+              <p:nvPr/>
+            </p:nvSpPr>
+            <p:spPr>
+              <a:xfrm>
+                <a:off x="10029378" y="5998965"/>
+                <a:ext cx="4700587" cy="207661"/>
+              </a:xfrm>
+              <a:prstGeom prst="rect">
+                <a:avLst/>
+              </a:prstGeom>
+              <a:noFill/>
+            </p:spPr>
+            <p:txBody>
+              <a:bodyPr wrap="square" lIns="0" tIns="0" rIns="0" bIns="0" anchor="t">
+                <a:spAutoFit/>
+              </a:bodyPr>
+              <a:lstStyle/>
+              <a:p>
+                <a:pPr algn="l"/>
+                <a:r>
+                  <a:rPr lang="es-CL" b="1" noProof="0" dirty="0">
+                    <a:solidFill>
+                      <a:srgbClr val="0F172A"/>
+                    </a:solidFill>
+                    <a:latin typeface="Source Sans 3" panose="020B0604020202020204" charset="0"/>
+                  </a:rPr>
+                  <a:t>2. Arquitectura y Datos</a:t>
+                </a:r>
+              </a:p>
+            </p:txBody>
+          </p:sp>
+          <p:sp>
+            <p:nvSpPr>
+              <p:cNvPr id="72" name="TextBox 24">
+                <a:extLst>
+                  <a:ext uri="{FF2B5EF4-FFF2-40B4-BE49-F238E27FC236}">
+                    <a16:creationId xmlns:a16="http://schemas.microsoft.com/office/drawing/2014/main" id="{40E97511-E679-F99E-FDD0-82836380000D}"/>
+                  </a:ext>
+                </a:extLst>
+              </p:cNvPr>
+              <p:cNvSpPr txBox="1"/>
+              <p:nvPr/>
+            </p:nvSpPr>
+            <p:spPr>
+              <a:xfrm>
+                <a:off x="10029379" y="6256140"/>
+                <a:ext cx="4476750" cy="304280"/>
+              </a:xfrm>
+              <a:prstGeom prst="rect">
+                <a:avLst/>
+              </a:prstGeom>
+              <a:noFill/>
+            </p:spPr>
+            <p:txBody>
+              <a:bodyPr wrap="square" lIns="0" tIns="0" rIns="0" bIns="0" anchor="t">
+                <a:spAutoFit/>
+              </a:bodyPr>
+              <a:lstStyle/>
+              <a:p>
+                <a:pPr algn="l">
+                  <a:lnSpc>
+                    <a:spcPts val="1522"/>
+                  </a:lnSpc>
+                </a:pPr>
+                <a:r>
+                  <a:rPr lang="es-CL" b="0" i="0" u="none" noProof="0" dirty="0">
+                    <a:solidFill>
+                      <a:srgbClr val="475569"/>
+                    </a:solidFill>
+                    <a:latin typeface="Source Sans 3" panose="020B0604020202020204" charset="0"/>
+                  </a:rPr>
+                  <a:t>Diseñar el modelo de datos y arquitectura escalable que soporte el procesamiento con trazabilidad.</a:t>
+                </a:r>
+              </a:p>
+            </p:txBody>
+          </p:sp>
+        </p:grpSp>
+        <p:grpSp>
+          <p:nvGrpSpPr>
+            <p:cNvPr id="87" name="Grupo 86">
+              <a:extLst>
+                <a:ext uri="{FF2B5EF4-FFF2-40B4-BE49-F238E27FC236}">
+                  <a16:creationId xmlns:a16="http://schemas.microsoft.com/office/drawing/2014/main" id="{52B57646-546A-915D-88E8-DC4588D4471D}"/>
+                </a:ext>
+              </a:extLst>
+            </p:cNvPr>
+            <p:cNvGrpSpPr/>
+            <p:nvPr/>
+          </p:nvGrpSpPr>
+          <p:grpSpPr>
+            <a:xfrm>
+              <a:off x="1844732" y="8235896"/>
+              <a:ext cx="7290194" cy="1390704"/>
+              <a:chOff x="3657154" y="6995220"/>
+              <a:chExt cx="5472112" cy="1043880"/>
+            </a:xfrm>
+          </p:grpSpPr>
+          <p:pic>
+            <p:nvPicPr>
+              <p:cNvPr id="33" name="Picture 4" descr="image.png">
+                <a:extLst>
+                  <a:ext uri="{FF2B5EF4-FFF2-40B4-BE49-F238E27FC236}">
+                    <a16:creationId xmlns:a16="http://schemas.microsoft.com/office/drawing/2014/main" id="{E84A8BA3-E4E4-9C5F-7166-2B7D951E8FDB}"/>
+                  </a:ext>
+                </a:extLst>
+              </p:cNvPr>
+              <p:cNvPicPr>
+                <a:picLocks noChangeAspect="1"/>
+              </p:cNvPicPr>
+              <p:nvPr/>
+            </p:nvPicPr>
+            <p:blipFill>
+              <a:blip r:embed="rId12"/>
+              <a:stretch>
+                <a:fillRect/>
+              </a:stretch>
+            </p:blipFill>
+            <p:spPr>
+              <a:xfrm>
+                <a:off x="3657154" y="6995220"/>
+                <a:ext cx="5448300" cy="1043880"/>
+              </a:xfrm>
+              <a:prstGeom prst="rect">
+                <a:avLst/>
+              </a:prstGeom>
+            </p:spPr>
+          </p:pic>
+          <p:pic>
+            <p:nvPicPr>
+              <p:cNvPr id="58" name="Picture 17" descr="image.png">
+                <a:extLst>
+                  <a:ext uri="{FF2B5EF4-FFF2-40B4-BE49-F238E27FC236}">
+                    <a16:creationId xmlns:a16="http://schemas.microsoft.com/office/drawing/2014/main" id="{8B609816-45A2-09EA-245F-2916F6AE286D}"/>
+                  </a:ext>
+                </a:extLst>
+              </p:cNvPr>
+              <p:cNvPicPr>
+                <a:picLocks noChangeAspect="1"/>
+              </p:cNvPicPr>
+              <p:nvPr/>
+            </p:nvPicPr>
+            <p:blipFill>
+              <a:blip r:embed="rId13"/>
+              <a:stretch>
+                <a:fillRect/>
+              </a:stretch>
+            </p:blipFill>
+            <p:spPr>
+              <a:xfrm>
+                <a:off x="3857179" y="7195245"/>
+                <a:ext cx="419100" cy="419100"/>
+              </a:xfrm>
+              <a:prstGeom prst="rect">
+                <a:avLst/>
+              </a:prstGeom>
+            </p:spPr>
+          </p:pic>
+          <p:pic>
+            <p:nvPicPr>
+              <p:cNvPr id="74" name="Picture 25" descr="image.png">
+                <a:extLst>
+                  <a:ext uri="{FF2B5EF4-FFF2-40B4-BE49-F238E27FC236}">
+                    <a16:creationId xmlns:a16="http://schemas.microsoft.com/office/drawing/2014/main" id="{7E2FB328-8E12-2747-C7DF-52BC5445E92E}"/>
+                  </a:ext>
+                </a:extLst>
+              </p:cNvPr>
+              <p:cNvPicPr>
+                <a:picLocks noChangeAspect="1"/>
+              </p:cNvPicPr>
+              <p:nvPr/>
+            </p:nvPicPr>
+            <p:blipFill>
+              <a:blip r:embed="rId14"/>
+              <a:stretch>
+                <a:fillRect/>
+              </a:stretch>
+            </p:blipFill>
+            <p:spPr>
+              <a:xfrm>
+                <a:off x="3957191" y="7319070"/>
+                <a:ext cx="219075" cy="171450"/>
+              </a:xfrm>
+              <a:prstGeom prst="rect">
+                <a:avLst/>
+              </a:prstGeom>
+            </p:spPr>
+          </p:pic>
+          <p:sp>
+            <p:nvSpPr>
+              <p:cNvPr id="76" name="TextBox 26">
+                <a:extLst>
+                  <a:ext uri="{FF2B5EF4-FFF2-40B4-BE49-F238E27FC236}">
+                    <a16:creationId xmlns:a16="http://schemas.microsoft.com/office/drawing/2014/main" id="{8979F95F-8D56-5D10-374D-7F04B3759B82}"/>
+                  </a:ext>
+                </a:extLst>
+              </p:cNvPr>
+              <p:cNvSpPr txBox="1"/>
+              <p:nvPr/>
+            </p:nvSpPr>
+            <p:spPr>
+              <a:xfrm>
+                <a:off x="4428679" y="7195245"/>
+                <a:ext cx="4700587" cy="207919"/>
+              </a:xfrm>
+              <a:prstGeom prst="rect">
+                <a:avLst/>
+              </a:prstGeom>
+              <a:noFill/>
+            </p:spPr>
+            <p:txBody>
+              <a:bodyPr wrap="square" lIns="0" tIns="0" rIns="0" bIns="0" anchor="t">
+                <a:spAutoFit/>
+              </a:bodyPr>
+              <a:lstStyle/>
+              <a:p>
+                <a:pPr algn="l"/>
+                <a:r>
+                  <a:rPr lang="es-CL" b="1" i="0" u="none" noProof="0" dirty="0">
+                    <a:solidFill>
+                      <a:srgbClr val="0F172A"/>
+                    </a:solidFill>
+                    <a:latin typeface="Source Sans 3" panose="020B0604020202020204" charset="0"/>
+                  </a:rPr>
+                  <a:t>3. </a:t>
+                </a:r>
+                <a:r>
+                  <a:rPr lang="es-CL" b="1" noProof="0" dirty="0">
+                    <a:solidFill>
+                      <a:srgbClr val="0F172A"/>
+                    </a:solidFill>
+                    <a:latin typeface="Source Sans 3" panose="020B0604020202020204" charset="0"/>
+                  </a:rPr>
+                  <a:t>Desarrollo</a:t>
+                </a:r>
+                <a:r>
+                  <a:rPr lang="es-CL" b="1" i="0" u="none" noProof="0" dirty="0">
+                    <a:solidFill>
+                      <a:srgbClr val="0F172A"/>
+                    </a:solidFill>
+                    <a:latin typeface="Source Sans 3" panose="020B0604020202020204" charset="0"/>
+                  </a:rPr>
+                  <a:t> ETL</a:t>
+                </a:r>
+              </a:p>
+            </p:txBody>
+          </p:sp>
+          <p:sp>
+            <p:nvSpPr>
+              <p:cNvPr id="78" name="TextBox 27">
+                <a:extLst>
+                  <a:ext uri="{FF2B5EF4-FFF2-40B4-BE49-F238E27FC236}">
+                    <a16:creationId xmlns:a16="http://schemas.microsoft.com/office/drawing/2014/main" id="{49330D13-6151-64B8-8A1E-4A9C2E999039}"/>
+                  </a:ext>
+                </a:extLst>
+              </p:cNvPr>
+              <p:cNvSpPr txBox="1"/>
+              <p:nvPr/>
+            </p:nvSpPr>
+            <p:spPr>
+              <a:xfrm>
+                <a:off x="4428679" y="7452420"/>
+                <a:ext cx="4476750" cy="304659"/>
+              </a:xfrm>
+              <a:prstGeom prst="rect">
+                <a:avLst/>
+              </a:prstGeom>
+              <a:noFill/>
+            </p:spPr>
+            <p:txBody>
+              <a:bodyPr wrap="square" lIns="0" tIns="0" rIns="0" bIns="0" anchor="t">
+                <a:spAutoFit/>
+              </a:bodyPr>
+              <a:lstStyle/>
+              <a:p>
+                <a:pPr algn="l">
+                  <a:lnSpc>
+                    <a:spcPts val="1522"/>
+                  </a:lnSpc>
+                </a:pPr>
+                <a:r>
+                  <a:rPr lang="es-CL" b="0" i="0" u="none" noProof="0" dirty="0">
+                    <a:solidFill>
+                      <a:srgbClr val="475569"/>
+                    </a:solidFill>
+                    <a:latin typeface="Source Sans 3" panose="020B0604020202020204" charset="0"/>
+                  </a:rPr>
+                  <a:t>Automatizar la recepción, validación, procesamiento y cruce de información entre ambas fuentes.</a:t>
+                </a:r>
+              </a:p>
+            </p:txBody>
+          </p:sp>
+        </p:grpSp>
+        <p:grpSp>
+          <p:nvGrpSpPr>
+            <p:cNvPr id="89" name="Grupo 88">
+              <a:extLst>
+                <a:ext uri="{FF2B5EF4-FFF2-40B4-BE49-F238E27FC236}">
+                  <a16:creationId xmlns:a16="http://schemas.microsoft.com/office/drawing/2014/main" id="{80AAE71F-B9C6-6A2F-6C03-90A72A3F79BB}"/>
+                </a:ext>
+              </a:extLst>
+            </p:cNvPr>
+            <p:cNvGrpSpPr/>
+            <p:nvPr/>
+          </p:nvGrpSpPr>
+          <p:grpSpPr>
+            <a:xfrm>
+              <a:off x="9450480" y="8235897"/>
+              <a:ext cx="7290189" cy="1390703"/>
+              <a:chOff x="9257854" y="6995220"/>
+              <a:chExt cx="5472112" cy="1043880"/>
+            </a:xfrm>
+          </p:grpSpPr>
+          <p:pic>
+            <p:nvPicPr>
+              <p:cNvPr id="35" name="Picture 5" descr="image.png">
+                <a:extLst>
+                  <a:ext uri="{FF2B5EF4-FFF2-40B4-BE49-F238E27FC236}">
+                    <a16:creationId xmlns:a16="http://schemas.microsoft.com/office/drawing/2014/main" id="{9B07CC57-A144-8975-3A24-742B6A73B0A8}"/>
+                  </a:ext>
+                </a:extLst>
+              </p:cNvPr>
+              <p:cNvPicPr>
+                <a:picLocks noChangeAspect="1"/>
+              </p:cNvPicPr>
+              <p:nvPr/>
+            </p:nvPicPr>
+            <p:blipFill>
+              <a:blip r:embed="rId15"/>
+              <a:stretch>
+                <a:fillRect/>
+              </a:stretch>
+            </p:blipFill>
+            <p:spPr>
+              <a:xfrm>
+                <a:off x="9257854" y="6995220"/>
+                <a:ext cx="5448300" cy="1043880"/>
+              </a:xfrm>
+              <a:prstGeom prst="rect">
+                <a:avLst/>
+              </a:prstGeom>
+            </p:spPr>
+          </p:pic>
+          <p:pic>
+            <p:nvPicPr>
+              <p:cNvPr id="60" name="Picture 18" descr="image.png">
+                <a:extLst>
+                  <a:ext uri="{FF2B5EF4-FFF2-40B4-BE49-F238E27FC236}">
+                    <a16:creationId xmlns:a16="http://schemas.microsoft.com/office/drawing/2014/main" id="{FBF697FA-2A61-87AC-A33B-53D8B1ECBDB4}"/>
+                  </a:ext>
+                </a:extLst>
+              </p:cNvPr>
+              <p:cNvPicPr>
+                <a:picLocks noChangeAspect="1"/>
+              </p:cNvPicPr>
+              <p:nvPr/>
+            </p:nvPicPr>
+            <p:blipFill>
+              <a:blip r:embed="rId16"/>
+              <a:stretch>
+                <a:fillRect/>
+              </a:stretch>
+            </p:blipFill>
+            <p:spPr>
+              <a:xfrm>
+                <a:off x="9457879" y="7195245"/>
+                <a:ext cx="419100" cy="419100"/>
+              </a:xfrm>
+              <a:prstGeom prst="rect">
+                <a:avLst/>
+              </a:prstGeom>
+            </p:spPr>
+          </p:pic>
+          <p:pic>
+            <p:nvPicPr>
+              <p:cNvPr id="80" name="Picture 28" descr="image.png">
+                <a:extLst>
+                  <a:ext uri="{FF2B5EF4-FFF2-40B4-BE49-F238E27FC236}">
+                    <a16:creationId xmlns:a16="http://schemas.microsoft.com/office/drawing/2014/main" id="{5D81F7D2-B01D-8D24-5C4E-7E4ED34FDD7A}"/>
+                  </a:ext>
+                </a:extLst>
+              </p:cNvPr>
+              <p:cNvPicPr>
+                <a:picLocks noChangeAspect="1"/>
+              </p:cNvPicPr>
+              <p:nvPr/>
+            </p:nvPicPr>
+            <p:blipFill>
+              <a:blip r:embed="rId17"/>
+              <a:stretch>
+                <a:fillRect/>
+              </a:stretch>
+            </p:blipFill>
+            <p:spPr>
+              <a:xfrm>
+                <a:off x="9581704" y="7319070"/>
+                <a:ext cx="171450" cy="171450"/>
+              </a:xfrm>
+              <a:prstGeom prst="rect">
+                <a:avLst/>
+              </a:prstGeom>
+            </p:spPr>
+          </p:pic>
+          <p:sp>
+            <p:nvSpPr>
+              <p:cNvPr id="82" name="TextBox 29">
+                <a:extLst>
+                  <a:ext uri="{FF2B5EF4-FFF2-40B4-BE49-F238E27FC236}">
+                    <a16:creationId xmlns:a16="http://schemas.microsoft.com/office/drawing/2014/main" id="{540320A8-6F00-FFE5-4690-5DF4DD860273}"/>
+                  </a:ext>
+                </a:extLst>
+              </p:cNvPr>
+              <p:cNvSpPr txBox="1"/>
+              <p:nvPr/>
+            </p:nvSpPr>
+            <p:spPr>
+              <a:xfrm>
+                <a:off x="10029379" y="7195245"/>
+                <a:ext cx="4700587" cy="207919"/>
+              </a:xfrm>
+              <a:prstGeom prst="rect">
+                <a:avLst/>
+              </a:prstGeom>
+              <a:noFill/>
+            </p:spPr>
+            <p:txBody>
+              <a:bodyPr wrap="square" lIns="0" tIns="0" rIns="0" bIns="0" anchor="t">
+                <a:spAutoFit/>
+              </a:bodyPr>
+              <a:lstStyle/>
+              <a:p>
+                <a:pPr algn="l"/>
+                <a:r>
+                  <a:rPr lang="es-CL" b="1" i="0" u="none" noProof="0" dirty="0">
+                    <a:solidFill>
+                      <a:srgbClr val="0F172A"/>
+                    </a:solidFill>
+                    <a:latin typeface="Source Sans 3" panose="020B0604020202020204" charset="0"/>
+                  </a:rPr>
+                  <a:t>4. Pruebas y Validación</a:t>
+                </a:r>
+              </a:p>
+            </p:txBody>
+          </p:sp>
+          <p:sp>
+            <p:nvSpPr>
+              <p:cNvPr id="84" name="TextBox 30">
+                <a:extLst>
+                  <a:ext uri="{FF2B5EF4-FFF2-40B4-BE49-F238E27FC236}">
+                    <a16:creationId xmlns:a16="http://schemas.microsoft.com/office/drawing/2014/main" id="{11D31574-C470-60C9-E844-E779A789FEA7}"/>
+                  </a:ext>
+                </a:extLst>
+              </p:cNvPr>
+              <p:cNvSpPr txBox="1"/>
+              <p:nvPr/>
+            </p:nvSpPr>
+            <p:spPr>
+              <a:xfrm>
+                <a:off x="10029379" y="7452420"/>
+                <a:ext cx="4476750" cy="304659"/>
+              </a:xfrm>
+              <a:prstGeom prst="rect">
+                <a:avLst/>
+              </a:prstGeom>
+              <a:noFill/>
+            </p:spPr>
+            <p:txBody>
+              <a:bodyPr wrap="square" lIns="0" tIns="0" rIns="0" bIns="0" anchor="t">
+                <a:spAutoFit/>
+              </a:bodyPr>
+              <a:lstStyle/>
+              <a:p>
+                <a:pPr algn="l">
+                  <a:lnSpc>
+                    <a:spcPts val="1522"/>
+                  </a:lnSpc>
+                </a:pPr>
+                <a:r>
+                  <a:rPr lang="es-CL" b="0" i="0" u="none" noProof="0" dirty="0">
+                    <a:solidFill>
+                      <a:srgbClr val="475569"/>
+                    </a:solidFill>
+                    <a:latin typeface="Source Sans 3" panose="020B0604020202020204" charset="0"/>
+                  </a:rPr>
+                  <a:t>Validar el funcionamiento mediante pruebas funcionales y de integración para asegurar el cumplimiento.</a:t>
+                </a:r>
+              </a:p>
+            </p:txBody>
+          </p:sp>
+        </p:grpSp>
+      </p:grpSp>
     </p:spTree>
   </p:cSld>
   <p:clrMapOvr>
@@ -7528,768 +7465,6 @@
           <a:chExt cx="0" cy="0"/>
         </a:xfrm>
       </p:grpSpPr>
-      <p:grpSp>
-        <p:nvGrpSpPr>
-          <p:cNvPr id="31" name="Grupo 30">
-            <a:extLst>
-              <a:ext uri="{FF2B5EF4-FFF2-40B4-BE49-F238E27FC236}">
-                <a16:creationId xmlns:a16="http://schemas.microsoft.com/office/drawing/2014/main" id="{6293FDA1-F0D8-BFC9-5DD4-B87209A2C1E8}"/>
-              </a:ext>
-            </a:extLst>
-          </p:cNvPr>
-          <p:cNvGrpSpPr/>
-          <p:nvPr/>
-        </p:nvGrpSpPr>
-        <p:grpSpPr>
-          <a:xfrm>
-            <a:off x="857250" y="2857500"/>
-            <a:ext cx="7620000" cy="6191250"/>
-            <a:chOff x="857250" y="2143125"/>
-            <a:chExt cx="7620000" cy="6191250"/>
-          </a:xfrm>
-        </p:grpSpPr>
-        <p:grpSp>
-          <p:nvGrpSpPr>
-            <p:cNvPr id="7" name="Group 7"/>
-            <p:cNvGrpSpPr/>
-            <p:nvPr/>
-          </p:nvGrpSpPr>
-          <p:grpSpPr>
-            <a:xfrm>
-              <a:off x="857250" y="2143125"/>
-              <a:ext cx="7620000" cy="6191250"/>
-              <a:chOff x="0" y="0"/>
-              <a:chExt cx="10160000" cy="8255000"/>
-            </a:xfrm>
-          </p:grpSpPr>
-          <p:sp>
-            <p:nvSpPr>
-              <p:cNvPr id="8" name="Freeform 8"/>
-              <p:cNvSpPr/>
-              <p:nvPr/>
-            </p:nvSpPr>
-            <p:spPr>
-              <a:xfrm>
-                <a:off x="0" y="0"/>
-                <a:ext cx="10160000" cy="8255000"/>
-              </a:xfrm>
-              <a:custGeom>
-                <a:avLst/>
-                <a:gdLst/>
-                <a:ahLst/>
-                <a:cxnLst/>
-                <a:rect l="l" t="t" r="r" b="b"/>
-                <a:pathLst>
-                  <a:path w="10160000" h="8255000">
-                    <a:moveTo>
-                      <a:pt x="0" y="0"/>
-                    </a:moveTo>
-                    <a:lnTo>
-                      <a:pt x="10160000" y="0"/>
-                    </a:lnTo>
-                    <a:lnTo>
-                      <a:pt x="10160000" y="8255000"/>
-                    </a:lnTo>
-                    <a:lnTo>
-                      <a:pt x="0" y="8255000"/>
-                    </a:lnTo>
-                    <a:close/>
-                  </a:path>
-                </a:pathLst>
-              </a:custGeom>
-              <a:solidFill>
-                <a:srgbClr val="FFFFFF"/>
-              </a:solidFill>
-              <a:ln cap="sq">
-                <a:noFill/>
-                <a:prstDash val="solid"/>
-                <a:miter/>
-              </a:ln>
-            </p:spPr>
-            <p:txBody>
-              <a:bodyPr/>
-              <a:lstStyle/>
-              <a:p>
-                <a:endParaRPr lang="es-CL" noProof="0" dirty="0"/>
-              </a:p>
-            </p:txBody>
-          </p:sp>
-          <p:sp>
-            <p:nvSpPr>
-              <p:cNvPr id="9" name="TextBox 9"/>
-              <p:cNvSpPr txBox="1"/>
-              <p:nvPr/>
-            </p:nvSpPr>
-            <p:spPr>
-              <a:xfrm>
-                <a:off x="0" y="-38100"/>
-                <a:ext cx="10160000" cy="8293100"/>
-              </a:xfrm>
-              <a:prstGeom prst="rect">
-                <a:avLst/>
-              </a:prstGeom>
-            </p:spPr>
-            <p:txBody>
-              <a:bodyPr lIns="50800" tIns="50800" rIns="50800" bIns="50800" rtlCol="0" anchor="ctr"/>
-              <a:lstStyle/>
-              <a:p>
-                <a:pPr algn="l">
-                  <a:lnSpc>
-                    <a:spcPts val="1679"/>
-                  </a:lnSpc>
-                </a:pPr>
-                <a:endParaRPr lang="es-CL" noProof="0" dirty="0"/>
-              </a:p>
-            </p:txBody>
-          </p:sp>
-        </p:grpSp>
-        <p:grpSp>
-          <p:nvGrpSpPr>
-            <p:cNvPr id="13" name="Group 13"/>
-            <p:cNvGrpSpPr/>
-            <p:nvPr/>
-          </p:nvGrpSpPr>
-          <p:grpSpPr>
-            <a:xfrm>
-              <a:off x="857250" y="2143125"/>
-              <a:ext cx="114300" cy="6191250"/>
-              <a:chOff x="0" y="0"/>
-              <a:chExt cx="152400" cy="8255000"/>
-            </a:xfrm>
-          </p:grpSpPr>
-          <p:sp>
-            <p:nvSpPr>
-              <p:cNvPr id="14" name="Freeform 14"/>
-              <p:cNvSpPr/>
-              <p:nvPr/>
-            </p:nvSpPr>
-            <p:spPr>
-              <a:xfrm>
-                <a:off x="0" y="0"/>
-                <a:ext cx="152400" cy="8255000"/>
-              </a:xfrm>
-              <a:custGeom>
-                <a:avLst/>
-                <a:gdLst/>
-                <a:ahLst/>
-                <a:cxnLst/>
-                <a:rect l="l" t="t" r="r" b="b"/>
-                <a:pathLst>
-                  <a:path w="152400" h="8255000">
-                    <a:moveTo>
-                      <a:pt x="0" y="0"/>
-                    </a:moveTo>
-                    <a:lnTo>
-                      <a:pt x="152400" y="0"/>
-                    </a:lnTo>
-                    <a:lnTo>
-                      <a:pt x="152400" y="8255000"/>
-                    </a:lnTo>
-                    <a:lnTo>
-                      <a:pt x="0" y="8255000"/>
-                    </a:lnTo>
-                    <a:close/>
-                  </a:path>
-                </a:pathLst>
-              </a:custGeom>
-              <a:solidFill>
-                <a:srgbClr val="16B6C8"/>
-              </a:solidFill>
-              <a:ln cap="sq">
-                <a:noFill/>
-                <a:prstDash val="solid"/>
-                <a:miter/>
-              </a:ln>
-            </p:spPr>
-            <p:txBody>
-              <a:bodyPr/>
-              <a:lstStyle/>
-              <a:p>
-                <a:endParaRPr lang="es-CL" noProof="0" dirty="0"/>
-              </a:p>
-            </p:txBody>
-          </p:sp>
-          <p:sp>
-            <p:nvSpPr>
-              <p:cNvPr id="15" name="TextBox 15"/>
-              <p:cNvSpPr txBox="1"/>
-              <p:nvPr/>
-            </p:nvSpPr>
-            <p:spPr>
-              <a:xfrm>
-                <a:off x="0" y="-38100"/>
-                <a:ext cx="152400" cy="8293100"/>
-              </a:xfrm>
-              <a:prstGeom prst="rect">
-                <a:avLst/>
-              </a:prstGeom>
-            </p:spPr>
-            <p:txBody>
-              <a:bodyPr lIns="50800" tIns="50800" rIns="50800" bIns="50800" rtlCol="0" anchor="ctr"/>
-              <a:lstStyle/>
-              <a:p>
-                <a:pPr algn="l">
-                  <a:lnSpc>
-                    <a:spcPts val="1679"/>
-                  </a:lnSpc>
-                </a:pPr>
-                <a:endParaRPr lang="es-CL" noProof="0" dirty="0"/>
-              </a:p>
-            </p:txBody>
-          </p:sp>
-        </p:grpSp>
-        <p:sp>
-          <p:nvSpPr>
-            <p:cNvPr id="19" name="TextBox 19"/>
-            <p:cNvSpPr txBox="1"/>
-            <p:nvPr/>
-          </p:nvSpPr>
-          <p:spPr>
-            <a:xfrm>
-              <a:off x="1381125" y="2457450"/>
-              <a:ext cx="6191250" cy="335280"/>
-            </a:xfrm>
-            <a:prstGeom prst="rect">
-              <a:avLst/>
-            </a:prstGeom>
-          </p:spPr>
-          <p:txBody>
-            <a:bodyPr lIns="0" tIns="0" rIns="0" bIns="0" rtlCol="0" anchor="t">
-              <a:spAutoFit/>
-            </a:bodyPr>
-            <a:lstStyle/>
-            <a:p>
-              <a:pPr algn="l">
-                <a:lnSpc>
-                  <a:spcPts val="2640"/>
-                </a:lnSpc>
-              </a:pPr>
-              <a:r>
-                <a:rPr lang="es-CL" sz="2400" b="1" noProof="0" dirty="0">
-                  <a:solidFill>
-                    <a:srgbClr val="082B4C"/>
-                  </a:solidFill>
-                  <a:latin typeface="Montserrat Bold"/>
-                  <a:ea typeface="Montserrat Bold"/>
-                  <a:cs typeface="Montserrat Bold"/>
-                  <a:sym typeface="Montserrat Bold"/>
-                </a:rPr>
-                <a:t>ALCANCES</a:t>
-              </a:r>
-            </a:p>
-          </p:txBody>
-        </p:sp>
-        <p:sp>
-          <p:nvSpPr>
-            <p:cNvPr id="20" name="TextBox 20"/>
-            <p:cNvSpPr txBox="1"/>
-            <p:nvPr/>
-          </p:nvSpPr>
-          <p:spPr>
-            <a:xfrm>
-              <a:off x="1381125" y="3219450"/>
-              <a:ext cx="6667500" cy="1824038"/>
-            </a:xfrm>
-            <a:prstGeom prst="rect">
-              <a:avLst/>
-            </a:prstGeom>
-          </p:spPr>
-          <p:txBody>
-            <a:bodyPr lIns="0" tIns="0" rIns="0" bIns="0" rtlCol="0" anchor="t">
-              <a:spAutoFit/>
-            </a:bodyPr>
-            <a:lstStyle/>
-            <a:p>
-              <a:pPr algn="l">
-                <a:lnSpc>
-                  <a:spcPts val="2437"/>
-                </a:lnSpc>
-              </a:pPr>
-              <a:r>
-                <a:rPr lang="es-CL" sz="1875" noProof="0" dirty="0">
-                  <a:solidFill>
-                    <a:srgbClr val="082B4C"/>
-                  </a:solidFill>
-                  <a:latin typeface="Source Sans 3"/>
-                  <a:ea typeface="Source Sans 3"/>
-                  <a:cs typeface="Source Sans 3"/>
-                  <a:sym typeface="Source Sans 3"/>
-                </a:rPr>
-                <a:t>• Recepción y procesamiento de información</a:t>
-              </a:r>
-            </a:p>
-            <a:p>
-              <a:pPr algn="l">
-                <a:lnSpc>
-                  <a:spcPts val="2437"/>
-                </a:lnSpc>
-              </a:pPr>
-              <a:r>
-                <a:rPr lang="es-CL" sz="1875" noProof="0" dirty="0">
-                  <a:solidFill>
-                    <a:srgbClr val="082B4C"/>
-                  </a:solidFill>
-                  <a:latin typeface="Source Sans 3"/>
-                  <a:ea typeface="Source Sans 3"/>
-                  <a:cs typeface="Source Sans 3"/>
-                  <a:sym typeface="Source Sans 3"/>
-                </a:rPr>
-                <a:t>• Integración Tesorería y Banco</a:t>
-              </a:r>
-            </a:p>
-            <a:p>
-              <a:pPr algn="l">
-                <a:lnSpc>
-                  <a:spcPts val="2437"/>
-                </a:lnSpc>
-              </a:pPr>
-              <a:r>
-                <a:rPr lang="es-CL" sz="1875" noProof="0" dirty="0">
-                  <a:solidFill>
-                    <a:srgbClr val="082B4C"/>
-                  </a:solidFill>
-                  <a:latin typeface="Source Sans 3"/>
-                  <a:ea typeface="Source Sans 3"/>
-                  <a:cs typeface="Source Sans 3"/>
-                  <a:sym typeface="Source Sans 3"/>
-                </a:rPr>
-                <a:t>• ETL, modelo de datos y almacenamiento</a:t>
-              </a:r>
-            </a:p>
-            <a:p>
-              <a:pPr algn="l">
-                <a:lnSpc>
-                  <a:spcPts val="2437"/>
-                </a:lnSpc>
-              </a:pPr>
-              <a:r>
-                <a:rPr lang="es-CL" sz="1875" noProof="0" dirty="0">
-                  <a:solidFill>
-                    <a:srgbClr val="082B4C"/>
-                  </a:solidFill>
-                  <a:latin typeface="Source Sans 3"/>
-                  <a:ea typeface="Source Sans 3"/>
-                  <a:cs typeface="Source Sans 3"/>
-                  <a:sym typeface="Source Sans 3"/>
-                </a:rPr>
-                <a:t>• Validaciones, reglas y comparación histórica</a:t>
-              </a:r>
-            </a:p>
-            <a:p>
-              <a:pPr algn="l">
-                <a:lnSpc>
-                  <a:spcPts val="2437"/>
-                </a:lnSpc>
-              </a:pPr>
-              <a:r>
-                <a:rPr lang="es-CL" sz="1875" noProof="0" dirty="0">
-                  <a:solidFill>
-                    <a:srgbClr val="082B4C"/>
-                  </a:solidFill>
-                  <a:latin typeface="Source Sans 3"/>
-                  <a:ea typeface="Source Sans 3"/>
-                  <a:cs typeface="Source Sans 3"/>
-                  <a:sym typeface="Source Sans 3"/>
-                </a:rPr>
-                <a:t>• Trazabilidad, </a:t>
-              </a:r>
-              <a:r>
-                <a:rPr lang="es-CL" sz="1875" noProof="0" dirty="0" err="1">
-                  <a:solidFill>
-                    <a:srgbClr val="082B4C"/>
-                  </a:solidFill>
-                  <a:latin typeface="Source Sans 3"/>
-                  <a:ea typeface="Source Sans 3"/>
-                  <a:cs typeface="Source Sans 3"/>
-                  <a:sym typeface="Source Sans 3"/>
-                </a:rPr>
-                <a:t>dashboard</a:t>
-              </a:r>
-              <a:r>
-                <a:rPr lang="es-CL" sz="1875" noProof="0" dirty="0">
-                  <a:solidFill>
-                    <a:srgbClr val="082B4C"/>
-                  </a:solidFill>
-                  <a:latin typeface="Source Sans 3"/>
-                  <a:ea typeface="Source Sans 3"/>
-                  <a:cs typeface="Source Sans 3"/>
-                  <a:sym typeface="Source Sans 3"/>
-                </a:rPr>
-                <a:t> y reportes</a:t>
-              </a:r>
-            </a:p>
-            <a:p>
-              <a:pPr algn="l">
-                <a:lnSpc>
-                  <a:spcPts val="2437"/>
-                </a:lnSpc>
-              </a:pPr>
-              <a:r>
-                <a:rPr lang="es-CL" sz="1875" noProof="0" dirty="0">
-                  <a:solidFill>
-                    <a:srgbClr val="082B4C"/>
-                  </a:solidFill>
-                  <a:latin typeface="Source Sans 3"/>
-                  <a:ea typeface="Source Sans 3"/>
-                  <a:cs typeface="Source Sans 3"/>
-                  <a:sym typeface="Source Sans 3"/>
-                </a:rPr>
-                <a:t>• Análisis IA e integración completa</a:t>
-              </a:r>
-            </a:p>
-          </p:txBody>
-        </p:sp>
-      </p:grpSp>
-      <p:grpSp>
-        <p:nvGrpSpPr>
-          <p:cNvPr id="32" name="Grupo 31">
-            <a:extLst>
-              <a:ext uri="{FF2B5EF4-FFF2-40B4-BE49-F238E27FC236}">
-                <a16:creationId xmlns:a16="http://schemas.microsoft.com/office/drawing/2014/main" id="{87CA7579-5CAC-4F3A-DC71-1BA36BB7B329}"/>
-              </a:ext>
-            </a:extLst>
-          </p:cNvPr>
-          <p:cNvGrpSpPr/>
-          <p:nvPr/>
-        </p:nvGrpSpPr>
-        <p:grpSpPr>
-          <a:xfrm>
-            <a:off x="9429750" y="2857500"/>
-            <a:ext cx="8001000" cy="6191250"/>
-            <a:chOff x="9429750" y="2143125"/>
-            <a:chExt cx="8001000" cy="6191250"/>
-          </a:xfrm>
-        </p:grpSpPr>
-        <p:grpSp>
-          <p:nvGrpSpPr>
-            <p:cNvPr id="10" name="Group 10"/>
-            <p:cNvGrpSpPr/>
-            <p:nvPr/>
-          </p:nvGrpSpPr>
-          <p:grpSpPr>
-            <a:xfrm>
-              <a:off x="9429750" y="2143125"/>
-              <a:ext cx="8001000" cy="6191250"/>
-              <a:chOff x="0" y="0"/>
-              <a:chExt cx="10668000" cy="8255000"/>
-            </a:xfrm>
-          </p:grpSpPr>
-          <p:sp>
-            <p:nvSpPr>
-              <p:cNvPr id="11" name="Freeform 11"/>
-              <p:cNvSpPr/>
-              <p:nvPr/>
-            </p:nvSpPr>
-            <p:spPr>
-              <a:xfrm>
-                <a:off x="0" y="0"/>
-                <a:ext cx="10668000" cy="8255000"/>
-              </a:xfrm>
-              <a:custGeom>
-                <a:avLst/>
-                <a:gdLst/>
-                <a:ahLst/>
-                <a:cxnLst/>
-                <a:rect l="l" t="t" r="r" b="b"/>
-                <a:pathLst>
-                  <a:path w="10668000" h="8255000">
-                    <a:moveTo>
-                      <a:pt x="0" y="0"/>
-                    </a:moveTo>
-                    <a:lnTo>
-                      <a:pt x="10668000" y="0"/>
-                    </a:lnTo>
-                    <a:lnTo>
-                      <a:pt x="10668000" y="8255000"/>
-                    </a:lnTo>
-                    <a:lnTo>
-                      <a:pt x="0" y="8255000"/>
-                    </a:lnTo>
-                    <a:close/>
-                  </a:path>
-                </a:pathLst>
-              </a:custGeom>
-              <a:solidFill>
-                <a:srgbClr val="FFF3E8"/>
-              </a:solidFill>
-              <a:ln cap="sq">
-                <a:noFill/>
-                <a:prstDash val="solid"/>
-                <a:miter/>
-              </a:ln>
-            </p:spPr>
-            <p:txBody>
-              <a:bodyPr/>
-              <a:lstStyle/>
-              <a:p>
-                <a:endParaRPr lang="es-CL" noProof="0" dirty="0"/>
-              </a:p>
-            </p:txBody>
-          </p:sp>
-          <p:sp>
-            <p:nvSpPr>
-              <p:cNvPr id="12" name="TextBox 12"/>
-              <p:cNvSpPr txBox="1"/>
-              <p:nvPr/>
-            </p:nvSpPr>
-            <p:spPr>
-              <a:xfrm>
-                <a:off x="0" y="-38100"/>
-                <a:ext cx="10668000" cy="8293100"/>
-              </a:xfrm>
-              <a:prstGeom prst="rect">
-                <a:avLst/>
-              </a:prstGeom>
-            </p:spPr>
-            <p:txBody>
-              <a:bodyPr lIns="50800" tIns="50800" rIns="50800" bIns="50800" rtlCol="0" anchor="ctr"/>
-              <a:lstStyle/>
-              <a:p>
-                <a:pPr algn="l">
-                  <a:lnSpc>
-                    <a:spcPts val="1679"/>
-                  </a:lnSpc>
-                </a:pPr>
-                <a:endParaRPr lang="es-CL" noProof="0" dirty="0"/>
-              </a:p>
-            </p:txBody>
-          </p:sp>
-        </p:grpSp>
-        <p:grpSp>
-          <p:nvGrpSpPr>
-            <p:cNvPr id="16" name="Group 16"/>
-            <p:cNvGrpSpPr/>
-            <p:nvPr/>
-          </p:nvGrpSpPr>
-          <p:grpSpPr>
-            <a:xfrm>
-              <a:off x="9429750" y="2143125"/>
-              <a:ext cx="114300" cy="6191250"/>
-              <a:chOff x="0" y="0"/>
-              <a:chExt cx="152400" cy="8255000"/>
-            </a:xfrm>
-          </p:grpSpPr>
-          <p:sp>
-            <p:nvSpPr>
-              <p:cNvPr id="17" name="Freeform 17"/>
-              <p:cNvSpPr/>
-              <p:nvPr/>
-            </p:nvSpPr>
-            <p:spPr>
-              <a:xfrm>
-                <a:off x="0" y="0"/>
-                <a:ext cx="152400" cy="8255000"/>
-              </a:xfrm>
-              <a:custGeom>
-                <a:avLst/>
-                <a:gdLst/>
-                <a:ahLst/>
-                <a:cxnLst/>
-                <a:rect l="l" t="t" r="r" b="b"/>
-                <a:pathLst>
-                  <a:path w="152400" h="8255000">
-                    <a:moveTo>
-                      <a:pt x="0" y="0"/>
-                    </a:moveTo>
-                    <a:lnTo>
-                      <a:pt x="152400" y="0"/>
-                    </a:lnTo>
-                    <a:lnTo>
-                      <a:pt x="152400" y="8255000"/>
-                    </a:lnTo>
-                    <a:lnTo>
-                      <a:pt x="0" y="8255000"/>
-                    </a:lnTo>
-                    <a:close/>
-                  </a:path>
-                </a:pathLst>
-              </a:custGeom>
-              <a:solidFill>
-                <a:srgbClr val="F58220"/>
-              </a:solidFill>
-              <a:ln cap="sq">
-                <a:noFill/>
-                <a:prstDash val="solid"/>
-                <a:miter/>
-              </a:ln>
-            </p:spPr>
-            <p:txBody>
-              <a:bodyPr/>
-              <a:lstStyle/>
-              <a:p>
-                <a:endParaRPr lang="es-CL" noProof="0" dirty="0"/>
-              </a:p>
-            </p:txBody>
-          </p:sp>
-          <p:sp>
-            <p:nvSpPr>
-              <p:cNvPr id="18" name="TextBox 18"/>
-              <p:cNvSpPr txBox="1"/>
-              <p:nvPr/>
-            </p:nvSpPr>
-            <p:spPr>
-              <a:xfrm>
-                <a:off x="0" y="-38100"/>
-                <a:ext cx="152400" cy="8293100"/>
-              </a:xfrm>
-              <a:prstGeom prst="rect">
-                <a:avLst/>
-              </a:prstGeom>
-            </p:spPr>
-            <p:txBody>
-              <a:bodyPr lIns="50800" tIns="50800" rIns="50800" bIns="50800" rtlCol="0" anchor="ctr"/>
-              <a:lstStyle/>
-              <a:p>
-                <a:pPr algn="l">
-                  <a:lnSpc>
-                    <a:spcPts val="1679"/>
-                  </a:lnSpc>
-                </a:pPr>
-                <a:endParaRPr lang="es-CL" noProof="0" dirty="0"/>
-              </a:p>
-            </p:txBody>
-          </p:sp>
-        </p:grpSp>
-        <p:sp>
-          <p:nvSpPr>
-            <p:cNvPr id="21" name="TextBox 21"/>
-            <p:cNvSpPr txBox="1"/>
-            <p:nvPr/>
-          </p:nvSpPr>
-          <p:spPr>
-            <a:xfrm>
-              <a:off x="10144125" y="2457450"/>
-              <a:ext cx="6477000" cy="335280"/>
-            </a:xfrm>
-            <a:prstGeom prst="rect">
-              <a:avLst/>
-            </a:prstGeom>
-          </p:spPr>
-          <p:txBody>
-            <a:bodyPr lIns="0" tIns="0" rIns="0" bIns="0" rtlCol="0" anchor="t">
-              <a:spAutoFit/>
-            </a:bodyPr>
-            <a:lstStyle/>
-            <a:p>
-              <a:pPr algn="l">
-                <a:lnSpc>
-                  <a:spcPts val="2640"/>
-                </a:lnSpc>
-              </a:pPr>
-              <a:r>
-                <a:rPr lang="es-CL" sz="2400" b="1" noProof="0" dirty="0">
-                  <a:solidFill>
-                    <a:srgbClr val="082B4C"/>
-                  </a:solidFill>
-                  <a:latin typeface="Montserrat Bold"/>
-                  <a:ea typeface="Montserrat Bold"/>
-                  <a:cs typeface="Montserrat Bold"/>
-                  <a:sym typeface="Montserrat Bold"/>
-                </a:rPr>
-                <a:t>LIMITACIONES / CONSIDERACIONES</a:t>
-              </a:r>
-            </a:p>
-          </p:txBody>
-        </p:sp>
-        <p:sp>
-          <p:nvSpPr>
-            <p:cNvPr id="22" name="TextBox 22"/>
-            <p:cNvSpPr txBox="1"/>
-            <p:nvPr/>
-          </p:nvSpPr>
-          <p:spPr>
-            <a:xfrm>
-              <a:off x="10144125" y="3219450"/>
-              <a:ext cx="6572250" cy="1214438"/>
-            </a:xfrm>
-            <a:prstGeom prst="rect">
-              <a:avLst/>
-            </a:prstGeom>
-          </p:spPr>
-          <p:txBody>
-            <a:bodyPr lIns="0" tIns="0" rIns="0" bIns="0" rtlCol="0" anchor="t">
-              <a:spAutoFit/>
-            </a:bodyPr>
-            <a:lstStyle/>
-            <a:p>
-              <a:pPr algn="l">
-                <a:lnSpc>
-                  <a:spcPts val="2437"/>
-                </a:lnSpc>
-              </a:pPr>
-              <a:r>
-                <a:rPr lang="es-CL" sz="1875" noProof="0" dirty="0">
-                  <a:solidFill>
-                    <a:srgbClr val="082B4C"/>
-                  </a:solidFill>
-                  <a:latin typeface="Source Sans 3"/>
-                  <a:ea typeface="Source Sans 3"/>
-                  <a:cs typeface="Source Sans 3"/>
-                  <a:sym typeface="Source Sans 3"/>
-                </a:rPr>
-                <a:t>• Disponibilidad limitada de datos reales</a:t>
-              </a:r>
-            </a:p>
-            <a:p>
-              <a:pPr algn="l">
-                <a:lnSpc>
-                  <a:spcPts val="2437"/>
-                </a:lnSpc>
-              </a:pPr>
-              <a:r>
-                <a:rPr lang="es-CL" sz="1875" noProof="0" dirty="0">
-                  <a:solidFill>
-                    <a:srgbClr val="082B4C"/>
-                  </a:solidFill>
-                  <a:latin typeface="Source Sans 3"/>
-                  <a:ea typeface="Source Sans 3"/>
-                  <a:cs typeface="Source Sans 3"/>
-                  <a:sym typeface="Source Sans 3"/>
-                </a:rPr>
-                <a:t>• Complejidad técnica de integración</a:t>
-              </a:r>
-            </a:p>
-            <a:p>
-              <a:pPr algn="l">
-                <a:lnSpc>
-                  <a:spcPts val="2437"/>
-                </a:lnSpc>
-              </a:pPr>
-              <a:r>
-                <a:rPr lang="es-CL" sz="1875" noProof="0" dirty="0">
-                  <a:solidFill>
-                    <a:srgbClr val="082B4C"/>
-                  </a:solidFill>
-                  <a:latin typeface="Source Sans 3"/>
-                  <a:ea typeface="Source Sans 3"/>
-                  <a:cs typeface="Source Sans 3"/>
-                  <a:sym typeface="Source Sans 3"/>
-                </a:rPr>
-                <a:t>• Uso inicial de datos de prueba o simulados</a:t>
-              </a:r>
-            </a:p>
-            <a:p>
-              <a:pPr algn="l">
-                <a:lnSpc>
-                  <a:spcPts val="2437"/>
-                </a:lnSpc>
-              </a:pPr>
-              <a:r>
-                <a:rPr lang="es-CL" sz="1875" noProof="0" dirty="0">
-                  <a:solidFill>
-                    <a:srgbClr val="082B4C"/>
-                  </a:solidFill>
-                  <a:latin typeface="Source Sans 3"/>
-                  <a:ea typeface="Source Sans 3"/>
-                  <a:cs typeface="Source Sans 3"/>
-                  <a:sym typeface="Source Sans 3"/>
-                </a:rPr>
-                <a:t>• Desarrollo modular para reducir riesgos</a:t>
-              </a:r>
-            </a:p>
-          </p:txBody>
-        </p:sp>
-      </p:grpSp>
       <p:sp>
         <p:nvSpPr>
           <p:cNvPr id="26" name="TextBox 6">
@@ -8443,7 +7618,7 @@
             <p:nvPr/>
           </p:nvPicPr>
           <p:blipFill>
-            <a:blip r:embed="rId2"/>
+            <a:blip r:embed="rId3"/>
             <a:stretch>
               <a:fillRect/>
             </a:stretch>
@@ -8496,6 +7671,1221 @@
           </p:txBody>
         </p:sp>
       </p:grpSp>
+      <p:pic>
+        <p:nvPicPr>
+          <p:cNvPr id="3" name="Picture 1" descr="image.png">
+            <a:extLst>
+              <a:ext uri="{FF2B5EF4-FFF2-40B4-BE49-F238E27FC236}">
+                <a16:creationId xmlns:a16="http://schemas.microsoft.com/office/drawing/2014/main" id="{8CB8D05A-4CB9-E804-5FC0-1F8A19592FBE}"/>
+              </a:ext>
+            </a:extLst>
+          </p:cNvPr>
+          <p:cNvPicPr>
+            <a:picLocks noChangeAspect="1"/>
+          </p:cNvPicPr>
+          <p:nvPr/>
+        </p:nvPicPr>
+        <p:blipFill>
+          <a:blip r:embed="rId4"/>
+          <a:stretch>
+            <a:fillRect/>
+          </a:stretch>
+        </p:blipFill>
+        <p:spPr>
+          <a:xfrm>
+            <a:off x="1828800" y="3162300"/>
+            <a:ext cx="7010400" cy="6753474"/>
+          </a:xfrm>
+          <a:prstGeom prst="rect">
+            <a:avLst/>
+          </a:prstGeom>
+        </p:spPr>
+      </p:pic>
+      <p:pic>
+        <p:nvPicPr>
+          <p:cNvPr id="5" name="Picture 2" descr="image.png">
+            <a:extLst>
+              <a:ext uri="{FF2B5EF4-FFF2-40B4-BE49-F238E27FC236}">
+                <a16:creationId xmlns:a16="http://schemas.microsoft.com/office/drawing/2014/main" id="{B836B018-07A1-4E0F-8A52-C48F336BA99A}"/>
+              </a:ext>
+            </a:extLst>
+          </p:cNvPr>
+          <p:cNvPicPr>
+            <a:picLocks noChangeAspect="1"/>
+          </p:cNvPicPr>
+          <p:nvPr/>
+        </p:nvPicPr>
+        <p:blipFill>
+          <a:blip r:embed="rId5"/>
+          <a:stretch>
+            <a:fillRect/>
+          </a:stretch>
+        </p:blipFill>
+        <p:spPr>
+          <a:xfrm>
+            <a:off x="9372600" y="3162300"/>
+            <a:ext cx="7010400" cy="6753474"/>
+          </a:xfrm>
+          <a:prstGeom prst="rect">
+            <a:avLst/>
+          </a:prstGeom>
+        </p:spPr>
+      </p:pic>
+      <p:sp>
+        <p:nvSpPr>
+          <p:cNvPr id="23" name="TextBox 6">
+            <a:extLst>
+              <a:ext uri="{FF2B5EF4-FFF2-40B4-BE49-F238E27FC236}">
+                <a16:creationId xmlns:a16="http://schemas.microsoft.com/office/drawing/2014/main" id="{E98B34FF-8B6E-6F71-D7AA-FD014CBA9DF1}"/>
+              </a:ext>
+            </a:extLst>
+          </p:cNvPr>
+          <p:cNvSpPr txBox="1"/>
+          <p:nvPr/>
+        </p:nvSpPr>
+        <p:spPr>
+          <a:xfrm>
+            <a:off x="2446418" y="3465823"/>
+            <a:ext cx="2049382" cy="207749"/>
+          </a:xfrm>
+          <a:prstGeom prst="rect">
+            <a:avLst/>
+          </a:prstGeom>
+          <a:noFill/>
+        </p:spPr>
+        <p:txBody>
+          <a:bodyPr wrap="square" lIns="0" tIns="0" rIns="0" bIns="0" anchor="ctr">
+            <a:spAutoFit/>
+          </a:bodyPr>
+          <a:lstStyle/>
+          <a:p>
+            <a:pPr algn="l"/>
+            <a:r>
+              <a:rPr lang="es-CL" sz="1350" b="0" i="0" u="none" noProof="0" dirty="0">
+                <a:solidFill>
+                  <a:srgbClr val="0369A1"/>
+                </a:solidFill>
+                <a:latin typeface="Montserrat Bold" panose="020B0604020202020204" charset="0"/>
+              </a:rPr>
+              <a:t>Alcances Incluidos</a:t>
+            </a:r>
+          </a:p>
+        </p:txBody>
+      </p:sp>
+      <p:pic>
+        <p:nvPicPr>
+          <p:cNvPr id="25" name="Picture 7" descr="image.png">
+            <a:extLst>
+              <a:ext uri="{FF2B5EF4-FFF2-40B4-BE49-F238E27FC236}">
+                <a16:creationId xmlns:a16="http://schemas.microsoft.com/office/drawing/2014/main" id="{7C370B0C-6AA4-8689-E077-63A748ECCA67}"/>
+              </a:ext>
+            </a:extLst>
+          </p:cNvPr>
+          <p:cNvPicPr>
+            <a:picLocks noChangeAspect="1"/>
+          </p:cNvPicPr>
+          <p:nvPr/>
+        </p:nvPicPr>
+        <p:blipFill>
+          <a:blip r:embed="rId6"/>
+          <a:stretch>
+            <a:fillRect/>
+          </a:stretch>
+        </p:blipFill>
+        <p:spPr>
+          <a:xfrm>
+            <a:off x="7113280" y="3433762"/>
+            <a:ext cx="1421120" cy="269160"/>
+          </a:xfrm>
+          <a:prstGeom prst="rect">
+            <a:avLst/>
+          </a:prstGeom>
+        </p:spPr>
+      </p:pic>
+      <p:sp>
+        <p:nvSpPr>
+          <p:cNvPr id="34" name="TextBox 8">
+            <a:extLst>
+              <a:ext uri="{FF2B5EF4-FFF2-40B4-BE49-F238E27FC236}">
+                <a16:creationId xmlns:a16="http://schemas.microsoft.com/office/drawing/2014/main" id="{E04E07D8-FB29-7270-BA7C-5C8118B1F15A}"/>
+              </a:ext>
+            </a:extLst>
+          </p:cNvPr>
+          <p:cNvSpPr txBox="1"/>
+          <p:nvPr/>
+        </p:nvSpPr>
+        <p:spPr>
+          <a:xfrm>
+            <a:off x="10003448" y="3465823"/>
+            <a:ext cx="3483952" cy="207749"/>
+          </a:xfrm>
+          <a:prstGeom prst="rect">
+            <a:avLst/>
+          </a:prstGeom>
+          <a:noFill/>
+        </p:spPr>
+        <p:txBody>
+          <a:bodyPr wrap="square" lIns="0" tIns="0" rIns="0" bIns="0" anchor="ctr">
+            <a:spAutoFit/>
+          </a:bodyPr>
+          <a:lstStyle/>
+          <a:p>
+            <a:pPr algn="l"/>
+            <a:r>
+              <a:rPr lang="es-CL" sz="1350" b="0" i="0" u="none" noProof="0" dirty="0">
+                <a:solidFill>
+                  <a:srgbClr val="B45309"/>
+                </a:solidFill>
+                <a:latin typeface="Montserrat Bold" panose="020B0604020202020204" charset="0"/>
+              </a:rPr>
+              <a:t>Limitaciones / Consideraciones</a:t>
+            </a:r>
+          </a:p>
+        </p:txBody>
+      </p:sp>
+      <p:pic>
+        <p:nvPicPr>
+          <p:cNvPr id="36" name="Picture 9" descr="image.png">
+            <a:extLst>
+              <a:ext uri="{FF2B5EF4-FFF2-40B4-BE49-F238E27FC236}">
+                <a16:creationId xmlns:a16="http://schemas.microsoft.com/office/drawing/2014/main" id="{4D516C7D-931F-D300-C3CE-8E0624497D8C}"/>
+              </a:ext>
+            </a:extLst>
+          </p:cNvPr>
+          <p:cNvPicPr>
+            <a:picLocks noChangeAspect="1"/>
+          </p:cNvPicPr>
+          <p:nvPr/>
+        </p:nvPicPr>
+        <p:blipFill>
+          <a:blip r:embed="rId7"/>
+          <a:stretch>
+            <a:fillRect/>
+          </a:stretch>
+        </p:blipFill>
+        <p:spPr>
+          <a:xfrm>
+            <a:off x="14564748" y="3433762"/>
+            <a:ext cx="1513452" cy="269160"/>
+          </a:xfrm>
+          <a:prstGeom prst="rect">
+            <a:avLst/>
+          </a:prstGeom>
+        </p:spPr>
+      </p:pic>
+      <p:pic>
+        <p:nvPicPr>
+          <p:cNvPr id="38" name="Picture 10" descr="image.png">
+            <a:extLst>
+              <a:ext uri="{FF2B5EF4-FFF2-40B4-BE49-F238E27FC236}">
+                <a16:creationId xmlns:a16="http://schemas.microsoft.com/office/drawing/2014/main" id="{E98B0E63-F104-5DC4-9760-35FB9EE2825A}"/>
+              </a:ext>
+            </a:extLst>
+          </p:cNvPr>
+          <p:cNvPicPr>
+            <a:picLocks noChangeAspect="1"/>
+          </p:cNvPicPr>
+          <p:nvPr/>
+        </p:nvPicPr>
+        <p:blipFill>
+          <a:blip r:embed="rId8"/>
+          <a:stretch>
+            <a:fillRect/>
+          </a:stretch>
+        </p:blipFill>
+        <p:spPr>
+          <a:xfrm>
+            <a:off x="2106942" y="3452812"/>
+            <a:ext cx="215824" cy="220222"/>
+          </a:xfrm>
+          <a:prstGeom prst="rect">
+            <a:avLst/>
+          </a:prstGeom>
+        </p:spPr>
+      </p:pic>
+      <p:pic>
+        <p:nvPicPr>
+          <p:cNvPr id="40" name="Picture 11" descr="image.png">
+            <a:extLst>
+              <a:ext uri="{FF2B5EF4-FFF2-40B4-BE49-F238E27FC236}">
+                <a16:creationId xmlns:a16="http://schemas.microsoft.com/office/drawing/2014/main" id="{86B3D5C0-6C5F-7C98-7696-A53BFE3A5FA6}"/>
+              </a:ext>
+            </a:extLst>
+          </p:cNvPr>
+          <p:cNvPicPr>
+            <a:picLocks noChangeAspect="1"/>
+          </p:cNvPicPr>
+          <p:nvPr/>
+        </p:nvPicPr>
+        <p:blipFill>
+          <a:blip r:embed="rId9"/>
+          <a:stretch>
+            <a:fillRect/>
+          </a:stretch>
+        </p:blipFill>
+        <p:spPr>
+          <a:xfrm>
+            <a:off x="2286000" y="4346525"/>
+            <a:ext cx="415975" cy="415975"/>
+          </a:xfrm>
+          <a:prstGeom prst="rect">
+            <a:avLst/>
+          </a:prstGeom>
+        </p:spPr>
+      </p:pic>
+      <p:sp>
+        <p:nvSpPr>
+          <p:cNvPr id="42" name="TextBox 12">
+            <a:extLst>
+              <a:ext uri="{FF2B5EF4-FFF2-40B4-BE49-F238E27FC236}">
+                <a16:creationId xmlns:a16="http://schemas.microsoft.com/office/drawing/2014/main" id="{3D044E62-BDF1-C6E2-278B-FE218A01BC21}"/>
+              </a:ext>
+            </a:extLst>
+          </p:cNvPr>
+          <p:cNvSpPr txBox="1"/>
+          <p:nvPr/>
+        </p:nvSpPr>
+        <p:spPr>
+          <a:xfrm>
+            <a:off x="2892027" y="4360813"/>
+            <a:ext cx="5130147" cy="492443"/>
+          </a:xfrm>
+          <a:prstGeom prst="rect">
+            <a:avLst/>
+          </a:prstGeom>
+          <a:noFill/>
+        </p:spPr>
+        <p:txBody>
+          <a:bodyPr wrap="square" lIns="0" tIns="0" rIns="0" bIns="0" anchor="t">
+            <a:spAutoFit/>
+          </a:bodyPr>
+          <a:lstStyle/>
+          <a:p>
+            <a:pPr algn="l"/>
+            <a:r>
+              <a:rPr lang="es-CL" sz="1600" b="1" i="0" u="none" noProof="0" dirty="0">
+                <a:solidFill>
+                  <a:srgbClr val="1E293B"/>
+                </a:solidFill>
+                <a:latin typeface="Source Sans 3" panose="020B0604020202020204" charset="0"/>
+              </a:rPr>
+              <a:t>Recepción y Procesamiento</a:t>
+            </a:r>
+            <a:r>
+              <a:rPr lang="es-CL" sz="1600" b="0" i="0" u="none" noProof="0" dirty="0">
+                <a:solidFill>
+                  <a:srgbClr val="334155"/>
+                </a:solidFill>
+                <a:latin typeface="Source Sans 3" panose="020B0604020202020204" charset="0"/>
+              </a:rPr>
+              <a:t> </a:t>
+            </a:r>
+            <a:r>
+              <a:rPr lang="es-CL" sz="1600" b="0" i="0" u="none" noProof="0" dirty="0">
+                <a:solidFill>
+                  <a:srgbClr val="64748B"/>
+                </a:solidFill>
+                <a:latin typeface="Source Sans 3" panose="020B0604020202020204" charset="0"/>
+              </a:rPr>
+              <a:t>Ingreso y lectura estructurada de la información</a:t>
+            </a:r>
+          </a:p>
+        </p:txBody>
+      </p:sp>
+      <p:pic>
+        <p:nvPicPr>
+          <p:cNvPr id="44" name="Picture 13" descr="image.png">
+            <a:extLst>
+              <a:ext uri="{FF2B5EF4-FFF2-40B4-BE49-F238E27FC236}">
+                <a16:creationId xmlns:a16="http://schemas.microsoft.com/office/drawing/2014/main" id="{27A16969-457F-47B3-6EF3-7295642F0FF2}"/>
+              </a:ext>
+            </a:extLst>
+          </p:cNvPr>
+          <p:cNvPicPr>
+            <a:picLocks noChangeAspect="1"/>
+          </p:cNvPicPr>
+          <p:nvPr/>
+        </p:nvPicPr>
+        <p:blipFill>
+          <a:blip r:embed="rId10"/>
+          <a:stretch>
+            <a:fillRect/>
+          </a:stretch>
+        </p:blipFill>
+        <p:spPr>
+          <a:xfrm>
+            <a:off x="2311001" y="5243232"/>
+            <a:ext cx="415975" cy="415975"/>
+          </a:xfrm>
+          <a:prstGeom prst="rect">
+            <a:avLst/>
+          </a:prstGeom>
+        </p:spPr>
+      </p:pic>
+      <p:sp>
+        <p:nvSpPr>
+          <p:cNvPr id="46" name="TextBox 14">
+            <a:extLst>
+              <a:ext uri="{FF2B5EF4-FFF2-40B4-BE49-F238E27FC236}">
+                <a16:creationId xmlns:a16="http://schemas.microsoft.com/office/drawing/2014/main" id="{11D73FBA-F557-9140-6B5A-ACEC88E195F2}"/>
+              </a:ext>
+            </a:extLst>
+          </p:cNvPr>
+          <p:cNvSpPr txBox="1"/>
+          <p:nvPr/>
+        </p:nvSpPr>
+        <p:spPr>
+          <a:xfrm>
+            <a:off x="2892027" y="5257520"/>
+            <a:ext cx="5130147" cy="492443"/>
+          </a:xfrm>
+          <a:prstGeom prst="rect">
+            <a:avLst/>
+          </a:prstGeom>
+          <a:noFill/>
+        </p:spPr>
+        <p:txBody>
+          <a:bodyPr wrap="square" lIns="0" tIns="0" rIns="0" bIns="0" anchor="t">
+            <a:spAutoFit/>
+          </a:bodyPr>
+          <a:lstStyle/>
+          <a:p>
+            <a:pPr algn="l"/>
+            <a:r>
+              <a:rPr lang="es-CL" sz="1600" b="1" i="0" u="none" noProof="0" dirty="0">
+                <a:solidFill>
+                  <a:srgbClr val="1E293B"/>
+                </a:solidFill>
+                <a:latin typeface="Source Sans 3" panose="020B0604020202020204" charset="0"/>
+              </a:rPr>
+              <a:t>Integración Tesorería - Banco</a:t>
+            </a:r>
+            <a:r>
+              <a:rPr lang="es-CL" sz="1600" b="0" i="0" u="none" noProof="0" dirty="0">
+                <a:solidFill>
+                  <a:srgbClr val="334155"/>
+                </a:solidFill>
+                <a:latin typeface="Source Sans 3" panose="020B0604020202020204" charset="0"/>
+              </a:rPr>
+              <a:t> </a:t>
+            </a:r>
+            <a:r>
+              <a:rPr lang="es-CL" sz="1600" b="0" i="0" u="none" noProof="0" dirty="0">
+                <a:solidFill>
+                  <a:srgbClr val="64748B"/>
+                </a:solidFill>
+                <a:latin typeface="Source Sans 3" panose="020B0604020202020204" charset="0"/>
+              </a:rPr>
+              <a:t>Conexión directa entre bases de datos TGR y Banco</a:t>
+            </a:r>
+          </a:p>
+        </p:txBody>
+      </p:sp>
+      <p:pic>
+        <p:nvPicPr>
+          <p:cNvPr id="48" name="Picture 15" descr="image.png">
+            <a:extLst>
+              <a:ext uri="{FF2B5EF4-FFF2-40B4-BE49-F238E27FC236}">
+                <a16:creationId xmlns:a16="http://schemas.microsoft.com/office/drawing/2014/main" id="{3F31C2C8-E4FA-17F3-3088-EAE0A3B713BB}"/>
+              </a:ext>
+            </a:extLst>
+          </p:cNvPr>
+          <p:cNvPicPr>
+            <a:picLocks noChangeAspect="1"/>
+          </p:cNvPicPr>
+          <p:nvPr/>
+        </p:nvPicPr>
+        <p:blipFill>
+          <a:blip r:embed="rId11"/>
+          <a:stretch>
+            <a:fillRect/>
+          </a:stretch>
+        </p:blipFill>
+        <p:spPr>
+          <a:xfrm>
+            <a:off x="2284271" y="6134100"/>
+            <a:ext cx="415975" cy="415975"/>
+          </a:xfrm>
+          <a:prstGeom prst="rect">
+            <a:avLst/>
+          </a:prstGeom>
+        </p:spPr>
+      </p:pic>
+      <p:sp>
+        <p:nvSpPr>
+          <p:cNvPr id="50" name="TextBox 16">
+            <a:extLst>
+              <a:ext uri="{FF2B5EF4-FFF2-40B4-BE49-F238E27FC236}">
+                <a16:creationId xmlns:a16="http://schemas.microsoft.com/office/drawing/2014/main" id="{8D73804A-A2E9-B869-D3F1-03F2A8E9641C}"/>
+              </a:ext>
+            </a:extLst>
+          </p:cNvPr>
+          <p:cNvSpPr txBox="1"/>
+          <p:nvPr/>
+        </p:nvSpPr>
+        <p:spPr>
+          <a:xfrm>
+            <a:off x="2922330" y="6148388"/>
+            <a:ext cx="5130147" cy="492443"/>
+          </a:xfrm>
+          <a:prstGeom prst="rect">
+            <a:avLst/>
+          </a:prstGeom>
+          <a:noFill/>
+        </p:spPr>
+        <p:txBody>
+          <a:bodyPr wrap="square" lIns="0" tIns="0" rIns="0" bIns="0" anchor="t">
+            <a:spAutoFit/>
+          </a:bodyPr>
+          <a:lstStyle/>
+          <a:p>
+            <a:pPr algn="l"/>
+            <a:r>
+              <a:rPr lang="es-CL" sz="1600" b="1" i="0" u="none" noProof="0" dirty="0">
+                <a:solidFill>
+                  <a:srgbClr val="1E293B"/>
+                </a:solidFill>
+                <a:latin typeface="Source Sans 3" panose="020B0604020202020204" charset="0"/>
+              </a:rPr>
+              <a:t>ETL y Modelo de Datos</a:t>
+            </a:r>
+            <a:r>
+              <a:rPr lang="es-CL" sz="1600" b="0" i="0" u="none" noProof="0" dirty="0">
+                <a:solidFill>
+                  <a:srgbClr val="334155"/>
+                </a:solidFill>
+                <a:latin typeface="Source Sans 3" panose="020B0604020202020204" charset="0"/>
+              </a:rPr>
+              <a:t> </a:t>
+            </a:r>
+            <a:r>
+              <a:rPr lang="es-CL" sz="1600" b="0" i="0" u="none" noProof="0" dirty="0">
+                <a:solidFill>
+                  <a:srgbClr val="64748B"/>
+                </a:solidFill>
+                <a:latin typeface="Source Sans 3" panose="020B0604020202020204" charset="0"/>
+              </a:rPr>
+              <a:t>Transformación, carga y almacenamiento optimizado</a:t>
+            </a:r>
+          </a:p>
+        </p:txBody>
+      </p:sp>
+      <p:pic>
+        <p:nvPicPr>
+          <p:cNvPr id="52" name="Picture 17" descr="image.png">
+            <a:extLst>
+              <a:ext uri="{FF2B5EF4-FFF2-40B4-BE49-F238E27FC236}">
+                <a16:creationId xmlns:a16="http://schemas.microsoft.com/office/drawing/2014/main" id="{D65D190B-901E-FE90-60CC-6EA7EB6EEA91}"/>
+              </a:ext>
+            </a:extLst>
+          </p:cNvPr>
+          <p:cNvPicPr>
+            <a:picLocks noChangeAspect="1"/>
+          </p:cNvPicPr>
+          <p:nvPr/>
+        </p:nvPicPr>
+        <p:blipFill>
+          <a:blip r:embed="rId12"/>
+          <a:stretch>
+            <a:fillRect/>
+          </a:stretch>
+        </p:blipFill>
+        <p:spPr>
+          <a:xfrm>
+            <a:off x="2314574" y="6975503"/>
+            <a:ext cx="415975" cy="415975"/>
+          </a:xfrm>
+          <a:prstGeom prst="rect">
+            <a:avLst/>
+          </a:prstGeom>
+        </p:spPr>
+      </p:pic>
+      <p:sp>
+        <p:nvSpPr>
+          <p:cNvPr id="54" name="TextBox 18">
+            <a:extLst>
+              <a:ext uri="{FF2B5EF4-FFF2-40B4-BE49-F238E27FC236}">
+                <a16:creationId xmlns:a16="http://schemas.microsoft.com/office/drawing/2014/main" id="{023072AC-91D2-1891-230B-F2E1B7414769}"/>
+              </a:ext>
+            </a:extLst>
+          </p:cNvPr>
+          <p:cNvSpPr txBox="1"/>
+          <p:nvPr/>
+        </p:nvSpPr>
+        <p:spPr>
+          <a:xfrm>
+            <a:off x="2942277" y="6989791"/>
+            <a:ext cx="5081209" cy="492443"/>
+          </a:xfrm>
+          <a:prstGeom prst="rect">
+            <a:avLst/>
+          </a:prstGeom>
+          <a:noFill/>
+        </p:spPr>
+        <p:txBody>
+          <a:bodyPr wrap="square" lIns="0" tIns="0" rIns="0" bIns="0" anchor="t">
+            <a:spAutoFit/>
+          </a:bodyPr>
+          <a:lstStyle/>
+          <a:p>
+            <a:pPr algn="l"/>
+            <a:r>
+              <a:rPr lang="es-CL" sz="1600" b="1" i="0" u="none" noProof="0" dirty="0">
+                <a:solidFill>
+                  <a:srgbClr val="1E293B"/>
+                </a:solidFill>
+                <a:latin typeface="Source Sans 3" panose="020B0604020202020204" charset="0"/>
+              </a:rPr>
+              <a:t>Validaciones y Análisis Histórico</a:t>
+            </a:r>
+            <a:r>
+              <a:rPr lang="es-CL" sz="1600" b="0" i="0" u="none" noProof="0" dirty="0">
+                <a:solidFill>
+                  <a:srgbClr val="334155"/>
+                </a:solidFill>
+                <a:latin typeface="Source Sans 3" panose="020B0604020202020204" charset="0"/>
+              </a:rPr>
+              <a:t> </a:t>
+            </a:r>
+            <a:r>
+              <a:rPr lang="es-CL" sz="1600" b="0" i="0" u="none" noProof="0" dirty="0">
+                <a:solidFill>
+                  <a:srgbClr val="64748B"/>
+                </a:solidFill>
+                <a:latin typeface="Source Sans 3" panose="020B0604020202020204" charset="0"/>
+              </a:rPr>
+              <a:t>Aplicación de reglas de negocio y comparativa</a:t>
+            </a:r>
+          </a:p>
+        </p:txBody>
+      </p:sp>
+      <p:pic>
+        <p:nvPicPr>
+          <p:cNvPr id="56" name="Picture 19" descr="image.png">
+            <a:extLst>
+              <a:ext uri="{FF2B5EF4-FFF2-40B4-BE49-F238E27FC236}">
+                <a16:creationId xmlns:a16="http://schemas.microsoft.com/office/drawing/2014/main" id="{35AFB2A1-A62A-3AD1-BE82-3E990E433DC2}"/>
+              </a:ext>
+            </a:extLst>
+          </p:cNvPr>
+          <p:cNvPicPr>
+            <a:picLocks noChangeAspect="1"/>
+          </p:cNvPicPr>
+          <p:nvPr/>
+        </p:nvPicPr>
+        <p:blipFill>
+          <a:blip r:embed="rId13"/>
+          <a:stretch>
+            <a:fillRect/>
+          </a:stretch>
+        </p:blipFill>
+        <p:spPr>
+          <a:xfrm>
+            <a:off x="2286000" y="7886700"/>
+            <a:ext cx="415975" cy="415975"/>
+          </a:xfrm>
+          <a:prstGeom prst="rect">
+            <a:avLst/>
+          </a:prstGeom>
+        </p:spPr>
+      </p:pic>
+      <p:sp>
+        <p:nvSpPr>
+          <p:cNvPr id="58" name="TextBox 20">
+            <a:extLst>
+              <a:ext uri="{FF2B5EF4-FFF2-40B4-BE49-F238E27FC236}">
+                <a16:creationId xmlns:a16="http://schemas.microsoft.com/office/drawing/2014/main" id="{B7D4225A-931F-81A4-89C7-463357C65415}"/>
+              </a:ext>
+            </a:extLst>
+          </p:cNvPr>
+          <p:cNvSpPr txBox="1"/>
+          <p:nvPr/>
+        </p:nvSpPr>
+        <p:spPr>
+          <a:xfrm>
+            <a:off x="2940965" y="7900988"/>
+            <a:ext cx="5081209" cy="492443"/>
+          </a:xfrm>
+          <a:prstGeom prst="rect">
+            <a:avLst/>
+          </a:prstGeom>
+          <a:noFill/>
+        </p:spPr>
+        <p:txBody>
+          <a:bodyPr wrap="square" lIns="0" tIns="0" rIns="0" bIns="0" anchor="t">
+            <a:spAutoFit/>
+          </a:bodyPr>
+          <a:lstStyle/>
+          <a:p>
+            <a:pPr algn="l"/>
+            <a:r>
+              <a:rPr lang="es-CL" sz="1600" b="1" i="0" u="none" noProof="0" dirty="0">
+                <a:solidFill>
+                  <a:srgbClr val="1E293B"/>
+                </a:solidFill>
+                <a:latin typeface="Source Sans 3" panose="020B0604020202020204" charset="0"/>
+              </a:rPr>
+              <a:t>Trazabilidad y </a:t>
+            </a:r>
+            <a:r>
+              <a:rPr lang="es-CL" sz="1600" b="1" i="0" u="none" noProof="0" dirty="0" err="1">
+                <a:solidFill>
+                  <a:srgbClr val="1E293B"/>
+                </a:solidFill>
+                <a:latin typeface="Source Sans 3" panose="020B0604020202020204" charset="0"/>
+              </a:rPr>
+              <a:t>Dashboards</a:t>
+            </a:r>
+            <a:r>
+              <a:rPr lang="es-CL" sz="1600" b="0" i="0" u="none" noProof="0" dirty="0">
+                <a:solidFill>
+                  <a:srgbClr val="334155"/>
+                </a:solidFill>
+                <a:latin typeface="Source Sans 3" panose="020B0604020202020204" charset="0"/>
+              </a:rPr>
+              <a:t> </a:t>
+            </a:r>
+            <a:r>
+              <a:rPr lang="es-CL" sz="1600" b="0" i="0" u="none" noProof="0" dirty="0">
+                <a:solidFill>
+                  <a:srgbClr val="64748B"/>
+                </a:solidFill>
+                <a:latin typeface="Source Sans 3" panose="020B0604020202020204" charset="0"/>
+              </a:rPr>
+              <a:t>Generación de reportes y seguimiento continuo</a:t>
+            </a:r>
+          </a:p>
+        </p:txBody>
+      </p:sp>
+      <p:pic>
+        <p:nvPicPr>
+          <p:cNvPr id="60" name="Picture 21" descr="image.png">
+            <a:extLst>
+              <a:ext uri="{FF2B5EF4-FFF2-40B4-BE49-F238E27FC236}">
+                <a16:creationId xmlns:a16="http://schemas.microsoft.com/office/drawing/2014/main" id="{307D9E54-2FED-618D-225F-E64D9CC4FD0F}"/>
+              </a:ext>
+            </a:extLst>
+          </p:cNvPr>
+          <p:cNvPicPr>
+            <a:picLocks noChangeAspect="1"/>
+          </p:cNvPicPr>
+          <p:nvPr/>
+        </p:nvPicPr>
+        <p:blipFill>
+          <a:blip r:embed="rId14"/>
+          <a:stretch>
+            <a:fillRect/>
+          </a:stretch>
+        </p:blipFill>
+        <p:spPr>
+          <a:xfrm>
+            <a:off x="2314574" y="8766125"/>
+            <a:ext cx="415975" cy="415975"/>
+          </a:xfrm>
+          <a:prstGeom prst="rect">
+            <a:avLst/>
+          </a:prstGeom>
+        </p:spPr>
+      </p:pic>
+      <p:sp>
+        <p:nvSpPr>
+          <p:cNvPr id="62" name="TextBox 22">
+            <a:extLst>
+              <a:ext uri="{FF2B5EF4-FFF2-40B4-BE49-F238E27FC236}">
+                <a16:creationId xmlns:a16="http://schemas.microsoft.com/office/drawing/2014/main" id="{0CE58DBC-501E-1971-7FAA-B65AAA7D038A}"/>
+              </a:ext>
+            </a:extLst>
+          </p:cNvPr>
+          <p:cNvSpPr txBox="1"/>
+          <p:nvPr/>
+        </p:nvSpPr>
+        <p:spPr>
+          <a:xfrm>
+            <a:off x="2966747" y="8780413"/>
+            <a:ext cx="5055427" cy="492443"/>
+          </a:xfrm>
+          <a:prstGeom prst="rect">
+            <a:avLst/>
+          </a:prstGeom>
+          <a:noFill/>
+        </p:spPr>
+        <p:txBody>
+          <a:bodyPr wrap="square" lIns="0" tIns="0" rIns="0" bIns="0" anchor="t">
+            <a:spAutoFit/>
+          </a:bodyPr>
+          <a:lstStyle/>
+          <a:p>
+            <a:pPr algn="l"/>
+            <a:r>
+              <a:rPr lang="es-CL" sz="1600" b="1" i="0" u="none" noProof="0" dirty="0">
+                <a:solidFill>
+                  <a:srgbClr val="1E293B"/>
+                </a:solidFill>
+                <a:latin typeface="Source Sans 3" panose="020B0604020202020204" charset="0"/>
+              </a:rPr>
+              <a:t>Análisis IA e Integración Completa</a:t>
+            </a:r>
+            <a:r>
+              <a:rPr lang="es-CL" sz="1600" b="0" i="0" u="none" noProof="0" dirty="0">
+                <a:solidFill>
+                  <a:srgbClr val="334155"/>
+                </a:solidFill>
+                <a:latin typeface="Source Sans 3" panose="020B0604020202020204" charset="0"/>
+              </a:rPr>
+              <a:t> </a:t>
+            </a:r>
+            <a:r>
+              <a:rPr lang="es-CL" sz="1600" b="0" i="0" u="none" noProof="0" dirty="0">
+                <a:solidFill>
+                  <a:srgbClr val="64748B"/>
+                </a:solidFill>
+                <a:latin typeface="Source Sans 3" panose="020B0604020202020204" charset="0"/>
+              </a:rPr>
+              <a:t>Analítica avanzada para la toma de decisiones</a:t>
+            </a:r>
+          </a:p>
+        </p:txBody>
+      </p:sp>
+      <p:pic>
+        <p:nvPicPr>
+          <p:cNvPr id="64" name="Picture 23" descr="image.png">
+            <a:extLst>
+              <a:ext uri="{FF2B5EF4-FFF2-40B4-BE49-F238E27FC236}">
+                <a16:creationId xmlns:a16="http://schemas.microsoft.com/office/drawing/2014/main" id="{DA68EB5D-8269-5993-22E9-49955C92D20D}"/>
+              </a:ext>
+            </a:extLst>
+          </p:cNvPr>
+          <p:cNvPicPr>
+            <a:picLocks noChangeAspect="1"/>
+          </p:cNvPicPr>
+          <p:nvPr/>
+        </p:nvPicPr>
+        <p:blipFill>
+          <a:blip r:embed="rId15"/>
+          <a:stretch>
+            <a:fillRect/>
+          </a:stretch>
+        </p:blipFill>
+        <p:spPr>
+          <a:xfrm>
+            <a:off x="9677400" y="3452812"/>
+            <a:ext cx="215824" cy="220222"/>
+          </a:xfrm>
+          <a:prstGeom prst="rect">
+            <a:avLst/>
+          </a:prstGeom>
+        </p:spPr>
+      </p:pic>
+      <p:pic>
+        <p:nvPicPr>
+          <p:cNvPr id="66" name="Picture 24" descr="image.png">
+            <a:extLst>
+              <a:ext uri="{FF2B5EF4-FFF2-40B4-BE49-F238E27FC236}">
+                <a16:creationId xmlns:a16="http://schemas.microsoft.com/office/drawing/2014/main" id="{3005A96B-712A-B2F8-BD34-B24E894CEF92}"/>
+              </a:ext>
+            </a:extLst>
+          </p:cNvPr>
+          <p:cNvPicPr>
+            <a:picLocks noChangeAspect="1"/>
+          </p:cNvPicPr>
+          <p:nvPr/>
+        </p:nvPicPr>
+        <p:blipFill>
+          <a:blip r:embed="rId16"/>
+          <a:stretch>
+            <a:fillRect/>
+          </a:stretch>
+        </p:blipFill>
+        <p:spPr>
+          <a:xfrm>
+            <a:off x="9836894" y="4337458"/>
+            <a:ext cx="415975" cy="415975"/>
+          </a:xfrm>
+          <a:prstGeom prst="rect">
+            <a:avLst/>
+          </a:prstGeom>
+        </p:spPr>
+      </p:pic>
+      <p:sp>
+        <p:nvSpPr>
+          <p:cNvPr id="68" name="TextBox 25">
+            <a:extLst>
+              <a:ext uri="{FF2B5EF4-FFF2-40B4-BE49-F238E27FC236}">
+                <a16:creationId xmlns:a16="http://schemas.microsoft.com/office/drawing/2014/main" id="{D3961CFD-6164-C9AB-146B-C5AB0B5F8D4B}"/>
+              </a:ext>
+            </a:extLst>
+          </p:cNvPr>
+          <p:cNvSpPr txBox="1"/>
+          <p:nvPr/>
+        </p:nvSpPr>
+        <p:spPr>
+          <a:xfrm>
+            <a:off x="10387502" y="4383229"/>
+            <a:ext cx="5385898" cy="492443"/>
+          </a:xfrm>
+          <a:prstGeom prst="rect">
+            <a:avLst/>
+          </a:prstGeom>
+          <a:noFill/>
+        </p:spPr>
+        <p:txBody>
+          <a:bodyPr wrap="square" lIns="0" tIns="0" rIns="0" bIns="0" anchor="t">
+            <a:spAutoFit/>
+          </a:bodyPr>
+          <a:lstStyle/>
+          <a:p>
+            <a:pPr algn="l"/>
+            <a:r>
+              <a:rPr lang="es-CL" sz="1600" b="1" i="0" u="none" noProof="0" dirty="0">
+                <a:solidFill>
+                  <a:srgbClr val="1E293B"/>
+                </a:solidFill>
+                <a:latin typeface="Source Sans 3" panose="020B0604020202020204" charset="0"/>
+              </a:rPr>
+              <a:t>Disponibilidad Limitada de Datos Reales</a:t>
+            </a:r>
+            <a:r>
+              <a:rPr lang="es-CL" sz="1600" b="0" i="0" u="none" noProof="0" dirty="0">
+                <a:solidFill>
+                  <a:srgbClr val="334155"/>
+                </a:solidFill>
+                <a:latin typeface="Source Sans 3" panose="020B0604020202020204" charset="0"/>
+              </a:rPr>
+              <a:t> </a:t>
+            </a:r>
+            <a:r>
+              <a:rPr lang="es-CL" sz="1600" b="0" i="0" u="none" noProof="0" dirty="0">
+                <a:solidFill>
+                  <a:srgbClr val="64748B"/>
+                </a:solidFill>
+                <a:latin typeface="Source Sans 3" panose="020B0604020202020204" charset="0"/>
+              </a:rPr>
+              <a:t>Restricciones temporales de acceso a entornos productivos</a:t>
+            </a:r>
+          </a:p>
+        </p:txBody>
+      </p:sp>
+      <p:pic>
+        <p:nvPicPr>
+          <p:cNvPr id="70" name="Picture 26" descr="image.png">
+            <a:extLst>
+              <a:ext uri="{FF2B5EF4-FFF2-40B4-BE49-F238E27FC236}">
+                <a16:creationId xmlns:a16="http://schemas.microsoft.com/office/drawing/2014/main" id="{C16D3CA8-5D86-099F-2FFD-2B960401EEFC}"/>
+              </a:ext>
+            </a:extLst>
+          </p:cNvPr>
+          <p:cNvPicPr>
+            <a:picLocks noChangeAspect="1"/>
+          </p:cNvPicPr>
+          <p:nvPr/>
+        </p:nvPicPr>
+        <p:blipFill>
+          <a:blip r:embed="rId17"/>
+          <a:stretch>
+            <a:fillRect/>
+          </a:stretch>
+        </p:blipFill>
+        <p:spPr>
+          <a:xfrm>
+            <a:off x="9829799" y="5215791"/>
+            <a:ext cx="415975" cy="415975"/>
+          </a:xfrm>
+          <a:prstGeom prst="rect">
+            <a:avLst/>
+          </a:prstGeom>
+        </p:spPr>
+      </p:pic>
+      <p:sp>
+        <p:nvSpPr>
+          <p:cNvPr id="72" name="TextBox 27">
+            <a:extLst>
+              <a:ext uri="{FF2B5EF4-FFF2-40B4-BE49-F238E27FC236}">
+                <a16:creationId xmlns:a16="http://schemas.microsoft.com/office/drawing/2014/main" id="{572BDCAC-46F6-67BF-58FA-468D93302A59}"/>
+              </a:ext>
+            </a:extLst>
+          </p:cNvPr>
+          <p:cNvSpPr txBox="1"/>
+          <p:nvPr/>
+        </p:nvSpPr>
+        <p:spPr>
+          <a:xfrm>
+            <a:off x="10387502" y="5257520"/>
+            <a:ext cx="5385898" cy="492443"/>
+          </a:xfrm>
+          <a:prstGeom prst="rect">
+            <a:avLst/>
+          </a:prstGeom>
+          <a:noFill/>
+        </p:spPr>
+        <p:txBody>
+          <a:bodyPr wrap="square" lIns="0" tIns="0" rIns="0" bIns="0" anchor="t">
+            <a:spAutoFit/>
+          </a:bodyPr>
+          <a:lstStyle/>
+          <a:p>
+            <a:pPr algn="l"/>
+            <a:r>
+              <a:rPr lang="es-CL" sz="1600" b="1" i="0" u="none" noProof="0" dirty="0">
+                <a:solidFill>
+                  <a:srgbClr val="1E293B"/>
+                </a:solidFill>
+                <a:latin typeface="Source Sans 3" panose="020B0604020202020204" charset="0"/>
+              </a:rPr>
+              <a:t>Complejidad Técnica de Integración</a:t>
+            </a:r>
+            <a:r>
+              <a:rPr lang="es-CL" sz="1600" b="0" i="0" u="none" noProof="0" dirty="0">
+                <a:solidFill>
+                  <a:srgbClr val="334155"/>
+                </a:solidFill>
+                <a:latin typeface="Source Sans 3" panose="020B0604020202020204" charset="0"/>
+              </a:rPr>
+              <a:t> </a:t>
+            </a:r>
+            <a:r>
+              <a:rPr lang="es-CL" sz="1600" b="0" i="0" u="none" noProof="0" dirty="0">
+                <a:solidFill>
+                  <a:srgbClr val="64748B"/>
+                </a:solidFill>
+                <a:latin typeface="Source Sans 3" panose="020B0604020202020204" charset="0"/>
+              </a:rPr>
+              <a:t>Manejo de protocolos de seguridad y heterogeneidad de fuentes</a:t>
+            </a:r>
+          </a:p>
+        </p:txBody>
+      </p:sp>
+      <p:pic>
+        <p:nvPicPr>
+          <p:cNvPr id="74" name="Picture 28" descr="image.png">
+            <a:extLst>
+              <a:ext uri="{FF2B5EF4-FFF2-40B4-BE49-F238E27FC236}">
+                <a16:creationId xmlns:a16="http://schemas.microsoft.com/office/drawing/2014/main" id="{D6ABBFCC-DF46-B4FC-60B6-025162808443}"/>
+              </a:ext>
+            </a:extLst>
+          </p:cNvPr>
+          <p:cNvPicPr>
+            <a:picLocks noChangeAspect="1"/>
+          </p:cNvPicPr>
+          <p:nvPr/>
+        </p:nvPicPr>
+        <p:blipFill>
+          <a:blip r:embed="rId18"/>
+          <a:stretch>
+            <a:fillRect/>
+          </a:stretch>
+        </p:blipFill>
+        <p:spPr>
+          <a:xfrm>
+            <a:off x="9829800" y="6099125"/>
+            <a:ext cx="415975" cy="415975"/>
+          </a:xfrm>
+          <a:prstGeom prst="rect">
+            <a:avLst/>
+          </a:prstGeom>
+        </p:spPr>
+      </p:pic>
+      <p:sp>
+        <p:nvSpPr>
+          <p:cNvPr id="76" name="TextBox 29">
+            <a:extLst>
+              <a:ext uri="{FF2B5EF4-FFF2-40B4-BE49-F238E27FC236}">
+                <a16:creationId xmlns:a16="http://schemas.microsoft.com/office/drawing/2014/main" id="{2A4F1A48-7190-32B5-55EE-85E520662F22}"/>
+              </a:ext>
+            </a:extLst>
+          </p:cNvPr>
+          <p:cNvSpPr txBox="1"/>
+          <p:nvPr/>
+        </p:nvSpPr>
+        <p:spPr>
+          <a:xfrm>
+            <a:off x="10387502" y="6110414"/>
+            <a:ext cx="5385898" cy="492443"/>
+          </a:xfrm>
+          <a:prstGeom prst="rect">
+            <a:avLst/>
+          </a:prstGeom>
+          <a:noFill/>
+        </p:spPr>
+        <p:txBody>
+          <a:bodyPr wrap="square" lIns="0" tIns="0" rIns="0" bIns="0" anchor="t">
+            <a:spAutoFit/>
+          </a:bodyPr>
+          <a:lstStyle/>
+          <a:p>
+            <a:pPr algn="l"/>
+            <a:r>
+              <a:rPr lang="es-CL" sz="1600" b="1" i="0" u="none" noProof="0" dirty="0">
+                <a:solidFill>
+                  <a:srgbClr val="1E293B"/>
+                </a:solidFill>
+                <a:latin typeface="Source Sans 3" panose="020B0604020202020204" charset="0"/>
+              </a:rPr>
+              <a:t>Uso Inicial de Datos Sintéticos/Prueba</a:t>
+            </a:r>
+            <a:r>
+              <a:rPr lang="es-CL" sz="1600" b="0" i="0" u="none" noProof="0" dirty="0">
+                <a:solidFill>
+                  <a:srgbClr val="334155"/>
+                </a:solidFill>
+                <a:latin typeface="Source Sans 3" panose="020B0604020202020204" charset="0"/>
+              </a:rPr>
+              <a:t> </a:t>
+            </a:r>
+            <a:r>
+              <a:rPr lang="es-CL" sz="1600" b="0" i="0" u="none" noProof="0" dirty="0">
+                <a:solidFill>
+                  <a:srgbClr val="64748B"/>
+                </a:solidFill>
+                <a:latin typeface="Source Sans 3" panose="020B0604020202020204" charset="0"/>
+              </a:rPr>
+              <a:t>Validaciones preliminares basadas en </a:t>
+            </a:r>
+            <a:r>
+              <a:rPr lang="es-CL" sz="1600" b="0" i="0" u="none" noProof="0" dirty="0" err="1">
+                <a:solidFill>
+                  <a:srgbClr val="64748B"/>
+                </a:solidFill>
+                <a:latin typeface="Source Sans 3" panose="020B0604020202020204" charset="0"/>
+              </a:rPr>
+              <a:t>datasets</a:t>
+            </a:r>
+            <a:r>
+              <a:rPr lang="es-CL" sz="1600" b="0" i="0" u="none" noProof="0" dirty="0">
+                <a:solidFill>
+                  <a:srgbClr val="64748B"/>
+                </a:solidFill>
+                <a:latin typeface="Source Sans 3" panose="020B0604020202020204" charset="0"/>
+              </a:rPr>
+              <a:t> simulados</a:t>
+            </a:r>
+          </a:p>
+        </p:txBody>
+      </p:sp>
+      <p:pic>
+        <p:nvPicPr>
+          <p:cNvPr id="78" name="Picture 30" descr="image.png">
+            <a:extLst>
+              <a:ext uri="{FF2B5EF4-FFF2-40B4-BE49-F238E27FC236}">
+                <a16:creationId xmlns:a16="http://schemas.microsoft.com/office/drawing/2014/main" id="{A4C5393F-32A7-D614-DCE6-A12C1BD81DC4}"/>
+              </a:ext>
+            </a:extLst>
+          </p:cNvPr>
+          <p:cNvPicPr>
+            <a:picLocks noChangeAspect="1"/>
+          </p:cNvPicPr>
+          <p:nvPr/>
+        </p:nvPicPr>
+        <p:blipFill>
+          <a:blip r:embed="rId19"/>
+          <a:stretch>
+            <a:fillRect/>
+          </a:stretch>
+        </p:blipFill>
+        <p:spPr>
+          <a:xfrm>
+            <a:off x="9829800" y="7008743"/>
+            <a:ext cx="415975" cy="415975"/>
+          </a:xfrm>
+          <a:prstGeom prst="rect">
+            <a:avLst/>
+          </a:prstGeom>
+        </p:spPr>
+      </p:pic>
+      <p:sp>
+        <p:nvSpPr>
+          <p:cNvPr id="80" name="TextBox 31">
+            <a:extLst>
+              <a:ext uri="{FF2B5EF4-FFF2-40B4-BE49-F238E27FC236}">
+                <a16:creationId xmlns:a16="http://schemas.microsoft.com/office/drawing/2014/main" id="{D80C873B-1588-609A-966F-37F939B719C3}"/>
+              </a:ext>
+            </a:extLst>
+          </p:cNvPr>
+          <p:cNvSpPr txBox="1"/>
+          <p:nvPr/>
+        </p:nvSpPr>
+        <p:spPr>
+          <a:xfrm>
+            <a:off x="10387502" y="7019307"/>
+            <a:ext cx="5385898" cy="492443"/>
+          </a:xfrm>
+          <a:prstGeom prst="rect">
+            <a:avLst/>
+          </a:prstGeom>
+          <a:noFill/>
+        </p:spPr>
+        <p:txBody>
+          <a:bodyPr wrap="square" lIns="0" tIns="0" rIns="0" bIns="0" anchor="t">
+            <a:spAutoFit/>
+          </a:bodyPr>
+          <a:lstStyle/>
+          <a:p>
+            <a:pPr algn="l"/>
+            <a:r>
+              <a:rPr lang="es-CL" sz="1600" b="1" i="0" u="none" noProof="0" dirty="0">
+                <a:solidFill>
+                  <a:srgbClr val="1E293B"/>
+                </a:solidFill>
+                <a:latin typeface="Source Sans 3" panose="020B0604020202020204" charset="0"/>
+              </a:rPr>
+              <a:t>Desarrollo Modular y Escalable</a:t>
+            </a:r>
+            <a:r>
+              <a:rPr lang="es-CL" sz="1600" b="0" i="0" u="none" noProof="0" dirty="0">
+                <a:solidFill>
+                  <a:srgbClr val="334155"/>
+                </a:solidFill>
+                <a:latin typeface="Source Sans 3" panose="020B0604020202020204" charset="0"/>
+              </a:rPr>
+              <a:t> </a:t>
+            </a:r>
+            <a:r>
+              <a:rPr lang="es-CL" sz="1600" b="0" i="0" u="none" noProof="0" dirty="0">
+                <a:solidFill>
+                  <a:srgbClr val="64748B"/>
+                </a:solidFill>
+                <a:latin typeface="Source Sans 3" panose="020B0604020202020204" charset="0"/>
+              </a:rPr>
+              <a:t>Estrategia por fases para mitigar riesgos operativos</a:t>
+            </a:r>
+          </a:p>
+        </p:txBody>
+      </p:sp>
+      <p:pic>
+        <p:nvPicPr>
+          <p:cNvPr id="82" name="Gráfico 81">
+            <a:extLst>
+              <a:ext uri="{FF2B5EF4-FFF2-40B4-BE49-F238E27FC236}">
+                <a16:creationId xmlns:a16="http://schemas.microsoft.com/office/drawing/2014/main" id="{B7CBE6E5-11AE-F207-660A-951868EDE817}"/>
+              </a:ext>
+            </a:extLst>
+          </p:cNvPr>
+          <p:cNvPicPr>
+            <a:picLocks noChangeAspect="1"/>
+          </p:cNvPicPr>
+          <p:nvPr/>
+        </p:nvPicPr>
+        <p:blipFill>
+          <a:blip>
+            <a:extLst>
+              <a:ext uri="{96DAC541-7B7A-43D3-8B79-37D633B846F1}">
+                <asvg:svgBlip xmlns:asvg="http://schemas.microsoft.com/office/drawing/2016/SVG/main" r:embed="rId20"/>
+              </a:ext>
+            </a:extLst>
+          </a:blip>
+          <a:stretch>
+            <a:fillRect/>
+          </a:stretch>
+        </p:blipFill>
+        <p:spPr>
+          <a:xfrm>
+            <a:off x="9923982" y="4429510"/>
+            <a:ext cx="226871" cy="226871"/>
+          </a:xfrm>
+          <a:prstGeom prst="rect">
+            <a:avLst/>
+          </a:prstGeom>
+        </p:spPr>
+      </p:pic>
     </p:spTree>
   </p:cSld>
   <p:clrMapOvr>
@@ -8537,8 +8927,8 @@
         </p:nvGrpSpPr>
         <p:grpSpPr>
           <a:xfrm>
-            <a:off x="1047750" y="2619375"/>
-            <a:ext cx="2524125" cy="1809750"/>
+            <a:off x="685800" y="2619375"/>
+            <a:ext cx="2886075" cy="1809750"/>
             <a:chOff x="0" y="0"/>
             <a:chExt cx="3365500" cy="2413000"/>
           </a:xfrm>
@@ -8859,37 +9249,6 @@
           </p:txBody>
         </p:sp>
       </p:grpSp>
-      <p:sp>
-        <p:nvSpPr>
-          <p:cNvPr id="17" name="AutoShape 17"/>
-          <p:cNvSpPr/>
-          <p:nvPr/>
-        </p:nvSpPr>
-        <p:spPr>
-          <a:xfrm>
-            <a:off x="3524250" y="4286250"/>
-            <a:ext cx="523875" cy="571500"/>
-          </a:xfrm>
-          <a:prstGeom prst="line">
-            <a:avLst/>
-          </a:prstGeom>
-          <a:ln w="38100" cap="rnd">
-            <a:solidFill>
-              <a:srgbClr val="0878B9"/>
-            </a:solidFill>
-            <a:prstDash val="solid"/>
-            <a:headEnd type="none" w="sm" len="sm"/>
-            <a:tailEnd type="arrow" w="med" len="sm"/>
-          </a:ln>
-        </p:spPr>
-        <p:txBody>
-          <a:bodyPr/>
-          <a:lstStyle/>
-          <a:p>
-            <a:endParaRPr lang="es-CL" noProof="0" dirty="0"/>
-          </a:p>
-        </p:txBody>
-      </p:sp>
       <p:grpSp>
         <p:nvGrpSpPr>
           <p:cNvPr id="18" name="Group 18"/>
@@ -9220,37 +9579,6 @@
           </p:txBody>
         </p:sp>
       </p:grpSp>
-      <p:sp>
-        <p:nvSpPr>
-          <p:cNvPr id="28" name="AutoShape 28"/>
-          <p:cNvSpPr/>
-          <p:nvPr/>
-        </p:nvSpPr>
-        <p:spPr>
-          <a:xfrm>
-            <a:off x="6238875" y="5143500"/>
-            <a:ext cx="523875" cy="571500"/>
-          </a:xfrm>
-          <a:prstGeom prst="line">
-            <a:avLst/>
-          </a:prstGeom>
-          <a:ln w="38100" cap="rnd">
-            <a:solidFill>
-              <a:srgbClr val="0878B9"/>
-            </a:solidFill>
-            <a:prstDash val="solid"/>
-            <a:headEnd type="none" w="sm" len="sm"/>
-            <a:tailEnd type="arrow" w="med" len="sm"/>
-          </a:ln>
-        </p:spPr>
-        <p:txBody>
-          <a:bodyPr/>
-          <a:lstStyle/>
-          <a:p>
-            <a:endParaRPr lang="es-CL" noProof="0" dirty="0"/>
-          </a:p>
-        </p:txBody>
-      </p:sp>
       <p:grpSp>
         <p:nvGrpSpPr>
           <p:cNvPr id="29" name="Group 29"/>
@@ -9581,37 +9909,6 @@
           </p:txBody>
         </p:sp>
       </p:grpSp>
-      <p:sp>
-        <p:nvSpPr>
-          <p:cNvPr id="39" name="AutoShape 39"/>
-          <p:cNvSpPr/>
-          <p:nvPr/>
-        </p:nvSpPr>
-        <p:spPr>
-          <a:xfrm>
-            <a:off x="8953500" y="6000750"/>
-            <a:ext cx="523875" cy="571500"/>
-          </a:xfrm>
-          <a:prstGeom prst="line">
-            <a:avLst/>
-          </a:prstGeom>
-          <a:ln w="38100" cap="rnd">
-            <a:solidFill>
-              <a:srgbClr val="0878B9"/>
-            </a:solidFill>
-            <a:prstDash val="solid"/>
-            <a:headEnd type="none" w="sm" len="sm"/>
-            <a:tailEnd type="arrow" w="med" len="sm"/>
-          </a:ln>
-        </p:spPr>
-        <p:txBody>
-          <a:bodyPr/>
-          <a:lstStyle/>
-          <a:p>
-            <a:endParaRPr lang="es-CL" noProof="0" dirty="0"/>
-          </a:p>
-        </p:txBody>
-      </p:sp>
       <p:grpSp>
         <p:nvGrpSpPr>
           <p:cNvPr id="40" name="Group 40"/>
@@ -9942,37 +10239,6 @@
           </p:txBody>
         </p:sp>
       </p:grpSp>
-      <p:sp>
-        <p:nvSpPr>
-          <p:cNvPr id="50" name="AutoShape 50"/>
-          <p:cNvSpPr/>
-          <p:nvPr/>
-        </p:nvSpPr>
-        <p:spPr>
-          <a:xfrm>
-            <a:off x="11668125" y="6858000"/>
-            <a:ext cx="523875" cy="571500"/>
-          </a:xfrm>
-          <a:prstGeom prst="line">
-            <a:avLst/>
-          </a:prstGeom>
-          <a:ln w="38100" cap="rnd">
-            <a:solidFill>
-              <a:srgbClr val="0878B9"/>
-            </a:solidFill>
-            <a:prstDash val="solid"/>
-            <a:headEnd type="none" w="sm" len="sm"/>
-            <a:tailEnd type="arrow" w="med" len="sm"/>
-          </a:ln>
-        </p:spPr>
-        <p:txBody>
-          <a:bodyPr/>
-          <a:lstStyle/>
-          <a:p>
-            <a:endParaRPr lang="es-CL" noProof="0" dirty="0"/>
-          </a:p>
-        </p:txBody>
-      </p:sp>
       <p:grpSp>
         <p:nvGrpSpPr>
           <p:cNvPr id="51" name="Group 51"/>
@@ -9982,7 +10248,7 @@
         <p:grpSpPr>
           <a:xfrm>
             <a:off x="11906250" y="6048375"/>
-            <a:ext cx="2524125" cy="1809750"/>
+            <a:ext cx="2752725" cy="1809750"/>
             <a:chOff x="0" y="0"/>
             <a:chExt cx="3365500" cy="2413000"/>
           </a:xfrm>
@@ -10303,37 +10569,6 @@
           </p:txBody>
         </p:sp>
       </p:grpSp>
-      <p:sp>
-        <p:nvSpPr>
-          <p:cNvPr id="61" name="AutoShape 61"/>
-          <p:cNvSpPr/>
-          <p:nvPr/>
-        </p:nvSpPr>
-        <p:spPr>
-          <a:xfrm>
-            <a:off x="14382750" y="7715250"/>
-            <a:ext cx="523875" cy="571500"/>
-          </a:xfrm>
-          <a:prstGeom prst="line">
-            <a:avLst/>
-          </a:prstGeom>
-          <a:ln w="38100" cap="rnd">
-            <a:solidFill>
-              <a:srgbClr val="0878B9"/>
-            </a:solidFill>
-            <a:prstDash val="solid"/>
-            <a:headEnd type="none" w="sm" len="sm"/>
-            <a:tailEnd type="arrow" w="med" len="sm"/>
-          </a:ln>
-        </p:spPr>
-        <p:txBody>
-          <a:bodyPr/>
-          <a:lstStyle/>
-          <a:p>
-            <a:endParaRPr lang="es-CL" noProof="0" dirty="0"/>
-          </a:p>
-        </p:txBody>
-      </p:sp>
       <p:grpSp>
         <p:nvGrpSpPr>
           <p:cNvPr id="62" name="Group 62"/>
@@ -10342,7 +10577,7 @@
         </p:nvGrpSpPr>
         <p:grpSpPr>
           <a:xfrm>
-            <a:off x="14620875" y="6905625"/>
+            <a:off x="14849475" y="6905625"/>
             <a:ext cx="2524125" cy="1809750"/>
             <a:chOff x="0" y="0"/>
             <a:chExt cx="3365500" cy="2413000"/>
@@ -10870,6 +11105,251 @@
           </p:txBody>
         </p:sp>
       </p:grpSp>
+      <p:sp>
+        <p:nvSpPr>
+          <p:cNvPr id="74" name="Flecha: doblada hacia arriba 73">
+            <a:extLst>
+              <a:ext uri="{FF2B5EF4-FFF2-40B4-BE49-F238E27FC236}">
+                <a16:creationId xmlns:a16="http://schemas.microsoft.com/office/drawing/2014/main" id="{7B170458-BD8B-3CEB-1470-C1AF820E8C8D}"/>
+              </a:ext>
+            </a:extLst>
+          </p:cNvPr>
+          <p:cNvSpPr/>
+          <p:nvPr/>
+        </p:nvSpPr>
+        <p:spPr>
+          <a:xfrm flipV="1">
+            <a:off x="3648075" y="2990425"/>
+            <a:ext cx="1609725" cy="476675"/>
+          </a:xfrm>
+          <a:prstGeom prst="bentUpArrow">
+            <a:avLst/>
+          </a:prstGeom>
+          <a:solidFill>
+            <a:schemeClr val="bg1"/>
+          </a:solidFill>
+        </p:spPr>
+        <p:style>
+          <a:lnRef idx="2">
+            <a:schemeClr val="accent1">
+              <a:shade val="15000"/>
+            </a:schemeClr>
+          </a:lnRef>
+          <a:fillRef idx="1">
+            <a:schemeClr val="accent1"/>
+          </a:fillRef>
+          <a:effectRef idx="0">
+            <a:schemeClr val="accent1"/>
+          </a:effectRef>
+          <a:fontRef idx="minor">
+            <a:schemeClr val="lt1"/>
+          </a:fontRef>
+        </p:style>
+        <p:txBody>
+          <a:bodyPr rtlCol="0" anchor="ctr"/>
+          <a:lstStyle/>
+          <a:p>
+            <a:pPr algn="ctr"/>
+            <a:endParaRPr lang="es-CL"/>
+          </a:p>
+        </p:txBody>
+      </p:sp>
+      <p:sp>
+        <p:nvSpPr>
+          <p:cNvPr id="81" name="Flecha: doblada hacia arriba 80">
+            <a:extLst>
+              <a:ext uri="{FF2B5EF4-FFF2-40B4-BE49-F238E27FC236}">
+                <a16:creationId xmlns:a16="http://schemas.microsoft.com/office/drawing/2014/main" id="{03C85D4D-991D-3589-5969-032CE8F69214}"/>
+              </a:ext>
+            </a:extLst>
+          </p:cNvPr>
+          <p:cNvSpPr/>
+          <p:nvPr/>
+        </p:nvSpPr>
+        <p:spPr>
+          <a:xfrm flipV="1">
+            <a:off x="6338887" y="3823090"/>
+            <a:ext cx="1609725" cy="476675"/>
+          </a:xfrm>
+          <a:prstGeom prst="bentUpArrow">
+            <a:avLst/>
+          </a:prstGeom>
+          <a:solidFill>
+            <a:schemeClr val="bg1"/>
+          </a:solidFill>
+        </p:spPr>
+        <p:style>
+          <a:lnRef idx="2">
+            <a:schemeClr val="accent1">
+              <a:shade val="15000"/>
+            </a:schemeClr>
+          </a:lnRef>
+          <a:fillRef idx="1">
+            <a:schemeClr val="accent1"/>
+          </a:fillRef>
+          <a:effectRef idx="0">
+            <a:schemeClr val="accent1"/>
+          </a:effectRef>
+          <a:fontRef idx="minor">
+            <a:schemeClr val="lt1"/>
+          </a:fontRef>
+        </p:style>
+        <p:txBody>
+          <a:bodyPr rtlCol="0" anchor="ctr"/>
+          <a:lstStyle/>
+          <a:p>
+            <a:pPr algn="ctr"/>
+            <a:endParaRPr lang="es-CL"/>
+          </a:p>
+        </p:txBody>
+      </p:sp>
+      <p:sp>
+        <p:nvSpPr>
+          <p:cNvPr id="83" name="Flecha: doblada hacia arriba 82">
+            <a:extLst>
+              <a:ext uri="{FF2B5EF4-FFF2-40B4-BE49-F238E27FC236}">
+                <a16:creationId xmlns:a16="http://schemas.microsoft.com/office/drawing/2014/main" id="{CB8C19D6-37CD-2B39-C935-C8EABE421A5E}"/>
+              </a:ext>
+            </a:extLst>
+          </p:cNvPr>
+          <p:cNvSpPr/>
+          <p:nvPr/>
+        </p:nvSpPr>
+        <p:spPr>
+          <a:xfrm flipV="1">
+            <a:off x="9058275" y="4686300"/>
+            <a:ext cx="1609725" cy="476675"/>
+          </a:xfrm>
+          <a:prstGeom prst="bentUpArrow">
+            <a:avLst/>
+          </a:prstGeom>
+          <a:solidFill>
+            <a:schemeClr val="bg1"/>
+          </a:solidFill>
+        </p:spPr>
+        <p:style>
+          <a:lnRef idx="2">
+            <a:schemeClr val="accent1">
+              <a:shade val="15000"/>
+            </a:schemeClr>
+          </a:lnRef>
+          <a:fillRef idx="1">
+            <a:schemeClr val="accent1"/>
+          </a:fillRef>
+          <a:effectRef idx="0">
+            <a:schemeClr val="accent1"/>
+          </a:effectRef>
+          <a:fontRef idx="minor">
+            <a:schemeClr val="lt1"/>
+          </a:fontRef>
+        </p:style>
+        <p:txBody>
+          <a:bodyPr rtlCol="0" anchor="ctr"/>
+          <a:lstStyle/>
+          <a:p>
+            <a:pPr algn="ctr"/>
+            <a:endParaRPr lang="es-CL"/>
+          </a:p>
+        </p:txBody>
+      </p:sp>
+      <p:sp>
+        <p:nvSpPr>
+          <p:cNvPr id="85" name="Flecha: doblada hacia arriba 84">
+            <a:extLst>
+              <a:ext uri="{FF2B5EF4-FFF2-40B4-BE49-F238E27FC236}">
+                <a16:creationId xmlns:a16="http://schemas.microsoft.com/office/drawing/2014/main" id="{4FC8A0C4-E965-18CB-94EB-22272A742970}"/>
+              </a:ext>
+            </a:extLst>
+          </p:cNvPr>
+          <p:cNvSpPr/>
+          <p:nvPr/>
+        </p:nvSpPr>
+        <p:spPr>
+          <a:xfrm flipV="1">
+            <a:off x="11768137" y="5549265"/>
+            <a:ext cx="1609725" cy="476675"/>
+          </a:xfrm>
+          <a:prstGeom prst="bentUpArrow">
+            <a:avLst/>
+          </a:prstGeom>
+          <a:solidFill>
+            <a:schemeClr val="bg1"/>
+          </a:solidFill>
+        </p:spPr>
+        <p:style>
+          <a:lnRef idx="2">
+            <a:schemeClr val="accent1">
+              <a:shade val="15000"/>
+            </a:schemeClr>
+          </a:lnRef>
+          <a:fillRef idx="1">
+            <a:schemeClr val="accent1"/>
+          </a:fillRef>
+          <a:effectRef idx="0">
+            <a:schemeClr val="accent1"/>
+          </a:effectRef>
+          <a:fontRef idx="minor">
+            <a:schemeClr val="lt1"/>
+          </a:fontRef>
+        </p:style>
+        <p:txBody>
+          <a:bodyPr rtlCol="0" anchor="ctr"/>
+          <a:lstStyle/>
+          <a:p>
+            <a:pPr algn="ctr"/>
+            <a:endParaRPr lang="es-CL"/>
+          </a:p>
+        </p:txBody>
+      </p:sp>
+      <p:sp>
+        <p:nvSpPr>
+          <p:cNvPr id="87" name="Flecha: doblada hacia arriba 86">
+            <a:extLst>
+              <a:ext uri="{FF2B5EF4-FFF2-40B4-BE49-F238E27FC236}">
+                <a16:creationId xmlns:a16="http://schemas.microsoft.com/office/drawing/2014/main" id="{7ADC347E-E167-C312-6BA3-41A8FFF0C676}"/>
+              </a:ext>
+            </a:extLst>
+          </p:cNvPr>
+          <p:cNvSpPr/>
+          <p:nvPr/>
+        </p:nvSpPr>
+        <p:spPr>
+          <a:xfrm flipV="1">
+            <a:off x="14697075" y="6419425"/>
+            <a:ext cx="1609725" cy="476675"/>
+          </a:xfrm>
+          <a:prstGeom prst="bentUpArrow">
+            <a:avLst/>
+          </a:prstGeom>
+          <a:solidFill>
+            <a:schemeClr val="bg1"/>
+          </a:solidFill>
+        </p:spPr>
+        <p:style>
+          <a:lnRef idx="2">
+            <a:schemeClr val="accent1">
+              <a:shade val="15000"/>
+            </a:schemeClr>
+          </a:lnRef>
+          <a:fillRef idx="1">
+            <a:schemeClr val="accent1"/>
+          </a:fillRef>
+          <a:effectRef idx="0">
+            <a:schemeClr val="accent1"/>
+          </a:effectRef>
+          <a:fontRef idx="minor">
+            <a:schemeClr val="lt1"/>
+          </a:fontRef>
+        </p:style>
+        <p:txBody>
+          <a:bodyPr rtlCol="0" anchor="ctr"/>
+          <a:lstStyle/>
+          <a:p>
+            <a:pPr algn="ctr"/>
+            <a:endParaRPr lang="es-CL"/>
+          </a:p>
+        </p:txBody>
+      </p:sp>
     </p:spTree>
   </p:cSld>
   <p:clrMapOvr>
@@ -14410,4 +14890,319 @@
   <a:objectDefaults/>
   <a:extraClrSchemeLst/>
 </a:theme>
+</file>
+
+<file path=ppt/theme/theme2.xml><?xml version="1.0" encoding="utf-8"?>
+<a:theme xmlns:a="http://schemas.openxmlformats.org/drawingml/2006/main" name="Tema de Office">
+  <a:themeElements>
+    <a:clrScheme name="Office">
+      <a:dk1>
+        <a:sysClr val="windowText" lastClr="000000"/>
+      </a:dk1>
+      <a:lt1>
+        <a:sysClr val="window" lastClr="FFFFFF"/>
+      </a:lt1>
+      <a:dk2>
+        <a:srgbClr val="0E2841"/>
+      </a:dk2>
+      <a:lt2>
+        <a:srgbClr val="E8E8E8"/>
+      </a:lt2>
+      <a:accent1>
+        <a:srgbClr val="156082"/>
+      </a:accent1>
+      <a:accent2>
+        <a:srgbClr val="E97132"/>
+      </a:accent2>
+      <a:accent3>
+        <a:srgbClr val="196B24"/>
+      </a:accent3>
+      <a:accent4>
+        <a:srgbClr val="0F9ED5"/>
+      </a:accent4>
+      <a:accent5>
+        <a:srgbClr val="A02B93"/>
+      </a:accent5>
+      <a:accent6>
+        <a:srgbClr val="4EA72E"/>
+      </a:accent6>
+      <a:hlink>
+        <a:srgbClr val="467886"/>
+      </a:hlink>
+      <a:folHlink>
+        <a:srgbClr val="96607D"/>
+      </a:folHlink>
+    </a:clrScheme>
+    <a:fontScheme name="Office">
+      <a:majorFont>
+        <a:latin typeface="Aptos Display" panose="02110004020202020204"/>
+        <a:ea typeface=""/>
+        <a:cs typeface=""/>
+        <a:font script="Jpan" typeface="游ゴシック Light"/>
+        <a:font script="Hang" typeface="맑은 고딕"/>
+        <a:font script="Hans" typeface="等线 Light"/>
+        <a:font script="Hant" typeface="新細明體"/>
+        <a:font script="Arab" typeface="Times New Roman"/>
+        <a:font script="Hebr" typeface="Times New Roman"/>
+        <a:font script="Thai" typeface="Angsana New"/>
+        <a:font script="Ethi" typeface="Nyala"/>
+        <a:font script="Beng" typeface="Vrinda"/>
+        <a:font script="Gujr" typeface="Shruti"/>
+        <a:font script="Khmr" typeface="MoolBoran"/>
+        <a:font script="Knda" typeface="Tunga"/>
+        <a:font script="Guru" typeface="Raavi"/>
+        <a:font script="Cans" typeface="Euphemia"/>
+        <a:font script="Cher" typeface="Plantagenet Cherokee"/>
+        <a:font script="Yiii" typeface="Microsoft Yi Baiti"/>
+        <a:font script="Tibt" typeface="Microsoft Himalaya"/>
+        <a:font script="Thaa" typeface="MV Boli"/>
+        <a:font script="Deva" typeface="Mangal"/>
+        <a:font script="Telu" typeface="Gautami"/>
+        <a:font script="Taml" typeface="Latha"/>
+        <a:font script="Syrc" typeface="Estrangelo Edessa"/>
+        <a:font script="Orya" typeface="Kalinga"/>
+        <a:font script="Mlym" typeface="Kartika"/>
+        <a:font script="Laoo" typeface="DokChampa"/>
+        <a:font script="Sinh" typeface="Iskoola Pota"/>
+        <a:font script="Mong" typeface="Mongolian Baiti"/>
+        <a:font script="Viet" typeface="Times New Roman"/>
+        <a:font script="Uigh" typeface="Microsoft Uighur"/>
+        <a:font script="Geor" typeface="Sylfaen"/>
+        <a:font script="Armn" typeface="Arial"/>
+        <a:font script="Bugi" typeface="Leelawadee UI"/>
+        <a:font script="Bopo" typeface="Microsoft JhengHei"/>
+        <a:font script="Java" typeface="Javanese Text"/>
+        <a:font script="Lisu" typeface="Segoe UI"/>
+        <a:font script="Mymr" typeface="Myanmar Text"/>
+        <a:font script="Nkoo" typeface="Ebrima"/>
+        <a:font script="Olck" typeface="Nirmala UI"/>
+        <a:font script="Osma" typeface="Ebrima"/>
+        <a:font script="Phag" typeface="Phagspa"/>
+        <a:font script="Syrn" typeface="Estrangelo Edessa"/>
+        <a:font script="Syrj" typeface="Estrangelo Edessa"/>
+        <a:font script="Syre" typeface="Estrangelo Edessa"/>
+        <a:font script="Sora" typeface="Nirmala UI"/>
+        <a:font script="Tale" typeface="Microsoft Tai Le"/>
+        <a:font script="Talu" typeface="Microsoft New Tai Lue"/>
+        <a:font script="Tfng" typeface="Ebrima"/>
+      </a:majorFont>
+      <a:minorFont>
+        <a:latin typeface="Aptos" panose="02110004020202020204"/>
+        <a:ea typeface=""/>
+        <a:cs typeface=""/>
+        <a:font script="Jpan" typeface="游ゴシック"/>
+        <a:font script="Hang" typeface="맑은 고딕"/>
+        <a:font script="Hans" typeface="等线"/>
+        <a:font script="Hant" typeface="新細明體"/>
+        <a:font script="Arab" typeface="Arial"/>
+        <a:font script="Hebr" typeface="Arial"/>
+        <a:font script="Thai" typeface="Cordia New"/>
+        <a:font script="Ethi" typeface="Nyala"/>
+        <a:font script="Beng" typeface="Vrinda"/>
+        <a:font script="Gujr" typeface="Shruti"/>
+        <a:font script="Khmr" typeface="DaunPenh"/>
+        <a:font script="Knda" typeface="Tunga"/>
+        <a:font script="Guru" typeface="Raavi"/>
+        <a:font script="Cans" typeface="Euphemia"/>
+        <a:font script="Cher" typeface="Plantagenet Cherokee"/>
+        <a:font script="Yiii" typeface="Microsoft Yi Baiti"/>
+        <a:font script="Tibt" typeface="Microsoft Himalaya"/>
+        <a:font script="Thaa" typeface="MV Boli"/>
+        <a:font script="Deva" typeface="Mangal"/>
+        <a:font script="Telu" typeface="Gautami"/>
+        <a:font script="Taml" typeface="Latha"/>
+        <a:font script="Syrc" typeface="Estrangelo Edessa"/>
+        <a:font script="Orya" typeface="Kalinga"/>
+        <a:font script="Mlym" typeface="Kartika"/>
+        <a:font script="Laoo" typeface="DokChampa"/>
+        <a:font script="Sinh" typeface="Iskoola Pota"/>
+        <a:font script="Mong" typeface="Mongolian Baiti"/>
+        <a:font script="Viet" typeface="Arial"/>
+        <a:font script="Uigh" typeface="Microsoft Uighur"/>
+        <a:font script="Geor" typeface="Sylfaen"/>
+        <a:font script="Armn" typeface="Arial"/>
+        <a:font script="Bugi" typeface="Leelawadee UI"/>
+        <a:font script="Bopo" typeface="Microsoft JhengHei"/>
+        <a:font script="Java" typeface="Javanese Text"/>
+        <a:font script="Lisu" typeface="Segoe UI"/>
+        <a:font script="Mymr" typeface="Myanmar Text"/>
+        <a:font script="Nkoo" typeface="Ebrima"/>
+        <a:font script="Olck" typeface="Nirmala UI"/>
+        <a:font script="Osma" typeface="Ebrima"/>
+        <a:font script="Phag" typeface="Phagspa"/>
+        <a:font script="Syrn" typeface="Estrangelo Edessa"/>
+        <a:font script="Syrj" typeface="Estrangelo Edessa"/>
+        <a:font script="Syre" typeface="Estrangelo Edessa"/>
+        <a:font script="Sora" typeface="Nirmala UI"/>
+        <a:font script="Tale" typeface="Microsoft Tai Le"/>
+        <a:font script="Talu" typeface="Microsoft New Tai Lue"/>
+        <a:font script="Tfng" typeface="Ebrima"/>
+      </a:minorFont>
+    </a:fontScheme>
+    <a:fmtScheme name="Office">
+      <a:fillStyleLst>
+        <a:solidFill>
+          <a:schemeClr val="phClr"/>
+        </a:solidFill>
+        <a:gradFill rotWithShape="1">
+          <a:gsLst>
+            <a:gs pos="0">
+              <a:schemeClr val="phClr">
+                <a:lumMod val="110000"/>
+                <a:satMod val="105000"/>
+                <a:tint val="67000"/>
+              </a:schemeClr>
+            </a:gs>
+            <a:gs pos="50000">
+              <a:schemeClr val="phClr">
+                <a:lumMod val="105000"/>
+                <a:satMod val="103000"/>
+                <a:tint val="73000"/>
+              </a:schemeClr>
+            </a:gs>
+            <a:gs pos="100000">
+              <a:schemeClr val="phClr">
+                <a:lumMod val="105000"/>
+                <a:satMod val="109000"/>
+                <a:tint val="81000"/>
+              </a:schemeClr>
+            </a:gs>
+          </a:gsLst>
+          <a:lin ang="5400000" scaled="0"/>
+        </a:gradFill>
+        <a:gradFill rotWithShape="1">
+          <a:gsLst>
+            <a:gs pos="0">
+              <a:schemeClr val="phClr">
+                <a:satMod val="103000"/>
+                <a:lumMod val="102000"/>
+                <a:tint val="94000"/>
+              </a:schemeClr>
+            </a:gs>
+            <a:gs pos="50000">
+              <a:schemeClr val="phClr">
+                <a:satMod val="110000"/>
+                <a:lumMod val="100000"/>
+                <a:shade val="100000"/>
+              </a:schemeClr>
+            </a:gs>
+            <a:gs pos="100000">
+              <a:schemeClr val="phClr">
+                <a:lumMod val="99000"/>
+                <a:satMod val="120000"/>
+                <a:shade val="78000"/>
+              </a:schemeClr>
+            </a:gs>
+          </a:gsLst>
+          <a:lin ang="5400000" scaled="0"/>
+        </a:gradFill>
+      </a:fillStyleLst>
+      <a:lnStyleLst>
+        <a:ln w="12700" cap="flat" cmpd="sng" algn="ctr">
+          <a:solidFill>
+            <a:schemeClr val="phClr"/>
+          </a:solidFill>
+          <a:prstDash val="solid"/>
+          <a:miter lim="800000"/>
+        </a:ln>
+        <a:ln w="19050" cap="flat" cmpd="sng" algn="ctr">
+          <a:solidFill>
+            <a:schemeClr val="phClr"/>
+          </a:solidFill>
+          <a:prstDash val="solid"/>
+          <a:miter lim="800000"/>
+        </a:ln>
+        <a:ln w="25400" cap="flat" cmpd="sng" algn="ctr">
+          <a:solidFill>
+            <a:schemeClr val="phClr"/>
+          </a:solidFill>
+          <a:prstDash val="solid"/>
+          <a:miter lim="800000"/>
+        </a:ln>
+      </a:lnStyleLst>
+      <a:effectStyleLst>
+        <a:effectStyle>
+          <a:effectLst/>
+        </a:effectStyle>
+        <a:effectStyle>
+          <a:effectLst/>
+        </a:effectStyle>
+        <a:effectStyle>
+          <a:effectLst>
+            <a:outerShdw blurRad="57150" dist="19050" dir="5400000" algn="ctr" rotWithShape="0">
+              <a:srgbClr val="000000">
+                <a:alpha val="63000"/>
+              </a:srgbClr>
+            </a:outerShdw>
+          </a:effectLst>
+        </a:effectStyle>
+      </a:effectStyleLst>
+      <a:bgFillStyleLst>
+        <a:solidFill>
+          <a:schemeClr val="phClr"/>
+        </a:solidFill>
+        <a:solidFill>
+          <a:schemeClr val="phClr">
+            <a:tint val="95000"/>
+            <a:satMod val="170000"/>
+          </a:schemeClr>
+        </a:solidFill>
+        <a:gradFill rotWithShape="1">
+          <a:gsLst>
+            <a:gs pos="0">
+              <a:schemeClr val="phClr">
+                <a:tint val="93000"/>
+                <a:satMod val="150000"/>
+                <a:shade val="98000"/>
+                <a:lumMod val="102000"/>
+              </a:schemeClr>
+            </a:gs>
+            <a:gs pos="50000">
+              <a:schemeClr val="phClr">
+                <a:tint val="98000"/>
+                <a:satMod val="130000"/>
+                <a:shade val="90000"/>
+                <a:lumMod val="103000"/>
+              </a:schemeClr>
+            </a:gs>
+            <a:gs pos="100000">
+              <a:schemeClr val="phClr">
+                <a:shade val="63000"/>
+                <a:satMod val="120000"/>
+              </a:schemeClr>
+            </a:gs>
+          </a:gsLst>
+          <a:lin ang="5400000" scaled="0"/>
+        </a:gradFill>
+      </a:bgFillStyleLst>
+    </a:fmtScheme>
+  </a:themeElements>
+  <a:objectDefaults>
+    <a:lnDef>
+      <a:spPr/>
+      <a:bodyPr/>
+      <a:lstStyle/>
+      <a:style>
+        <a:lnRef idx="2">
+          <a:schemeClr val="accent1"/>
+        </a:lnRef>
+        <a:fillRef idx="0">
+          <a:schemeClr val="accent1"/>
+        </a:fillRef>
+        <a:effectRef idx="1">
+          <a:schemeClr val="accent1"/>
+        </a:effectRef>
+        <a:fontRef idx="minor">
+          <a:schemeClr val="tx1"/>
+        </a:fontRef>
+      </a:style>
+    </a:lnDef>
+  </a:objectDefaults>
+  <a:extraClrSchemeLst/>
+  <a:extLst>
+    <a:ext uri="{05A4C25C-085E-4340-85A3-A5531E510DB2}">
+      <thm15:themeFamily xmlns:thm15="http://schemas.microsoft.com/office/thememl/2012/main" name="Office Theme" id="{2E142A2C-CD16-42D6-873A-C26D2A0506FA}" vid="{1BDDFF52-6CD6-40A5-AB3C-68EB2F1E4D0A}"/>
+    </a:ext>
+  </a:extLst>
+</a:theme>
 </file>
--- a/Fase 1/Evidencias Grupales/Presentación Proyecto.pptx
+++ b/Fase 1/Evidencias Grupales/Presentación Proyecto.pptx
@@ -3921,92 +3921,6 @@
   <p:transition spd="med">
     <p:pull/>
   </p:transition>
-  <p:timing>
-    <p:tnLst>
-      <p:par>
-        <p:cTn id="1" dur="indefinite" restart="never" nodeType="tmRoot">
-          <p:childTnLst>
-            <p:seq concurrent="1" nextAc="seek">
-              <p:cTn id="2" dur="indefinite" nodeType="mainSeq">
-                <p:childTnLst>
-                  <p:par>
-                    <p:cTn id="3" fill="hold">
-                      <p:stCondLst>
-                        <p:cond delay="indefinite"/>
-                      </p:stCondLst>
-                      <p:childTnLst>
-                        <p:par>
-                          <p:cTn id="4" fill="hold">
-                            <p:stCondLst>
-                              <p:cond delay="0"/>
-                            </p:stCondLst>
-                            <p:childTnLst>
-                              <p:par>
-                                <p:cTn id="5" presetID="10" presetClass="entr" presetSubtype="0" fill="hold" grpId="0" nodeType="clickEffect">
-                                  <p:stCondLst>
-                                    <p:cond delay="0"/>
-                                  </p:stCondLst>
-                                  <p:childTnLst>
-                                    <p:set>
-                                      <p:cBhvr>
-                                        <p:cTn id="6" dur="1" fill="hold">
-                                          <p:stCondLst>
-                                            <p:cond delay="0"/>
-                                          </p:stCondLst>
-                                        </p:cTn>
-                                        <p:tgtEl>
-                                          <p:spTgt spid="2"/>
-                                        </p:tgtEl>
-                                        <p:attrNameLst>
-                                          <p:attrName>style.visibility</p:attrName>
-                                        </p:attrNameLst>
-                                      </p:cBhvr>
-                                      <p:to>
-                                        <p:strVal val="visible"/>
-                                      </p:to>
-                                    </p:set>
-                                    <p:animEffect transition="in" filter="fade">
-                                      <p:cBhvr>
-                                        <p:cTn id="7" dur="500"/>
-                                        <p:tgtEl>
-                                          <p:spTgt spid="2"/>
-                                        </p:tgtEl>
-                                      </p:cBhvr>
-                                    </p:animEffect>
-                                  </p:childTnLst>
-                                </p:cTn>
-                              </p:par>
-                            </p:childTnLst>
-                          </p:cTn>
-                        </p:par>
-                      </p:childTnLst>
-                    </p:cTn>
-                  </p:par>
-                </p:childTnLst>
-              </p:cTn>
-              <p:prevCondLst>
-                <p:cond evt="onPrev" delay="0">
-                  <p:tgtEl>
-                    <p:sldTgt/>
-                  </p:tgtEl>
-                </p:cond>
-              </p:prevCondLst>
-              <p:nextCondLst>
-                <p:cond evt="onNext" delay="0">
-                  <p:tgtEl>
-                    <p:sldTgt/>
-                  </p:tgtEl>
-                </p:cond>
-              </p:nextCondLst>
-            </p:seq>
-          </p:childTnLst>
-        </p:cTn>
-      </p:par>
-    </p:tnLst>
-    <p:bldLst>
-      <p:bldP spid="2" grpId="0" animBg="1"/>
-    </p:bldLst>
-  </p:timing>
 </p:sld>
 </file>
 
